--- a/probability_and_statistics/5_inference/confidence-interval.pptx
+++ b/probability_and_statistics/5_inference/confidence-interval.pptx
@@ -5,10 +5,10 @@
     <p:sldMasterId id="2147483648" r:id="rId1"/>
   </p:sldMasterIdLst>
   <p:notesMasterIdLst>
-    <p:notesMasterId r:id="rId15"/>
+    <p:notesMasterId r:id="rId19"/>
   </p:notesMasterIdLst>
   <p:handoutMasterIdLst>
-    <p:handoutMasterId r:id="rId16"/>
+    <p:handoutMasterId r:id="rId20"/>
   </p:handoutMasterIdLst>
   <p:sldIdLst>
     <p:sldId id="257" r:id="rId2"/>
@@ -20,10 +20,14 @@
     <p:sldId id="267" r:id="rId8"/>
     <p:sldId id="265" r:id="rId9"/>
     <p:sldId id="264" r:id="rId10"/>
-    <p:sldId id="272" r:id="rId11"/>
-    <p:sldId id="271" r:id="rId12"/>
-    <p:sldId id="270" r:id="rId13"/>
-    <p:sldId id="275" r:id="rId14"/>
+    <p:sldId id="277" r:id="rId11"/>
+    <p:sldId id="272" r:id="rId12"/>
+    <p:sldId id="278" r:id="rId13"/>
+    <p:sldId id="279" r:id="rId14"/>
+    <p:sldId id="271" r:id="rId15"/>
+    <p:sldId id="280" r:id="rId16"/>
+    <p:sldId id="275" r:id="rId17"/>
+    <p:sldId id="270" r:id="rId18"/>
   </p:sldIdLst>
   <p:sldSz cx="12192000" cy="6858000"/>
   <p:notesSz cx="6858000" cy="9144000"/>
@@ -227,7 +231,7 @@
           <a:p>
             <a:fld id="{7BAEECA8-D063-486F-AE31-5020270C1449}" type="datetimeFigureOut">
               <a:rPr lang="en-US" smtClean="0"/>
-              <a:t>10/23/2025</a:t>
+              <a:t>4/8/2026</a:t>
             </a:fld>
             <a:endParaRPr lang="en-US"/>
           </a:p>
@@ -404,7 +408,7 @@
           <a:p>
             <a:fld id="{CB233BD1-3BA8-448D-9D08-7846095EA517}" type="datetimeFigureOut">
               <a:rPr lang="en-US" smtClean="0"/>
-              <a:t>10/23/2025</a:t>
+              <a:t>4/8/2026</a:t>
             </a:fld>
             <a:endParaRPr lang="en-US"/>
           </a:p>
@@ -760,7 +764,7 @@
           <a:p>
             <a:fld id="{6C63499C-1FAC-4F66-96F8-6DA2CC28B748}" type="slidenum">
               <a:rPr lang="en-US" smtClean="0"/>
-              <a:t>10</a:t>
+              <a:t>11</a:t>
             </a:fld>
             <a:endParaRPr lang="en-US"/>
           </a:p>
@@ -780,6 +784,222 @@
 </file>
 
 <file path=ppt/notesSlides/notesSlide2.xml><?xml version="1.0" encoding="utf-8"?>
+<p:notes xmlns:a="http://schemas.openxmlformats.org/drawingml/2006/main" xmlns:r="http://schemas.openxmlformats.org/officeDocument/2006/relationships" xmlns:p="http://schemas.openxmlformats.org/presentationml/2006/main">
+  <p:cSld>
+    <p:spTree>
+      <p:nvGrpSpPr>
+        <p:cNvPr id="1" name="">
+          <a:extLst>
+            <a:ext uri="{FF2B5EF4-FFF2-40B4-BE49-F238E27FC236}">
+              <a16:creationId xmlns:a16="http://schemas.microsoft.com/office/drawing/2014/main" id="{434EDF49-B97E-6AEF-5DF5-9B8CAF936352}"/>
+            </a:ext>
+          </a:extLst>
+        </p:cNvPr>
+        <p:cNvGrpSpPr/>
+        <p:nvPr/>
+      </p:nvGrpSpPr>
+      <p:grpSpPr>
+        <a:xfrm>
+          <a:off x="0" y="0"/>
+          <a:ext cx="0" cy="0"/>
+          <a:chOff x="0" y="0"/>
+          <a:chExt cx="0" cy="0"/>
+        </a:xfrm>
+      </p:grpSpPr>
+      <p:sp>
+        <p:nvSpPr>
+          <p:cNvPr id="2" name="Slide Image Placeholder 1">
+            <a:extLst>
+              <a:ext uri="{FF2B5EF4-FFF2-40B4-BE49-F238E27FC236}">
+                <a16:creationId xmlns:a16="http://schemas.microsoft.com/office/drawing/2014/main" id="{B77FA4A9-9BAB-BCF2-74EB-F38E2C113E05}"/>
+              </a:ext>
+            </a:extLst>
+          </p:cNvPr>
+          <p:cNvSpPr>
+            <a:spLocks noGrp="1" noRot="1" noChangeAspect="1"/>
+          </p:cNvSpPr>
+          <p:nvPr>
+            <p:ph type="sldImg"/>
+          </p:nvPr>
+        </p:nvSpPr>
+        <p:spPr/>
+      </p:sp>
+      <p:sp>
+        <p:nvSpPr>
+          <p:cNvPr id="3" name="Notes Placeholder 2">
+            <a:extLst>
+              <a:ext uri="{FF2B5EF4-FFF2-40B4-BE49-F238E27FC236}">
+                <a16:creationId xmlns:a16="http://schemas.microsoft.com/office/drawing/2014/main" id="{1617C23C-3AF4-C634-5CCA-A93B0442BBE9}"/>
+              </a:ext>
+            </a:extLst>
+          </p:cNvPr>
+          <p:cNvSpPr>
+            <a:spLocks noGrp="1"/>
+          </p:cNvSpPr>
+          <p:nvPr>
+            <p:ph type="body" idx="1"/>
+          </p:nvPr>
+        </p:nvSpPr>
+        <p:spPr/>
+        <p:txBody>
+          <a:bodyPr/>
+          <a:lstStyle/>
+          <a:p>
+            <a:endParaRPr lang="en-US" dirty="0"/>
+          </a:p>
+        </p:txBody>
+      </p:sp>
+      <p:sp>
+        <p:nvSpPr>
+          <p:cNvPr id="4" name="Slide Number Placeholder 3">
+            <a:extLst>
+              <a:ext uri="{FF2B5EF4-FFF2-40B4-BE49-F238E27FC236}">
+                <a16:creationId xmlns:a16="http://schemas.microsoft.com/office/drawing/2014/main" id="{0D0FFBF4-58D2-1C41-E37B-E4A1004E8C44}"/>
+              </a:ext>
+            </a:extLst>
+          </p:cNvPr>
+          <p:cNvSpPr>
+            <a:spLocks noGrp="1"/>
+          </p:cNvSpPr>
+          <p:nvPr>
+            <p:ph type="sldNum" sz="quarter" idx="5"/>
+          </p:nvPr>
+        </p:nvSpPr>
+        <p:spPr/>
+        <p:txBody>
+          <a:bodyPr/>
+          <a:lstStyle/>
+          <a:p>
+            <a:fld id="{6C63499C-1FAC-4F66-96F8-6DA2CC28B748}" type="slidenum">
+              <a:rPr lang="en-US" smtClean="0"/>
+              <a:t>12</a:t>
+            </a:fld>
+            <a:endParaRPr lang="en-US"/>
+          </a:p>
+        </p:txBody>
+      </p:sp>
+    </p:spTree>
+    <p:extLst>
+      <p:ext uri="{BB962C8B-B14F-4D97-AF65-F5344CB8AC3E}">
+        <p14:creationId xmlns:p14="http://schemas.microsoft.com/office/powerpoint/2010/main" val="482739932"/>
+      </p:ext>
+    </p:extLst>
+  </p:cSld>
+  <p:clrMapOvr>
+    <a:masterClrMapping/>
+  </p:clrMapOvr>
+</p:notes>
+</file>
+
+<file path=ppt/notesSlides/notesSlide3.xml><?xml version="1.0" encoding="utf-8"?>
+<p:notes xmlns:a="http://schemas.openxmlformats.org/drawingml/2006/main" xmlns:r="http://schemas.openxmlformats.org/officeDocument/2006/relationships" xmlns:p="http://schemas.openxmlformats.org/presentationml/2006/main">
+  <p:cSld>
+    <p:spTree>
+      <p:nvGrpSpPr>
+        <p:cNvPr id="1" name="">
+          <a:extLst>
+            <a:ext uri="{FF2B5EF4-FFF2-40B4-BE49-F238E27FC236}">
+              <a16:creationId xmlns:a16="http://schemas.microsoft.com/office/drawing/2014/main" id="{86866082-1B1F-99E5-1A69-32837B0A2853}"/>
+            </a:ext>
+          </a:extLst>
+        </p:cNvPr>
+        <p:cNvGrpSpPr/>
+        <p:nvPr/>
+      </p:nvGrpSpPr>
+      <p:grpSpPr>
+        <a:xfrm>
+          <a:off x="0" y="0"/>
+          <a:ext cx="0" cy="0"/>
+          <a:chOff x="0" y="0"/>
+          <a:chExt cx="0" cy="0"/>
+        </a:xfrm>
+      </p:grpSpPr>
+      <p:sp>
+        <p:nvSpPr>
+          <p:cNvPr id="2" name="Slide Image Placeholder 1">
+            <a:extLst>
+              <a:ext uri="{FF2B5EF4-FFF2-40B4-BE49-F238E27FC236}">
+                <a16:creationId xmlns:a16="http://schemas.microsoft.com/office/drawing/2014/main" id="{B68FE1AC-6943-1251-5D31-F60A41C808E0}"/>
+              </a:ext>
+            </a:extLst>
+          </p:cNvPr>
+          <p:cNvSpPr>
+            <a:spLocks noGrp="1" noRot="1" noChangeAspect="1"/>
+          </p:cNvSpPr>
+          <p:nvPr>
+            <p:ph type="sldImg"/>
+          </p:nvPr>
+        </p:nvSpPr>
+        <p:spPr/>
+      </p:sp>
+      <p:sp>
+        <p:nvSpPr>
+          <p:cNvPr id="3" name="Notes Placeholder 2">
+            <a:extLst>
+              <a:ext uri="{FF2B5EF4-FFF2-40B4-BE49-F238E27FC236}">
+                <a16:creationId xmlns:a16="http://schemas.microsoft.com/office/drawing/2014/main" id="{90EDB0E4-A21F-26DE-F9DC-25505D4B2389}"/>
+              </a:ext>
+            </a:extLst>
+          </p:cNvPr>
+          <p:cNvSpPr>
+            <a:spLocks noGrp="1"/>
+          </p:cNvSpPr>
+          <p:nvPr>
+            <p:ph type="body" idx="1"/>
+          </p:nvPr>
+        </p:nvSpPr>
+        <p:spPr/>
+        <p:txBody>
+          <a:bodyPr/>
+          <a:lstStyle/>
+          <a:p>
+            <a:endParaRPr lang="en-US" dirty="0"/>
+          </a:p>
+        </p:txBody>
+      </p:sp>
+      <p:sp>
+        <p:nvSpPr>
+          <p:cNvPr id="4" name="Slide Number Placeholder 3">
+            <a:extLst>
+              <a:ext uri="{FF2B5EF4-FFF2-40B4-BE49-F238E27FC236}">
+                <a16:creationId xmlns:a16="http://schemas.microsoft.com/office/drawing/2014/main" id="{B2865899-32D5-1BC2-2C0B-F062DDC652B7}"/>
+              </a:ext>
+            </a:extLst>
+          </p:cNvPr>
+          <p:cNvSpPr>
+            <a:spLocks noGrp="1"/>
+          </p:cNvSpPr>
+          <p:nvPr>
+            <p:ph type="sldNum" sz="quarter" idx="5"/>
+          </p:nvPr>
+        </p:nvSpPr>
+        <p:spPr/>
+        <p:txBody>
+          <a:bodyPr/>
+          <a:lstStyle/>
+          <a:p>
+            <a:fld id="{6C63499C-1FAC-4F66-96F8-6DA2CC28B748}" type="slidenum">
+              <a:rPr lang="en-US" smtClean="0"/>
+              <a:t>13</a:t>
+            </a:fld>
+            <a:endParaRPr lang="en-US"/>
+          </a:p>
+        </p:txBody>
+      </p:sp>
+    </p:spTree>
+    <p:extLst>
+      <p:ext uri="{BB962C8B-B14F-4D97-AF65-F5344CB8AC3E}">
+        <p14:creationId xmlns:p14="http://schemas.microsoft.com/office/powerpoint/2010/main" val="1484382744"/>
+      </p:ext>
+    </p:extLst>
+  </p:cSld>
+  <p:clrMapOvr>
+    <a:masterClrMapping/>
+  </p:clrMapOvr>
+</p:notes>
+</file>
+
+<file path=ppt/notesSlides/notesSlide4.xml><?xml version="1.0" encoding="utf-8"?>
 <p:notes xmlns:a="http://schemas.openxmlformats.org/drawingml/2006/main" xmlns:r="http://schemas.openxmlformats.org/officeDocument/2006/relationships" xmlns:p="http://schemas.openxmlformats.org/presentationml/2006/main">
   <p:cSld>
     <p:spTree>
@@ -868,7 +1088,7 @@
           <a:p>
             <a:fld id="{6C63499C-1FAC-4F66-96F8-6DA2CC28B748}" type="slidenum">
               <a:rPr lang="en-US" smtClean="0"/>
-              <a:t>11</a:t>
+              <a:t>14</a:t>
             </a:fld>
             <a:endParaRPr lang="en-US"/>
           </a:p>
@@ -878,6 +1098,114 @@
     <p:extLst>
       <p:ext uri="{BB962C8B-B14F-4D97-AF65-F5344CB8AC3E}">
         <p14:creationId xmlns:p14="http://schemas.microsoft.com/office/powerpoint/2010/main" val="3433489481"/>
+      </p:ext>
+    </p:extLst>
+  </p:cSld>
+  <p:clrMapOvr>
+    <a:masterClrMapping/>
+  </p:clrMapOvr>
+</p:notes>
+</file>
+
+<file path=ppt/notesSlides/notesSlide5.xml><?xml version="1.0" encoding="utf-8"?>
+<p:notes xmlns:a="http://schemas.openxmlformats.org/drawingml/2006/main" xmlns:r="http://schemas.openxmlformats.org/officeDocument/2006/relationships" xmlns:p="http://schemas.openxmlformats.org/presentationml/2006/main">
+  <p:cSld>
+    <p:spTree>
+      <p:nvGrpSpPr>
+        <p:cNvPr id="1" name="">
+          <a:extLst>
+            <a:ext uri="{FF2B5EF4-FFF2-40B4-BE49-F238E27FC236}">
+              <a16:creationId xmlns:a16="http://schemas.microsoft.com/office/drawing/2014/main" id="{5386C00C-57EF-4CA6-7093-4D5CD80C66D4}"/>
+            </a:ext>
+          </a:extLst>
+        </p:cNvPr>
+        <p:cNvGrpSpPr/>
+        <p:nvPr/>
+      </p:nvGrpSpPr>
+      <p:grpSpPr>
+        <a:xfrm>
+          <a:off x="0" y="0"/>
+          <a:ext cx="0" cy="0"/>
+          <a:chOff x="0" y="0"/>
+          <a:chExt cx="0" cy="0"/>
+        </a:xfrm>
+      </p:grpSpPr>
+      <p:sp>
+        <p:nvSpPr>
+          <p:cNvPr id="2" name="Slide Image Placeholder 1">
+            <a:extLst>
+              <a:ext uri="{FF2B5EF4-FFF2-40B4-BE49-F238E27FC236}">
+                <a16:creationId xmlns:a16="http://schemas.microsoft.com/office/drawing/2014/main" id="{3A4A555C-38C4-0109-DA43-EBA9924607E5}"/>
+              </a:ext>
+            </a:extLst>
+          </p:cNvPr>
+          <p:cNvSpPr>
+            <a:spLocks noGrp="1" noRot="1" noChangeAspect="1"/>
+          </p:cNvSpPr>
+          <p:nvPr>
+            <p:ph type="sldImg"/>
+          </p:nvPr>
+        </p:nvSpPr>
+        <p:spPr/>
+      </p:sp>
+      <p:sp>
+        <p:nvSpPr>
+          <p:cNvPr id="3" name="Notes Placeholder 2">
+            <a:extLst>
+              <a:ext uri="{FF2B5EF4-FFF2-40B4-BE49-F238E27FC236}">
+                <a16:creationId xmlns:a16="http://schemas.microsoft.com/office/drawing/2014/main" id="{6F61855A-3F61-42B0-5778-8B4891885E64}"/>
+              </a:ext>
+            </a:extLst>
+          </p:cNvPr>
+          <p:cNvSpPr>
+            <a:spLocks noGrp="1"/>
+          </p:cNvSpPr>
+          <p:nvPr>
+            <p:ph type="body" idx="1"/>
+          </p:nvPr>
+        </p:nvSpPr>
+        <p:spPr/>
+        <p:txBody>
+          <a:bodyPr/>
+          <a:lstStyle/>
+          <a:p>
+            <a:endParaRPr lang="en-US" dirty="0"/>
+          </a:p>
+        </p:txBody>
+      </p:sp>
+      <p:sp>
+        <p:nvSpPr>
+          <p:cNvPr id="4" name="Slide Number Placeholder 3">
+            <a:extLst>
+              <a:ext uri="{FF2B5EF4-FFF2-40B4-BE49-F238E27FC236}">
+                <a16:creationId xmlns:a16="http://schemas.microsoft.com/office/drawing/2014/main" id="{8F168531-51AD-118A-6419-0241EB4C152F}"/>
+              </a:ext>
+            </a:extLst>
+          </p:cNvPr>
+          <p:cNvSpPr>
+            <a:spLocks noGrp="1"/>
+          </p:cNvSpPr>
+          <p:nvPr>
+            <p:ph type="sldNum" sz="quarter" idx="5"/>
+          </p:nvPr>
+        </p:nvSpPr>
+        <p:spPr/>
+        <p:txBody>
+          <a:bodyPr/>
+          <a:lstStyle/>
+          <a:p>
+            <a:fld id="{6C63499C-1FAC-4F66-96F8-6DA2CC28B748}" type="slidenum">
+              <a:rPr lang="en-US" smtClean="0"/>
+              <a:t>15</a:t>
+            </a:fld>
+            <a:endParaRPr lang="en-US"/>
+          </a:p>
+        </p:txBody>
+      </p:sp>
+    </p:spTree>
+    <p:extLst>
+      <p:ext uri="{BB962C8B-B14F-4D97-AF65-F5344CB8AC3E}">
+        <p14:creationId xmlns:p14="http://schemas.microsoft.com/office/powerpoint/2010/main" val="1439860986"/>
       </p:ext>
     </p:extLst>
   </p:cSld>
@@ -1034,7 +1362,7 @@
           <a:p>
             <a:fld id="{6383FAE1-13DE-4511-8C1B-C8AFB720664C}" type="datetimeFigureOut">
               <a:rPr lang="en-US" smtClean="0"/>
-              <a:t>10/23/2025</a:t>
+              <a:t>4/8/2026</a:t>
             </a:fld>
             <a:endParaRPr lang="en-US"/>
           </a:p>
@@ -1232,7 +1560,7 @@
           <a:p>
             <a:fld id="{6383FAE1-13DE-4511-8C1B-C8AFB720664C}" type="datetimeFigureOut">
               <a:rPr lang="en-US" smtClean="0"/>
-              <a:t>10/23/2025</a:t>
+              <a:t>4/8/2026</a:t>
             </a:fld>
             <a:endParaRPr lang="en-US"/>
           </a:p>
@@ -1440,7 +1768,7 @@
           <a:p>
             <a:fld id="{6383FAE1-13DE-4511-8C1B-C8AFB720664C}" type="datetimeFigureOut">
               <a:rPr lang="en-US" smtClean="0"/>
-              <a:t>10/23/2025</a:t>
+              <a:t>4/8/2026</a:t>
             </a:fld>
             <a:endParaRPr lang="en-US"/>
           </a:p>
@@ -1638,7 +1966,7 @@
           <a:p>
             <a:fld id="{6383FAE1-13DE-4511-8C1B-C8AFB720664C}" type="datetimeFigureOut">
               <a:rPr lang="en-US" smtClean="0"/>
-              <a:t>10/23/2025</a:t>
+              <a:t>4/8/2026</a:t>
             </a:fld>
             <a:endParaRPr lang="en-US"/>
           </a:p>
@@ -1913,7 +2241,7 @@
           <a:p>
             <a:fld id="{6383FAE1-13DE-4511-8C1B-C8AFB720664C}" type="datetimeFigureOut">
               <a:rPr lang="en-US" smtClean="0"/>
-              <a:t>10/23/2025</a:t>
+              <a:t>4/8/2026</a:t>
             </a:fld>
             <a:endParaRPr lang="en-US"/>
           </a:p>
@@ -2178,7 +2506,7 @@
           <a:p>
             <a:fld id="{6383FAE1-13DE-4511-8C1B-C8AFB720664C}" type="datetimeFigureOut">
               <a:rPr lang="en-US" smtClean="0"/>
-              <a:t>10/23/2025</a:t>
+              <a:t>4/8/2026</a:t>
             </a:fld>
             <a:endParaRPr lang="en-US"/>
           </a:p>
@@ -2590,7 +2918,7 @@
           <a:p>
             <a:fld id="{6383FAE1-13DE-4511-8C1B-C8AFB720664C}" type="datetimeFigureOut">
               <a:rPr lang="en-US" smtClean="0"/>
-              <a:t>10/23/2025</a:t>
+              <a:t>4/8/2026</a:t>
             </a:fld>
             <a:endParaRPr lang="en-US"/>
           </a:p>
@@ -2731,7 +3059,7 @@
           <a:p>
             <a:fld id="{6383FAE1-13DE-4511-8C1B-C8AFB720664C}" type="datetimeFigureOut">
               <a:rPr lang="en-US" smtClean="0"/>
-              <a:t>10/23/2025</a:t>
+              <a:t>4/8/2026</a:t>
             </a:fld>
             <a:endParaRPr lang="en-US"/>
           </a:p>
@@ -2844,7 +3172,7 @@
           <a:p>
             <a:fld id="{6383FAE1-13DE-4511-8C1B-C8AFB720664C}" type="datetimeFigureOut">
               <a:rPr lang="en-US" smtClean="0"/>
-              <a:t>10/23/2025</a:t>
+              <a:t>4/8/2026</a:t>
             </a:fld>
             <a:endParaRPr lang="en-US"/>
           </a:p>
@@ -3155,7 +3483,7 @@
           <a:p>
             <a:fld id="{6383FAE1-13DE-4511-8C1B-C8AFB720664C}" type="datetimeFigureOut">
               <a:rPr lang="en-US" smtClean="0"/>
-              <a:t>10/23/2025</a:t>
+              <a:t>4/8/2026</a:t>
             </a:fld>
             <a:endParaRPr lang="en-US"/>
           </a:p>
@@ -3446,7 +3774,7 @@
           <a:p>
             <a:fld id="{6383FAE1-13DE-4511-8C1B-C8AFB720664C}" type="datetimeFigureOut">
               <a:rPr lang="en-US" smtClean="0"/>
-              <a:t>10/23/2025</a:t>
+              <a:t>4/8/2026</a:t>
             </a:fld>
             <a:endParaRPr lang="en-US"/>
           </a:p>
@@ -3690,7 +4018,7 @@
           <a:p>
             <a:fld id="{6383FAE1-13DE-4511-8C1B-C8AFB720664C}" type="datetimeFigureOut">
               <a:rPr lang="en-US" smtClean="0"/>
-              <a:t>10/23/2025</a:t>
+              <a:t>4/8/2026</a:t>
             </a:fld>
             <a:endParaRPr lang="en-US"/>
           </a:p>
@@ -4398,7 +4726,7 @@
         <p:cNvPr id="1" name="">
           <a:extLst>
             <a:ext uri="{FF2B5EF4-FFF2-40B4-BE49-F238E27FC236}">
-              <a16:creationId xmlns:a16="http://schemas.microsoft.com/office/drawing/2014/main" id="{0C1EA716-FD29-D713-C9E6-F8040D80256F}"/>
+              <a16:creationId xmlns:a16="http://schemas.microsoft.com/office/drawing/2014/main" id="{4624D259-E412-5D3F-8795-4080ACDB9363}"/>
             </a:ext>
           </a:extLst>
         </p:cNvPr>
@@ -4418,7 +4746,7 @@
           <p:cNvPr id="6" name="Title 1">
             <a:extLst>
               <a:ext uri="{FF2B5EF4-FFF2-40B4-BE49-F238E27FC236}">
-                <a16:creationId xmlns:a16="http://schemas.microsoft.com/office/drawing/2014/main" id="{2C629600-A874-8576-5E52-03A36AD8AA24}"/>
+                <a16:creationId xmlns:a16="http://schemas.microsoft.com/office/drawing/2014/main" id="{6BB39252-51C1-3B83-8587-2DDCD070A1DF}"/>
               </a:ext>
             </a:extLst>
           </p:cNvPr>
@@ -4449,6 +4777,937 @@
           </a:p>
         </p:txBody>
       </p:sp>
+      <p:pic>
+        <p:nvPicPr>
+          <p:cNvPr id="7" name="Picture 6">
+            <a:extLst>
+              <a:ext uri="{FF2B5EF4-FFF2-40B4-BE49-F238E27FC236}">
+                <a16:creationId xmlns:a16="http://schemas.microsoft.com/office/drawing/2014/main" id="{2EC53478-0B41-4C36-B6AC-01CD5CBB718F}"/>
+              </a:ext>
+            </a:extLst>
+          </p:cNvPr>
+          <p:cNvPicPr>
+            <a:picLocks noChangeAspect="1"/>
+          </p:cNvPicPr>
+          <p:nvPr/>
+        </p:nvPicPr>
+        <p:blipFill>
+          <a:blip r:embed="rId2"/>
+          <a:stretch>
+            <a:fillRect/>
+          </a:stretch>
+        </p:blipFill>
+        <p:spPr>
+          <a:xfrm>
+            <a:off x="6994537" y="304043"/>
+            <a:ext cx="4262016" cy="604139"/>
+          </a:xfrm>
+          <a:prstGeom prst="rect">
+            <a:avLst/>
+          </a:prstGeom>
+        </p:spPr>
+      </p:pic>
+      <p:pic>
+        <p:nvPicPr>
+          <p:cNvPr id="11" name="Picture 10">
+            <a:extLst>
+              <a:ext uri="{FF2B5EF4-FFF2-40B4-BE49-F238E27FC236}">
+                <a16:creationId xmlns:a16="http://schemas.microsoft.com/office/drawing/2014/main" id="{6E12F8F6-ED7D-CE28-8E5B-0C3CDBC5103A}"/>
+              </a:ext>
+            </a:extLst>
+          </p:cNvPr>
+          <p:cNvPicPr>
+            <a:picLocks noChangeAspect="1"/>
+          </p:cNvPicPr>
+          <p:nvPr/>
+        </p:nvPicPr>
+        <p:blipFill>
+          <a:blip r:embed="rId3"/>
+          <a:stretch>
+            <a:fillRect/>
+          </a:stretch>
+        </p:blipFill>
+        <p:spPr>
+          <a:xfrm>
+            <a:off x="8642411" y="2715769"/>
+            <a:ext cx="3549589" cy="1875154"/>
+          </a:xfrm>
+          <a:prstGeom prst="rect">
+            <a:avLst/>
+          </a:prstGeom>
+        </p:spPr>
+      </p:pic>
+      <mc:AlternateContent xmlns:mc="http://schemas.openxmlformats.org/markup-compatibility/2006">
+        <mc:Choice xmlns:a14="http://schemas.microsoft.com/office/drawing/2010/main" Requires="a14">
+          <p:sp>
+            <p:nvSpPr>
+              <p:cNvPr id="3" name="TextBox 2">
+                <a:extLst>
+                  <a:ext uri="{FF2B5EF4-FFF2-40B4-BE49-F238E27FC236}">
+                    <a16:creationId xmlns:a16="http://schemas.microsoft.com/office/drawing/2014/main" id="{802C423F-920F-C3F1-77D6-93BA8A90F5C7}"/>
+                  </a:ext>
+                </a:extLst>
+              </p:cNvPr>
+              <p:cNvSpPr txBox="1"/>
+              <p:nvPr/>
+            </p:nvSpPr>
+            <p:spPr>
+              <a:xfrm>
+                <a:off x="156575" y="908182"/>
+                <a:ext cx="11374009" cy="4844596"/>
+              </a:xfrm>
+              <a:prstGeom prst="rect">
+                <a:avLst/>
+              </a:prstGeom>
+              <a:noFill/>
+            </p:spPr>
+            <p:txBody>
+              <a:bodyPr wrap="square">
+                <a:spAutoFit/>
+              </a:bodyPr>
+              <a:lstStyle/>
+              <a:p>
+                <a:pPr marL="0" indent="0">
+                  <a:buNone/>
+                </a:pPr>
+                <a:r>
+                  <a:rPr lang="en-US" sz="2400" dirty="0">
+                    <a:solidFill>
+                      <a:schemeClr val="accent6">
+                        <a:lumMod val="60000"/>
+                        <a:lumOff val="40000"/>
+                      </a:schemeClr>
+                    </a:solidFill>
+                  </a:rPr>
+                  <a:t>Ans: </a:t>
+                </a:r>
+              </a:p>
+              <a:p>
+                <a:pPr marL="0" indent="0">
+                  <a:buNone/>
+                </a:pPr>
+                <a:r>
+                  <a:rPr lang="en-US" sz="2400" b="1" dirty="0">
+                    <a:solidFill>
+                      <a:schemeClr val="accent6">
+                        <a:lumMod val="60000"/>
+                        <a:lumOff val="40000"/>
+                      </a:schemeClr>
+                    </a:solidFill>
+                  </a:rPr>
+                  <a:t>Given:</a:t>
+                </a:r>
+                <a14:m>
+                  <m:oMath xmlns:m="http://schemas.openxmlformats.org/officeDocument/2006/math">
+                    <m:r>
+                      <a:rPr lang="en-US" sz="2400" b="1" i="0" smtClean="0">
+                        <a:solidFill>
+                          <a:schemeClr val="accent6">
+                            <a:lumMod val="60000"/>
+                            <a:lumOff val="40000"/>
+                          </a:schemeClr>
+                        </a:solidFill>
+                        <a:latin typeface="Cambria Math" panose="02040503050406030204" pitchFamily="18" charset="0"/>
+                      </a:rPr>
+                      <m:t> </m:t>
+                    </m:r>
+                    <m:r>
+                      <a:rPr lang="en-US" sz="2400" i="1">
+                        <a:solidFill>
+                          <a:schemeClr val="accent6">
+                            <a:lumMod val="60000"/>
+                            <a:lumOff val="40000"/>
+                          </a:schemeClr>
+                        </a:solidFill>
+                        <a:latin typeface="Cambria Math" panose="02040503050406030204" pitchFamily="18" charset="0"/>
+                      </a:rPr>
+                      <m:t>𝑛</m:t>
+                    </m:r>
+                    <m:r>
+                      <a:rPr lang="en-US" sz="2400">
+                        <a:solidFill>
+                          <a:schemeClr val="accent6">
+                            <a:lumMod val="60000"/>
+                            <a:lumOff val="40000"/>
+                          </a:schemeClr>
+                        </a:solidFill>
+                        <a:latin typeface="Cambria Math" panose="02040503050406030204" pitchFamily="18" charset="0"/>
+                      </a:rPr>
+                      <m:t>=</m:t>
+                    </m:r>
+                    <m:r>
+                      <a:rPr lang="en-US" sz="2400">
+                        <a:solidFill>
+                          <a:schemeClr val="accent6">
+                            <a:lumMod val="60000"/>
+                            <a:lumOff val="40000"/>
+                          </a:schemeClr>
+                        </a:solidFill>
+                        <a:latin typeface="Cambria Math" panose="02040503050406030204" pitchFamily="18" charset="0"/>
+                      </a:rPr>
+                      <m:t>100</m:t>
+                    </m:r>
+                  </m:oMath>
+                </a14:m>
+                <a:r>
+                  <a:rPr lang="en-US" sz="2400" dirty="0">
+                    <a:solidFill>
+                      <a:schemeClr val="accent6">
+                        <a:lumMod val="60000"/>
+                        <a:lumOff val="40000"/>
+                      </a:schemeClr>
+                    </a:solidFill>
+                  </a:rPr>
+                  <a:t>, </a:t>
+                </a:r>
+                <a14:m>
+                  <m:oMath xmlns:m="http://schemas.openxmlformats.org/officeDocument/2006/math">
+                    <m:limUpp>
+                      <m:limUppPr>
+                        <m:ctrlPr>
+                          <a:rPr lang="ar-AE" sz="2400" i="1">
+                            <a:solidFill>
+                              <a:schemeClr val="accent6">
+                                <a:lumMod val="60000"/>
+                                <a:lumOff val="40000"/>
+                              </a:schemeClr>
+                            </a:solidFill>
+                            <a:latin typeface="Cambria Math" panose="02040503050406030204" pitchFamily="18" charset="0"/>
+                          </a:rPr>
+                        </m:ctrlPr>
+                      </m:limUppPr>
+                      <m:e>
+                        <m:r>
+                          <a:rPr lang="ar-AE" sz="2400" i="1">
+                            <a:solidFill>
+                              <a:schemeClr val="accent6">
+                                <a:lumMod val="60000"/>
+                                <a:lumOff val="40000"/>
+                              </a:schemeClr>
+                            </a:solidFill>
+                            <a:latin typeface="Cambria Math" panose="02040503050406030204" pitchFamily="18" charset="0"/>
+                          </a:rPr>
+                          <m:t>𝑥</m:t>
+                        </m:r>
+                      </m:e>
+                      <m:lim>
+                        <m:r>
+                          <a:rPr lang="ar-AE" sz="2400">
+                            <a:solidFill>
+                              <a:schemeClr val="accent6">
+                                <a:lumMod val="60000"/>
+                                <a:lumOff val="40000"/>
+                              </a:schemeClr>
+                            </a:solidFill>
+                            <a:latin typeface="Cambria Math" panose="02040503050406030204" pitchFamily="18" charset="0"/>
+                          </a:rPr>
+                          <m:t>ˉ</m:t>
+                        </m:r>
+                      </m:lim>
+                    </m:limUpp>
+                    <m:r>
+                      <a:rPr lang="ar-AE" sz="2400">
+                        <a:solidFill>
+                          <a:schemeClr val="accent6">
+                            <a:lumMod val="60000"/>
+                            <a:lumOff val="40000"/>
+                          </a:schemeClr>
+                        </a:solidFill>
+                        <a:latin typeface="Cambria Math" panose="02040503050406030204" pitchFamily="18" charset="0"/>
+                      </a:rPr>
+                      <m:t>=</m:t>
+                    </m:r>
+                    <m:r>
+                      <a:rPr lang="ar-AE" sz="2400">
+                        <a:solidFill>
+                          <a:schemeClr val="accent6">
+                            <a:lumMod val="60000"/>
+                            <a:lumOff val="40000"/>
+                          </a:schemeClr>
+                        </a:solidFill>
+                        <a:latin typeface="Cambria Math" panose="02040503050406030204" pitchFamily="18" charset="0"/>
+                      </a:rPr>
+                      <m:t>50</m:t>
+                    </m:r>
+                  </m:oMath>
+                </a14:m>
+                <a:r>
+                  <a:rPr lang="en-US" sz="2400" dirty="0">
+                    <a:solidFill>
+                      <a:schemeClr val="accent6">
+                        <a:lumMod val="60000"/>
+                        <a:lumOff val="40000"/>
+                      </a:schemeClr>
+                    </a:solidFill>
+                  </a:rPr>
+                  <a:t> g, </a:t>
+                </a:r>
+                <a14:m>
+                  <m:oMath xmlns:m="http://schemas.openxmlformats.org/officeDocument/2006/math">
+                    <m:r>
+                      <a:rPr lang="en-US" sz="2400" i="1">
+                        <a:solidFill>
+                          <a:schemeClr val="accent6">
+                            <a:lumMod val="60000"/>
+                            <a:lumOff val="40000"/>
+                          </a:schemeClr>
+                        </a:solidFill>
+                        <a:latin typeface="Cambria Math" panose="02040503050406030204" pitchFamily="18" charset="0"/>
+                      </a:rPr>
+                      <m:t>𝜎</m:t>
+                    </m:r>
+                    <m:r>
+                      <a:rPr lang="en-US" sz="2400">
+                        <a:solidFill>
+                          <a:schemeClr val="accent6">
+                            <a:lumMod val="60000"/>
+                            <a:lumOff val="40000"/>
+                          </a:schemeClr>
+                        </a:solidFill>
+                        <a:latin typeface="Cambria Math" panose="02040503050406030204" pitchFamily="18" charset="0"/>
+                      </a:rPr>
+                      <m:t>=</m:t>
+                    </m:r>
+                    <m:r>
+                      <a:rPr lang="en-US" sz="2400">
+                        <a:solidFill>
+                          <a:schemeClr val="accent6">
+                            <a:lumMod val="60000"/>
+                            <a:lumOff val="40000"/>
+                          </a:schemeClr>
+                        </a:solidFill>
+                        <a:latin typeface="Cambria Math" panose="02040503050406030204" pitchFamily="18" charset="0"/>
+                      </a:rPr>
+                      <m:t>8</m:t>
+                    </m:r>
+                  </m:oMath>
+                </a14:m>
+                <a:r>
+                  <a:rPr lang="en-US" sz="2400" dirty="0">
+                    <a:solidFill>
+                      <a:schemeClr val="accent6">
+                        <a:lumMod val="60000"/>
+                        <a:lumOff val="40000"/>
+                      </a:schemeClr>
+                    </a:solidFill>
+                  </a:rPr>
+                  <a:t> g, Confidence level = 95%</a:t>
+                </a:r>
+              </a:p>
+              <a:p>
+                <a:pPr marL="0" indent="0">
+                  <a:buNone/>
+                </a:pPr>
+                <a:r>
+                  <a:rPr lang="en-US" sz="2400" dirty="0">
+                    <a:solidFill>
+                      <a:schemeClr val="accent6">
+                        <a:lumMod val="60000"/>
+                        <a:lumOff val="40000"/>
+                      </a:schemeClr>
+                    </a:solidFill>
+                  </a:rPr>
+                  <a:t>1. Since we know pop. std dev. </a:t>
+                </a:r>
+                <a14:m>
+                  <m:oMath xmlns:m="http://schemas.openxmlformats.org/officeDocument/2006/math">
+                    <m:r>
+                      <a:rPr lang="en-US" sz="2400" i="1">
+                        <a:solidFill>
+                          <a:schemeClr val="accent6">
+                            <a:lumMod val="60000"/>
+                            <a:lumOff val="40000"/>
+                          </a:schemeClr>
+                        </a:solidFill>
+                        <a:latin typeface="Cambria Math" panose="02040503050406030204" pitchFamily="18" charset="0"/>
+                      </a:rPr>
+                      <m:t>𝜎</m:t>
+                    </m:r>
+                    <m:r>
+                      <a:rPr lang="en-US" sz="2400" i="1">
+                        <a:solidFill>
+                          <a:schemeClr val="accent6">
+                            <a:lumMod val="60000"/>
+                            <a:lumOff val="40000"/>
+                          </a:schemeClr>
+                        </a:solidFill>
+                        <a:latin typeface="Cambria Math" panose="02040503050406030204" pitchFamily="18" charset="0"/>
+                      </a:rPr>
+                      <m:t> </m:t>
+                    </m:r>
+                  </m:oMath>
+                </a14:m>
+                <a:r>
+                  <a:rPr lang="en-US" sz="2400" dirty="0">
+                    <a:solidFill>
+                      <a:schemeClr val="accent6">
+                        <a:lumMod val="60000"/>
+                        <a:lumOff val="40000"/>
+                      </a:schemeClr>
+                    </a:solidFill>
+                  </a:rPr>
+                  <a:t>, we use z-distribution. Critical z value for 95%: </a:t>
+                </a:r>
+                <a14:m>
+                  <m:oMath xmlns:m="http://schemas.openxmlformats.org/officeDocument/2006/math">
+                    <m:r>
+                      <a:rPr lang="en-US" sz="2400" b="1" i="0" smtClean="0">
+                        <a:solidFill>
+                          <a:schemeClr val="accent6">
+                            <a:lumMod val="60000"/>
+                            <a:lumOff val="40000"/>
+                          </a:schemeClr>
+                        </a:solidFill>
+                        <a:latin typeface="Cambria Math" panose="02040503050406030204" pitchFamily="18" charset="0"/>
+                      </a:rPr>
+                      <m:t> </m:t>
+                    </m:r>
+                    <m:r>
+                      <a:rPr lang="ar-AE" sz="2400" i="1">
+                        <a:solidFill>
+                          <a:schemeClr val="accent6">
+                            <a:lumMod val="60000"/>
+                            <a:lumOff val="40000"/>
+                          </a:schemeClr>
+                        </a:solidFill>
+                        <a:latin typeface="Cambria Math" panose="02040503050406030204" pitchFamily="18" charset="0"/>
+                      </a:rPr>
+                      <m:t>𝑧</m:t>
+                    </m:r>
+                    <m:r>
+                      <a:rPr lang="ar-AE" sz="2400">
+                        <a:solidFill>
+                          <a:schemeClr val="accent6">
+                            <a:lumMod val="60000"/>
+                            <a:lumOff val="40000"/>
+                          </a:schemeClr>
+                        </a:solidFill>
+                        <a:latin typeface="Cambria Math" panose="02040503050406030204" pitchFamily="18" charset="0"/>
+                      </a:rPr>
+                      <m:t>=</m:t>
+                    </m:r>
+                    <m:r>
+                      <a:rPr lang="ar-AE" sz="2400">
+                        <a:solidFill>
+                          <a:schemeClr val="accent6">
+                            <a:lumMod val="60000"/>
+                            <a:lumOff val="40000"/>
+                          </a:schemeClr>
+                        </a:solidFill>
+                        <a:latin typeface="Cambria Math" panose="02040503050406030204" pitchFamily="18" charset="0"/>
+                      </a:rPr>
+                      <m:t>1</m:t>
+                    </m:r>
+                    <m:r>
+                      <a:rPr lang="ar-AE" sz="2400">
+                        <a:solidFill>
+                          <a:schemeClr val="accent6">
+                            <a:lumMod val="60000"/>
+                            <a:lumOff val="40000"/>
+                          </a:schemeClr>
+                        </a:solidFill>
+                        <a:latin typeface="Cambria Math" panose="02040503050406030204" pitchFamily="18" charset="0"/>
+                      </a:rPr>
+                      <m:t>.</m:t>
+                    </m:r>
+                    <m:r>
+                      <a:rPr lang="ar-AE" sz="2400">
+                        <a:solidFill>
+                          <a:schemeClr val="accent6">
+                            <a:lumMod val="60000"/>
+                            <a:lumOff val="40000"/>
+                          </a:schemeClr>
+                        </a:solidFill>
+                        <a:latin typeface="Cambria Math" panose="02040503050406030204" pitchFamily="18" charset="0"/>
+                      </a:rPr>
+                      <m:t>96</m:t>
+                    </m:r>
+                  </m:oMath>
+                </a14:m>
+                <a:endParaRPr lang="en-US" sz="2400" dirty="0">
+                  <a:solidFill>
+                    <a:schemeClr val="accent6">
+                      <a:lumMod val="60000"/>
+                      <a:lumOff val="40000"/>
+                    </a:schemeClr>
+                  </a:solidFill>
+                </a:endParaRPr>
+              </a:p>
+              <a:p>
+                <a:pPr marL="0" indent="0">
+                  <a:buNone/>
+                </a:pPr>
+                <a:r>
+                  <a:rPr lang="en-US" sz="2400" dirty="0">
+                    <a:solidFill>
+                      <a:schemeClr val="accent6">
+                        <a:lumMod val="60000"/>
+                        <a:lumOff val="40000"/>
+                      </a:schemeClr>
+                    </a:solidFill>
+                  </a:rPr>
+                  <a:t>2. Compute the margin of error (ME): </a:t>
+                </a:r>
+                <a14:m>
+                  <m:oMath xmlns:m="http://schemas.openxmlformats.org/officeDocument/2006/math">
+                    <m:r>
+                      <a:rPr lang="en-US" sz="2400" i="1">
+                        <a:solidFill>
+                          <a:schemeClr val="accent6">
+                            <a:lumMod val="60000"/>
+                            <a:lumOff val="40000"/>
+                          </a:schemeClr>
+                        </a:solidFill>
+                        <a:latin typeface="Cambria Math" panose="02040503050406030204" pitchFamily="18" charset="0"/>
+                      </a:rPr>
+                      <m:t>𝑧</m:t>
+                    </m:r>
+                    <m:d>
+                      <m:dPr>
+                        <m:ctrlPr>
+                          <a:rPr lang="en-US" sz="2400" i="1">
+                            <a:solidFill>
+                              <a:schemeClr val="accent6">
+                                <a:lumMod val="60000"/>
+                                <a:lumOff val="40000"/>
+                              </a:schemeClr>
+                            </a:solidFill>
+                            <a:latin typeface="Cambria Math" panose="02040503050406030204" pitchFamily="18" charset="0"/>
+                          </a:rPr>
+                        </m:ctrlPr>
+                      </m:dPr>
+                      <m:e>
+                        <m:f>
+                          <m:fPr>
+                            <m:ctrlPr>
+                              <a:rPr lang="en-US" sz="2400" i="1">
+                                <a:solidFill>
+                                  <a:schemeClr val="accent6">
+                                    <a:lumMod val="60000"/>
+                                    <a:lumOff val="40000"/>
+                                  </a:schemeClr>
+                                </a:solidFill>
+                                <a:latin typeface="Cambria Math" panose="02040503050406030204" pitchFamily="18" charset="0"/>
+                              </a:rPr>
+                            </m:ctrlPr>
+                          </m:fPr>
+                          <m:num>
+                            <m:r>
+                              <a:rPr lang="en-US" sz="2400" i="1">
+                                <a:solidFill>
+                                  <a:schemeClr val="accent6">
+                                    <a:lumMod val="60000"/>
+                                    <a:lumOff val="40000"/>
+                                  </a:schemeClr>
+                                </a:solidFill>
+                                <a:latin typeface="Cambria Math" panose="02040503050406030204" pitchFamily="18" charset="0"/>
+                              </a:rPr>
+                              <m:t>𝜎</m:t>
+                            </m:r>
+                          </m:num>
+                          <m:den>
+                            <m:rad>
+                              <m:radPr>
+                                <m:degHide m:val="on"/>
+                                <m:ctrlPr>
+                                  <a:rPr lang="en-US" sz="2400" i="1">
+                                    <a:solidFill>
+                                      <a:schemeClr val="accent6">
+                                        <a:lumMod val="60000"/>
+                                        <a:lumOff val="40000"/>
+                                      </a:schemeClr>
+                                    </a:solidFill>
+                                    <a:latin typeface="Cambria Math" panose="02040503050406030204" pitchFamily="18" charset="0"/>
+                                  </a:rPr>
+                                </m:ctrlPr>
+                              </m:radPr>
+                              <m:deg/>
+                              <m:e>
+                                <m:r>
+                                  <a:rPr lang="en-US" sz="2400" i="1">
+                                    <a:solidFill>
+                                      <a:schemeClr val="accent6">
+                                        <a:lumMod val="60000"/>
+                                        <a:lumOff val="40000"/>
+                                      </a:schemeClr>
+                                    </a:solidFill>
+                                    <a:latin typeface="Cambria Math" panose="02040503050406030204" pitchFamily="18" charset="0"/>
+                                  </a:rPr>
+                                  <m:t>𝑛</m:t>
+                                </m:r>
+                              </m:e>
+                            </m:rad>
+                          </m:den>
+                        </m:f>
+                      </m:e>
+                    </m:d>
+                  </m:oMath>
+                </a14:m>
+                <a:r>
+                  <a:rPr lang="en-US" sz="2400" dirty="0">
+                    <a:solidFill>
+                      <a:schemeClr val="accent6">
+                        <a:lumMod val="60000"/>
+                        <a:lumOff val="40000"/>
+                      </a:schemeClr>
+                    </a:solidFill>
+                  </a:rPr>
+                  <a:t>  = 1.96 x (8/</a:t>
+                </a:r>
+                <a14:m>
+                  <m:oMath xmlns:m="http://schemas.openxmlformats.org/officeDocument/2006/math">
+                    <m:rad>
+                      <m:radPr>
+                        <m:degHide m:val="on"/>
+                        <m:ctrlPr>
+                          <a:rPr lang="en-US" sz="2400" i="1" smtClean="0">
+                            <a:solidFill>
+                              <a:schemeClr val="accent6">
+                                <a:lumMod val="60000"/>
+                                <a:lumOff val="40000"/>
+                              </a:schemeClr>
+                            </a:solidFill>
+                            <a:latin typeface="Cambria Math" panose="02040503050406030204" pitchFamily="18" charset="0"/>
+                          </a:rPr>
+                        </m:ctrlPr>
+                      </m:radPr>
+                      <m:deg/>
+                      <m:e>
+                        <m:r>
+                          <a:rPr lang="en-US" sz="2400" smtClean="0">
+                            <a:solidFill>
+                              <a:schemeClr val="accent6">
+                                <a:lumMod val="60000"/>
+                                <a:lumOff val="40000"/>
+                              </a:schemeClr>
+                            </a:solidFill>
+                            <a:latin typeface="Cambria Math" panose="02040503050406030204" pitchFamily="18" charset="0"/>
+                          </a:rPr>
+                          <m:t>100</m:t>
+                        </m:r>
+                      </m:e>
+                    </m:rad>
+                  </m:oMath>
+                </a14:m>
+                <a:r>
+                  <a:rPr lang="en-US" sz="2400" dirty="0">
+                    <a:solidFill>
+                      <a:schemeClr val="accent6">
+                        <a:lumMod val="60000"/>
+                        <a:lumOff val="40000"/>
+                      </a:schemeClr>
+                    </a:solidFill>
+                  </a:rPr>
+                  <a:t>) = 1.568</a:t>
+                </a:r>
+              </a:p>
+              <a:p>
+                <a:pPr marL="0" indent="0">
+                  <a:buNone/>
+                </a:pPr>
+                <a:r>
+                  <a:rPr lang="en-US" sz="2400" dirty="0">
+                    <a:solidFill>
+                      <a:schemeClr val="accent6">
+                        <a:lumMod val="60000"/>
+                        <a:lumOff val="40000"/>
+                      </a:schemeClr>
+                    </a:solidFill>
+                  </a:rPr>
+                  <a:t>3. Construct the confidence interval:</a:t>
+                </a:r>
+              </a:p>
+              <a:p>
+                <a:pPr marL="0" indent="0">
+                  <a:buNone/>
+                </a:pPr>
+                <a:r>
+                  <a:rPr lang="en-US" sz="2400" dirty="0">
+                    <a:solidFill>
+                      <a:schemeClr val="accent6">
+                        <a:lumMod val="60000"/>
+                        <a:lumOff val="40000"/>
+                      </a:schemeClr>
+                    </a:solidFill>
+                  </a:rPr>
+                  <a:t>    50 – 1.568 &lt; </a:t>
+                </a:r>
+                <a:r>
+                  <a:rPr lang="el-GR" sz="2400" dirty="0">
+                    <a:solidFill>
+                      <a:schemeClr val="accent6">
+                        <a:lumMod val="60000"/>
+                        <a:lumOff val="40000"/>
+                      </a:schemeClr>
+                    </a:solidFill>
+                  </a:rPr>
+                  <a:t>μ</a:t>
+                </a:r>
+                <a:r>
+                  <a:rPr lang="en-US" sz="2400" dirty="0">
+                    <a:solidFill>
+                      <a:schemeClr val="accent6">
+                        <a:lumMod val="60000"/>
+                        <a:lumOff val="40000"/>
+                      </a:schemeClr>
+                    </a:solidFill>
+                  </a:rPr>
+                  <a:t> &lt; 50 + 1.568</a:t>
+                </a:r>
+              </a:p>
+              <a:p>
+                <a:pPr marL="0" indent="0">
+                  <a:buNone/>
+                </a:pPr>
+                <a:r>
+                  <a:rPr lang="en-US" sz="2400" dirty="0">
+                    <a:solidFill>
+                      <a:schemeClr val="accent6">
+                        <a:lumMod val="60000"/>
+                        <a:lumOff val="40000"/>
+                      </a:schemeClr>
+                    </a:solidFill>
+                  </a:rPr>
+                  <a:t> =&gt; 48.432 g &lt; </a:t>
+                </a:r>
+                <a:r>
+                  <a:rPr lang="el-GR" sz="2400" dirty="0">
+                    <a:solidFill>
+                      <a:schemeClr val="accent6">
+                        <a:lumMod val="60000"/>
+                        <a:lumOff val="40000"/>
+                      </a:schemeClr>
+                    </a:solidFill>
+                  </a:rPr>
+                  <a:t>μ</a:t>
+                </a:r>
+                <a:r>
+                  <a:rPr lang="en-US" sz="2400" dirty="0">
+                    <a:solidFill>
+                      <a:schemeClr val="accent6">
+                        <a:lumMod val="60000"/>
+                        <a:lumOff val="40000"/>
+                      </a:schemeClr>
+                    </a:solidFill>
+                  </a:rPr>
+                  <a:t> &lt; 51.568 g</a:t>
+                </a:r>
+              </a:p>
+              <a:p>
+                <a:pPr marL="0" indent="0">
+                  <a:buNone/>
+                </a:pPr>
+                <a:endParaRPr lang="en-US" sz="2400" dirty="0">
+                  <a:solidFill>
+                    <a:schemeClr val="accent6">
+                      <a:lumMod val="60000"/>
+                      <a:lumOff val="40000"/>
+                    </a:schemeClr>
+                  </a:solidFill>
+                </a:endParaRPr>
+              </a:p>
+              <a:p>
+                <a:pPr marL="0" indent="0">
+                  <a:buNone/>
+                </a:pPr>
+                <a:endParaRPr lang="en-US" sz="2400" dirty="0">
+                  <a:solidFill>
+                    <a:schemeClr val="accent6">
+                      <a:lumMod val="60000"/>
+                      <a:lumOff val="40000"/>
+                    </a:schemeClr>
+                  </a:solidFill>
+                </a:endParaRPr>
+              </a:p>
+              <a:p>
+                <a:pPr marL="0" indent="0">
+                  <a:buNone/>
+                </a:pPr>
+                <a:r>
+                  <a:rPr lang="en-US" sz="2400" dirty="0">
+                    <a:solidFill>
+                      <a:schemeClr val="accent6">
+                        <a:lumMod val="60000"/>
+                        <a:lumOff val="40000"/>
+                      </a:schemeClr>
+                    </a:solidFill>
+                  </a:rPr>
+                  <a:t>Interpretation: “We are 95% confident that the true mean weight </a:t>
+                </a:r>
+                <a14:m>
+                  <m:oMath xmlns:m="http://schemas.openxmlformats.org/officeDocument/2006/math">
+                    <m:r>
+                      <a:rPr lang="en-US" sz="2400" i="1">
+                        <a:solidFill>
+                          <a:schemeClr val="accent6">
+                            <a:lumMod val="60000"/>
+                            <a:lumOff val="40000"/>
+                          </a:schemeClr>
+                        </a:solidFill>
+                        <a:latin typeface="Cambria Math" panose="02040503050406030204" pitchFamily="18" charset="0"/>
+                      </a:rPr>
+                      <m:t>𝜇</m:t>
+                    </m:r>
+                  </m:oMath>
+                </a14:m>
+                <a:r>
+                  <a:rPr lang="en-US" sz="2400" dirty="0">
+                    <a:solidFill>
+                      <a:schemeClr val="accent6">
+                        <a:lumMod val="60000"/>
+                        <a:lumOff val="40000"/>
+                      </a:schemeClr>
+                    </a:solidFill>
+                  </a:rPr>
+                  <a:t> of the packaged product lies between </a:t>
+                </a:r>
+                <a:r>
+                  <a:rPr lang="en-US" sz="2400" b="1" dirty="0">
+                    <a:solidFill>
+                      <a:schemeClr val="accent6">
+                        <a:lumMod val="60000"/>
+                        <a:lumOff val="40000"/>
+                      </a:schemeClr>
+                    </a:solidFill>
+                  </a:rPr>
+                  <a:t>48.43 g</a:t>
+                </a:r>
+                <a:r>
+                  <a:rPr lang="en-US" sz="2400" dirty="0">
+                    <a:solidFill>
+                      <a:schemeClr val="accent6">
+                        <a:lumMod val="60000"/>
+                        <a:lumOff val="40000"/>
+                      </a:schemeClr>
+                    </a:solidFill>
+                  </a:rPr>
+                  <a:t> and </a:t>
+                </a:r>
+                <a:r>
+                  <a:rPr lang="en-US" sz="2400" b="1" dirty="0">
+                    <a:solidFill>
+                      <a:schemeClr val="accent6">
+                        <a:lumMod val="60000"/>
+                        <a:lumOff val="40000"/>
+                      </a:schemeClr>
+                    </a:solidFill>
+                  </a:rPr>
+                  <a:t>51.57 g</a:t>
+                </a:r>
+                <a:r>
+                  <a:rPr lang="en-US" sz="2400" dirty="0">
+                    <a:solidFill>
+                      <a:schemeClr val="accent6">
+                        <a:lumMod val="60000"/>
+                        <a:lumOff val="40000"/>
+                      </a:schemeClr>
+                    </a:solidFill>
+                  </a:rPr>
+                  <a:t>.”</a:t>
+                </a:r>
+                <a:br>
+                  <a:rPr lang="en-US" sz="2400" dirty="0">
+                    <a:solidFill>
+                      <a:schemeClr val="accent6">
+                        <a:lumMod val="60000"/>
+                        <a:lumOff val="40000"/>
+                      </a:schemeClr>
+                    </a:solidFill>
+                  </a:rPr>
+                </a:br>
+                <a:endParaRPr lang="en-US" sz="2400" dirty="0">
+                  <a:solidFill>
+                    <a:schemeClr val="accent6">
+                      <a:lumMod val="60000"/>
+                      <a:lumOff val="40000"/>
+                    </a:schemeClr>
+                  </a:solidFill>
+                </a:endParaRPr>
+              </a:p>
+            </p:txBody>
+          </p:sp>
+        </mc:Choice>
+        <mc:Fallback>
+          <p:sp>
+            <p:nvSpPr>
+              <p:cNvPr id="3" name="TextBox 2">
+                <a:extLst>
+                  <a:ext uri="{FF2B5EF4-FFF2-40B4-BE49-F238E27FC236}">
+                    <a16:creationId xmlns:a16="http://schemas.microsoft.com/office/drawing/2014/main" id="{802C423F-920F-C3F1-77D6-93BA8A90F5C7}"/>
+                  </a:ext>
+                </a:extLst>
+              </p:cNvPr>
+              <p:cNvSpPr txBox="1">
+                <a:spLocks noRot="1" noChangeAspect="1" noMove="1" noResize="1" noEditPoints="1" noAdjustHandles="1" noChangeArrowheads="1" noChangeShapeType="1" noTextEdit="1"/>
+              </p:cNvSpPr>
+              <p:nvPr/>
+            </p:nvSpPr>
+            <p:spPr>
+              <a:xfrm>
+                <a:off x="156575" y="908182"/>
+                <a:ext cx="11374009" cy="4844596"/>
+              </a:xfrm>
+              <a:prstGeom prst="rect">
+                <a:avLst/>
+              </a:prstGeom>
+              <a:blipFill>
+                <a:blip r:embed="rId4"/>
+                <a:stretch>
+                  <a:fillRect l="-857" t="-1006"/>
+                </a:stretch>
+              </a:blipFill>
+            </p:spPr>
+            <p:txBody>
+              <a:bodyPr/>
+              <a:lstStyle/>
+              <a:p>
+                <a:r>
+                  <a:rPr lang="en-US">
+                    <a:noFill/>
+                  </a:rPr>
+                  <a:t> </a:t>
+                </a:r>
+              </a:p>
+            </p:txBody>
+          </p:sp>
+        </mc:Fallback>
+      </mc:AlternateContent>
+    </p:spTree>
+    <p:extLst>
+      <p:ext uri="{BB962C8B-B14F-4D97-AF65-F5344CB8AC3E}">
+        <p14:creationId xmlns:p14="http://schemas.microsoft.com/office/powerpoint/2010/main" val="2471487533"/>
+      </p:ext>
+    </p:extLst>
+  </p:cSld>
+  <p:clrMapOvr>
+    <a:masterClrMapping/>
+  </p:clrMapOvr>
+</p:sld>
+</file>
+
+<file path=ppt/slides/slide11.xml><?xml version="1.0" encoding="utf-8"?>
+<p:sld xmlns:a="http://schemas.openxmlformats.org/drawingml/2006/main" xmlns:r="http://schemas.openxmlformats.org/officeDocument/2006/relationships" xmlns:p="http://schemas.openxmlformats.org/presentationml/2006/main">
+  <p:cSld>
+    <p:spTree>
+      <p:nvGrpSpPr>
+        <p:cNvPr id="1" name="">
+          <a:extLst>
+            <a:ext uri="{FF2B5EF4-FFF2-40B4-BE49-F238E27FC236}">
+              <a16:creationId xmlns:a16="http://schemas.microsoft.com/office/drawing/2014/main" id="{0C1EA716-FD29-D713-C9E6-F8040D80256F}"/>
+            </a:ext>
+          </a:extLst>
+        </p:cNvPr>
+        <p:cNvGrpSpPr/>
+        <p:nvPr/>
+      </p:nvGrpSpPr>
+      <p:grpSpPr>
+        <a:xfrm>
+          <a:off x="0" y="0"/>
+          <a:ext cx="0" cy="0"/>
+          <a:chOff x="0" y="0"/>
+          <a:chExt cx="0" cy="0"/>
+        </a:xfrm>
+      </p:grpSpPr>
       <p:pic>
         <p:nvPicPr>
           <p:cNvPr id="7" name="Picture 6">
@@ -4471,8 +5730,8 @@
         </p:blipFill>
         <p:spPr>
           <a:xfrm>
-            <a:off x="7299709" y="200420"/>
-            <a:ext cx="3618515" cy="512923"/>
+            <a:off x="6286151" y="101423"/>
+            <a:ext cx="4714370" cy="668260"/>
           </a:xfrm>
           <a:prstGeom prst="rect">
             <a:avLst/>
@@ -4509,8 +5768,8 @@
           </a:prstGeom>
         </p:spPr>
       </p:pic>
-      <mc:AlternateContent xmlns:mc="http://schemas.openxmlformats.org/markup-compatibility/2006" xmlns:a14="http://schemas.microsoft.com/office/drawing/2010/main">
-        <mc:Choice Requires="a14">
+      <mc:AlternateContent xmlns:mc="http://schemas.openxmlformats.org/markup-compatibility/2006">
+        <mc:Choice xmlns:a14="http://schemas.microsoft.com/office/drawing/2010/main" Requires="a14">
           <p:sp>
             <p:nvSpPr>
               <p:cNvPr id="9" name="TextBox 8">
@@ -4526,7 +5785,7 @@
             <p:spPr>
               <a:xfrm>
                 <a:off x="229727" y="769683"/>
-                <a:ext cx="10688497" cy="5954835"/>
+                <a:ext cx="10688497" cy="3156505"/>
               </a:xfrm>
               <a:prstGeom prst="rect">
                 <a:avLst/>
@@ -4540,7 +5799,7 @@
               <a:lstStyle/>
               <a:p>
                 <a:r>
-                  <a:rPr lang="en-US" dirty="0">
+                  <a:rPr lang="en-US" sz="2400" dirty="0">
                     <a:solidFill>
                       <a:schemeClr val="accent6">
                         <a:lumMod val="60000"/>
@@ -4548,12 +5807,36 @@
                       </a:schemeClr>
                     </a:solidFill>
                   </a:rPr>
-                  <a:t>Problem: Let’s redo previous problem but smaller sample size n = 49</a:t>
+                  <a:t>Problem: </a:t>
                 </a:r>
               </a:p>
               <a:p>
                 <a:r>
-                  <a:rPr lang="en-US" dirty="0">
+                  <a:rPr lang="en-US" sz="2400" dirty="0">
+                    <a:solidFill>
+                      <a:schemeClr val="accent6">
+                        <a:lumMod val="60000"/>
+                        <a:lumOff val="40000"/>
+                      </a:schemeClr>
+                    </a:solidFill>
+                  </a:rPr>
+                  <a:t>Let’s redo previous problem but </a:t>
+                </a:r>
+                <a:r>
+                  <a:rPr lang="en-US" sz="2400" b="1" dirty="0">
+                    <a:solidFill>
+                      <a:schemeClr val="accent6">
+                        <a:lumMod val="60000"/>
+                        <a:lumOff val="40000"/>
+                      </a:schemeClr>
+                    </a:solidFill>
+                  </a:rPr>
+                  <a:t>smaller sample size n = 49</a:t>
+                </a:r>
+              </a:p>
+              <a:p>
+                <a:r>
+                  <a:rPr lang="en-US" sz="2400" dirty="0">
                     <a:solidFill>
                       <a:schemeClr val="accent6">
                         <a:lumMod val="60000"/>
@@ -4566,7 +5849,7 @@
                 <a14:m>
                   <m:oMath xmlns:m="http://schemas.openxmlformats.org/officeDocument/2006/math">
                     <m:r>
-                      <a:rPr lang="en-US" i="1">
+                      <a:rPr lang="en-US" sz="2400" i="1">
                         <a:solidFill>
                           <a:schemeClr val="accent6">
                             <a:lumMod val="60000"/>
@@ -4580,7 +5863,7 @@
                   </m:oMath>
                 </a14:m>
                 <a:r>
-                  <a:rPr lang="en-US" dirty="0">
+                  <a:rPr lang="en-US" sz="2400" dirty="0">
                     <a:solidFill>
                       <a:schemeClr val="accent6">
                         <a:lumMod val="60000"/>
@@ -4588,12 +5871,25 @@
                       </a:schemeClr>
                     </a:solidFill>
                   </a:rPr>
-                  <a:t> of a packaged product. You take a random sample of </a:t>
+                  <a:t> of a packaged product. </a:t>
+                </a:r>
+              </a:p>
+              <a:p>
+                <a:r>
+                  <a:rPr lang="en-US" sz="2400" dirty="0">
+                    <a:solidFill>
+                      <a:schemeClr val="accent6">
+                        <a:lumMod val="60000"/>
+                        <a:lumOff val="40000"/>
+                      </a:schemeClr>
+                    </a:solidFill>
+                  </a:rPr>
+                  <a:t>You take a random sample of </a:t>
                 </a:r>
                 <a14:m>
                   <m:oMath xmlns:m="http://schemas.openxmlformats.org/officeDocument/2006/math">
                     <m:r>
-                      <a:rPr lang="en-US" i="1">
+                      <a:rPr lang="en-US" sz="2400" i="1">
                         <a:solidFill>
                           <a:schemeClr val="accent6">
                             <a:lumMod val="60000"/>
@@ -4605,7 +5901,7 @@
                       <m:t>𝑛</m:t>
                     </m:r>
                     <m:r>
-                      <a:rPr lang="en-US">
+                      <a:rPr lang="en-US" sz="2400">
                         <a:solidFill>
                           <a:schemeClr val="accent6">
                             <a:lumMod val="60000"/>
@@ -4619,7 +5915,7 @@
                   </m:oMath>
                 </a14:m>
                 <a:r>
-                  <a:rPr lang="en-US" dirty="0">
+                  <a:rPr lang="en-US" sz="2400" dirty="0">
                     <a:solidFill>
                       <a:schemeClr val="accent6">
                         <a:lumMod val="60000"/>
@@ -4630,7 +5926,7 @@
                   <a:t> 49 packages and find the </a:t>
                 </a:r>
                 <a:r>
-                  <a:rPr lang="en-US" b="1" dirty="0">
+                  <a:rPr lang="en-US" sz="2400" b="1" dirty="0">
                     <a:solidFill>
                       <a:schemeClr val="accent6">
                         <a:lumMod val="60000"/>
@@ -4641,7 +5937,7 @@
                   <a:t>sample mean</a:t>
                 </a:r>
                 <a:r>
-                  <a:rPr lang="en-US" dirty="0">
+                  <a:rPr lang="en-US" sz="2400" dirty="0">
                     <a:solidFill>
                       <a:schemeClr val="accent6">
                         <a:lumMod val="60000"/>
@@ -4656,7 +5952,7 @@
                     <m:limUpp>
                       <m:limUppPr>
                         <m:ctrlPr>
-                          <a:rPr lang="ar-AE" i="1">
+                          <a:rPr lang="ar-AE" sz="2400" i="1">
                             <a:solidFill>
                               <a:schemeClr val="accent6">
                                 <a:lumMod val="60000"/>
@@ -4669,7 +5965,7 @@
                       </m:limUppPr>
                       <m:e>
                         <m:r>
-                          <a:rPr lang="ar-AE" i="1">
+                          <a:rPr lang="ar-AE" sz="2400" i="1">
                             <a:solidFill>
                               <a:schemeClr val="accent6">
                                 <a:lumMod val="60000"/>
@@ -4683,7 +5979,7 @@
                       </m:e>
                       <m:lim>
                         <m:r>
-                          <a:rPr lang="ar-AE">
+                          <a:rPr lang="ar-AE" sz="2400">
                             <a:solidFill>
                               <a:schemeClr val="accent6">
                                 <a:lumMod val="60000"/>
@@ -4697,7 +5993,7 @@
                       </m:lim>
                     </m:limUpp>
                     <m:r>
-                      <a:rPr lang="ar-AE">
+                      <a:rPr lang="ar-AE" sz="2400">
                         <a:solidFill>
                           <a:schemeClr val="accent6">
                             <a:lumMod val="60000"/>
@@ -4709,7 +6005,7 @@
                       <m:t>=</m:t>
                     </m:r>
                     <m:r>
-                      <a:rPr lang="ar-AE">
+                      <a:rPr lang="ar-AE" sz="2400">
                         <a:solidFill>
                           <a:schemeClr val="accent6">
                             <a:lumMod val="60000"/>
@@ -4723,7 +6019,7 @@
                   </m:oMath>
                 </a14:m>
                 <a:r>
-                  <a:rPr lang="en-US" dirty="0">
+                  <a:rPr lang="en-US" sz="2400" dirty="0">
                     <a:solidFill>
                       <a:schemeClr val="accent6">
                         <a:lumMod val="60000"/>
@@ -4731,10 +6027,23 @@
                       </a:schemeClr>
                     </a:solidFill>
                   </a:rPr>
-                  <a:t> grams. The </a:t>
-                </a:r>
-                <a:r>
-                  <a:rPr lang="en-US" b="1" dirty="0">
+                  <a:t> grams. </a:t>
+                </a:r>
+              </a:p>
+              <a:p>
+                <a:r>
+                  <a:rPr lang="en-US" sz="2400" dirty="0">
+                    <a:solidFill>
+                      <a:schemeClr val="accent6">
+                        <a:lumMod val="60000"/>
+                        <a:lumOff val="40000"/>
+                      </a:schemeClr>
+                    </a:solidFill>
+                  </a:rPr>
+                  <a:t>The </a:t>
+                </a:r>
+                <a:r>
+                  <a:rPr lang="en-US" sz="2400" b="1" dirty="0">
                     <a:solidFill>
                       <a:schemeClr val="accent4">
                         <a:lumMod val="60000"/>
@@ -4745,7 +6054,7 @@
                   <a:t>population</a:t>
                 </a:r>
                 <a:r>
-                  <a:rPr lang="en-US" dirty="0">
+                  <a:rPr lang="en-US" sz="2400" dirty="0">
                     <a:solidFill>
                       <a:schemeClr val="accent6">
                         <a:lumMod val="60000"/>
@@ -4758,7 +6067,7 @@
                 <a14:m>
                   <m:oMath xmlns:m="http://schemas.openxmlformats.org/officeDocument/2006/math">
                     <m:r>
-                      <a:rPr lang="en-US" i="1">
+                      <a:rPr lang="en-US" sz="2400" i="1">
                         <a:solidFill>
                           <a:schemeClr val="accent6">
                             <a:lumMod val="60000"/>
@@ -4770,7 +6079,7 @@
                       <m:t>𝜎</m:t>
                     </m:r>
                     <m:r>
-                      <a:rPr lang="en-US">
+                      <a:rPr lang="en-US" sz="2400">
                         <a:solidFill>
                           <a:schemeClr val="accent6">
                             <a:lumMod val="60000"/>
@@ -4782,7 +6091,7 @@
                       <m:t>=</m:t>
                     </m:r>
                     <m:r>
-                      <a:rPr lang="en-US">
+                      <a:rPr lang="en-US" sz="2400">
                         <a:solidFill>
                           <a:schemeClr val="accent6">
                             <a:lumMod val="60000"/>
@@ -4796,7 +6105,7 @@
                   </m:oMath>
                 </a14:m>
                 <a:r>
-                  <a:rPr lang="en-US" dirty="0">
+                  <a:rPr lang="en-US" sz="2400" dirty="0">
                     <a:solidFill>
                       <a:schemeClr val="accent6">
                         <a:lumMod val="60000"/>
@@ -4808,45 +6117,7 @@
                 </a:r>
               </a:p>
               <a:p>
-                <a:r>
-                  <a:rPr lang="en-US" dirty="0">
-                    <a:solidFill>
-                      <a:schemeClr val="accent6">
-                        <a:lumMod val="60000"/>
-                        <a:lumOff val="40000"/>
-                      </a:schemeClr>
-                    </a:solidFill>
-                  </a:rPr>
-                  <a:t>Find a </a:t>
-                </a:r>
-                <a:r>
-                  <a:rPr lang="en-US" b="1" dirty="0">
-                    <a:solidFill>
-                      <a:schemeClr val="accent6">
-                        <a:lumMod val="60000"/>
-                        <a:lumOff val="40000"/>
-                      </a:schemeClr>
-                    </a:solidFill>
-                  </a:rPr>
-                  <a:t>95% confidence interval</a:t>
-                </a:r>
-                <a:r>
-                  <a:rPr lang="en-US" dirty="0">
-                    <a:solidFill>
-                      <a:schemeClr val="accent6">
-                        <a:lumMod val="60000"/>
-                        <a:lumOff val="40000"/>
-                      </a:schemeClr>
-                    </a:solidFill>
-                  </a:rPr>
-                  <a:t> for the true mean weight.</a:t>
-                </a:r>
-              </a:p>
-              <a:p>
-                <a:pPr marL="0" indent="0">
-                  <a:buNone/>
-                </a:pPr>
-                <a:endParaRPr lang="en-US" sz="1800" dirty="0">
+                <a:endParaRPr lang="en-US" sz="2400" dirty="0">
                   <a:solidFill>
                     <a:schemeClr val="accent6">
                       <a:lumMod val="60000"/>
@@ -4856,11 +6127,219 @@
                 </a:endParaRPr>
               </a:p>
               <a:p>
+                <a:r>
+                  <a:rPr lang="en-US" sz="2400" dirty="0">
+                    <a:solidFill>
+                      <a:schemeClr val="accent6">
+                        <a:lumMod val="60000"/>
+                        <a:lumOff val="40000"/>
+                      </a:schemeClr>
+                    </a:solidFill>
+                  </a:rPr>
+                  <a:t>Find a </a:t>
+                </a:r>
+                <a:r>
+                  <a:rPr lang="en-US" sz="2400" b="1" dirty="0">
+                    <a:solidFill>
+                      <a:schemeClr val="accent6">
+                        <a:lumMod val="60000"/>
+                        <a:lumOff val="40000"/>
+                      </a:schemeClr>
+                    </a:solidFill>
+                  </a:rPr>
+                  <a:t>95% confidence interval</a:t>
+                </a:r>
+                <a:r>
+                  <a:rPr lang="en-US" sz="2400" dirty="0">
+                    <a:solidFill>
+                      <a:schemeClr val="accent6">
+                        <a:lumMod val="60000"/>
+                        <a:lumOff val="40000"/>
+                      </a:schemeClr>
+                    </a:solidFill>
+                  </a:rPr>
+                  <a:t> for the true mean weight.</a:t>
+                </a:r>
+              </a:p>
+            </p:txBody>
+          </p:sp>
+        </mc:Choice>
+        <mc:Fallback>
+          <p:sp>
+            <p:nvSpPr>
+              <p:cNvPr id="9" name="TextBox 8">
+                <a:extLst>
+                  <a:ext uri="{FF2B5EF4-FFF2-40B4-BE49-F238E27FC236}">
+                    <a16:creationId xmlns:a16="http://schemas.microsoft.com/office/drawing/2014/main" id="{AFDE1D28-5E44-6011-F4BC-E24CC60765D1}"/>
+                  </a:ext>
+                </a:extLst>
+              </p:cNvPr>
+              <p:cNvSpPr txBox="1">
+                <a:spLocks noRot="1" noChangeAspect="1" noMove="1" noResize="1" noEditPoints="1" noAdjustHandles="1" noChangeArrowheads="1" noChangeShapeType="1" noTextEdit="1"/>
+              </p:cNvSpPr>
+              <p:nvPr/>
+            </p:nvSpPr>
+            <p:spPr>
+              <a:xfrm>
+                <a:off x="229727" y="769683"/>
+                <a:ext cx="10688497" cy="3156505"/>
+              </a:xfrm>
+              <a:prstGeom prst="rect">
+                <a:avLst/>
+              </a:prstGeom>
+              <a:blipFill>
+                <a:blip r:embed="rId5"/>
+                <a:stretch>
+                  <a:fillRect l="-913" t="-1544" b="-3475"/>
+                </a:stretch>
+              </a:blipFill>
+            </p:spPr>
+            <p:txBody>
+              <a:bodyPr/>
+              <a:lstStyle/>
+              <a:p>
+                <a:r>
+                  <a:rPr lang="en-US">
+                    <a:noFill/>
+                  </a:rPr>
+                  <a:t> </a:t>
+                </a:r>
+              </a:p>
+            </p:txBody>
+          </p:sp>
+        </mc:Fallback>
+      </mc:AlternateContent>
+    </p:spTree>
+    <p:extLst>
+      <p:ext uri="{BB962C8B-B14F-4D97-AF65-F5344CB8AC3E}">
+        <p14:creationId xmlns:p14="http://schemas.microsoft.com/office/powerpoint/2010/main" val="1404785048"/>
+      </p:ext>
+    </p:extLst>
+  </p:cSld>
+  <p:clrMapOvr>
+    <a:masterClrMapping/>
+  </p:clrMapOvr>
+</p:sld>
+</file>
+
+<file path=ppt/slides/slide12.xml><?xml version="1.0" encoding="utf-8"?>
+<p:sld xmlns:a="http://schemas.openxmlformats.org/drawingml/2006/main" xmlns:r="http://schemas.openxmlformats.org/officeDocument/2006/relationships" xmlns:p="http://schemas.openxmlformats.org/presentationml/2006/main">
+  <p:cSld>
+    <p:spTree>
+      <p:nvGrpSpPr>
+        <p:cNvPr id="1" name="">
+          <a:extLst>
+            <a:ext uri="{FF2B5EF4-FFF2-40B4-BE49-F238E27FC236}">
+              <a16:creationId xmlns:a16="http://schemas.microsoft.com/office/drawing/2014/main" id="{15CF0346-4AC7-36F8-C559-5079105CF04C}"/>
+            </a:ext>
+          </a:extLst>
+        </p:cNvPr>
+        <p:cNvGrpSpPr/>
+        <p:nvPr/>
+      </p:nvGrpSpPr>
+      <p:grpSpPr>
+        <a:xfrm>
+          <a:off x="0" y="0"/>
+          <a:ext cx="0" cy="0"/>
+          <a:chOff x="0" y="0"/>
+          <a:chExt cx="0" cy="0"/>
+        </a:xfrm>
+      </p:grpSpPr>
+      <p:pic>
+        <p:nvPicPr>
+          <p:cNvPr id="7" name="Picture 6">
+            <a:extLst>
+              <a:ext uri="{FF2B5EF4-FFF2-40B4-BE49-F238E27FC236}">
+                <a16:creationId xmlns:a16="http://schemas.microsoft.com/office/drawing/2014/main" id="{CA07BDD8-EB45-9CD6-D877-E61761BB524D}"/>
+              </a:ext>
+            </a:extLst>
+          </p:cNvPr>
+          <p:cNvPicPr>
+            <a:picLocks noChangeAspect="1"/>
+          </p:cNvPicPr>
+          <p:nvPr/>
+        </p:nvPicPr>
+        <p:blipFill>
+          <a:blip r:embed="rId3"/>
+          <a:stretch>
+            <a:fillRect/>
+          </a:stretch>
+        </p:blipFill>
+        <p:spPr>
+          <a:xfrm>
+            <a:off x="6322727" y="54116"/>
+            <a:ext cx="4714370" cy="668260"/>
+          </a:xfrm>
+          <a:prstGeom prst="rect">
+            <a:avLst/>
+          </a:prstGeom>
+        </p:spPr>
+      </p:pic>
+      <p:pic>
+        <p:nvPicPr>
+          <p:cNvPr id="2" name="Picture 1">
+            <a:extLst>
+              <a:ext uri="{FF2B5EF4-FFF2-40B4-BE49-F238E27FC236}">
+                <a16:creationId xmlns:a16="http://schemas.microsoft.com/office/drawing/2014/main" id="{C97C8DFC-2933-8035-E8DD-9D7F4F041111}"/>
+              </a:ext>
+            </a:extLst>
+          </p:cNvPr>
+          <p:cNvPicPr>
+            <a:picLocks noChangeAspect="1"/>
+          </p:cNvPicPr>
+          <p:nvPr/>
+        </p:nvPicPr>
+        <p:blipFill>
+          <a:blip r:embed="rId4"/>
+          <a:stretch>
+            <a:fillRect/>
+          </a:stretch>
+        </p:blipFill>
+        <p:spPr>
+          <a:xfrm>
+            <a:off x="8394192" y="2221423"/>
+            <a:ext cx="3797808" cy="2006282"/>
+          </a:xfrm>
+          <a:prstGeom prst="rect">
+            <a:avLst/>
+          </a:prstGeom>
+        </p:spPr>
+      </p:pic>
+      <mc:AlternateContent xmlns:mc="http://schemas.openxmlformats.org/markup-compatibility/2006">
+        <mc:Choice xmlns:a14="http://schemas.microsoft.com/office/drawing/2010/main" Requires="a14">
+          <p:sp>
+            <p:nvSpPr>
+              <p:cNvPr id="9" name="TextBox 8">
+                <a:extLst>
+                  <a:ext uri="{FF2B5EF4-FFF2-40B4-BE49-F238E27FC236}">
+                    <a16:creationId xmlns:a16="http://schemas.microsoft.com/office/drawing/2014/main" id="{52903719-50D8-053C-6AFB-667366E5BEC0}"/>
+                  </a:ext>
+                </a:extLst>
+              </p:cNvPr>
+              <p:cNvSpPr txBox="1"/>
+              <p:nvPr/>
+            </p:nvSpPr>
+            <p:spPr>
+              <a:xfrm>
+                <a:off x="229727" y="440499"/>
+                <a:ext cx="11374009" cy="5952592"/>
+              </a:xfrm>
+              <a:prstGeom prst="rect">
+                <a:avLst/>
+              </a:prstGeom>
+              <a:noFill/>
+            </p:spPr>
+            <p:txBody>
+              <a:bodyPr wrap="square">
+                <a:spAutoFit/>
+              </a:bodyPr>
+              <a:lstStyle/>
+              <a:p>
                 <a:pPr marL="0" indent="0">
                   <a:buNone/>
                 </a:pPr>
                 <a:r>
-                  <a:rPr lang="en-US" sz="1800" dirty="0">
+                  <a:rPr lang="en-US" sz="2400" dirty="0">
                     <a:solidFill>
                       <a:schemeClr val="accent6">
                         <a:lumMod val="60000"/>
@@ -4876,7 +6355,7 @@
                   <a:buNone/>
                 </a:pPr>
                 <a:r>
-                  <a:rPr lang="en-US" sz="1800" b="1" dirty="0">
+                  <a:rPr lang="en-US" sz="2400" b="1" dirty="0">
                     <a:solidFill>
                       <a:schemeClr val="accent6">
                         <a:lumMod val="60000"/>
@@ -4889,7 +6368,7 @@
                 <a14:m>
                   <m:oMath xmlns:m="http://schemas.openxmlformats.org/officeDocument/2006/math">
                     <m:r>
-                      <a:rPr lang="en-US" sz="1800" b="1" i="0" smtClean="0">
+                      <a:rPr lang="en-US" sz="2400" b="1" i="0" smtClean="0">
                         <a:solidFill>
                           <a:schemeClr val="accent6">
                             <a:lumMod val="60000"/>
@@ -4901,7 +6380,7 @@
                       <m:t> </m:t>
                     </m:r>
                     <m:r>
-                      <a:rPr lang="en-US" sz="1800" i="1">
+                      <a:rPr lang="en-US" sz="2400" i="1">
                         <a:solidFill>
                           <a:schemeClr val="accent6">
                             <a:lumMod val="60000"/>
@@ -4913,7 +6392,7 @@
                       <m:t>𝑛</m:t>
                     </m:r>
                     <m:r>
-                      <a:rPr lang="en-US" sz="1800">
+                      <a:rPr lang="en-US" sz="2400">
                         <a:solidFill>
                           <a:schemeClr val="accent6">
                             <a:lumMod val="60000"/>
@@ -4924,22 +6403,10 @@
                       </a:rPr>
                       <m:t>=</m:t>
                     </m:r>
-                    <m:r>
-                      <a:rPr lang="en-US" sz="1800" b="0" i="0" smtClean="0">
-                        <a:solidFill>
-                          <a:schemeClr val="accent6">
-                            <a:lumMod val="60000"/>
-                            <a:lumOff val="40000"/>
-                          </a:schemeClr>
-                        </a:solidFill>
-                        <a:latin typeface="Cambria Math" panose="02040503050406030204" pitchFamily="18" charset="0"/>
-                      </a:rPr>
-                      <m:t>25</m:t>
-                    </m:r>
                   </m:oMath>
                 </a14:m>
                 <a:r>
-                  <a:rPr lang="en-US" sz="1800" dirty="0">
+                  <a:rPr lang="en-US" sz="2400" dirty="0">
                     <a:solidFill>
                       <a:schemeClr val="accent6">
                         <a:lumMod val="60000"/>
@@ -4947,14 +6414,14 @@
                       </a:schemeClr>
                     </a:solidFill>
                   </a:rPr>
-                  <a:t>, </a:t>
+                  <a:t>49, </a:t>
                 </a:r>
                 <a14:m>
                   <m:oMath xmlns:m="http://schemas.openxmlformats.org/officeDocument/2006/math">
                     <m:limUpp>
                       <m:limUppPr>
                         <m:ctrlPr>
-                          <a:rPr lang="ar-AE" sz="1800" i="1">
+                          <a:rPr lang="ar-AE" sz="2400" i="1">
                             <a:solidFill>
                               <a:schemeClr val="accent6">
                                 <a:lumMod val="60000"/>
@@ -4967,7 +6434,7 @@
                       </m:limUppPr>
                       <m:e>
                         <m:r>
-                          <a:rPr lang="ar-AE" sz="1800" i="1">
+                          <a:rPr lang="ar-AE" sz="2400" i="1">
                             <a:solidFill>
                               <a:schemeClr val="accent6">
                                 <a:lumMod val="60000"/>
@@ -4981,7 +6448,7 @@
                       </m:e>
                       <m:lim>
                         <m:r>
-                          <a:rPr lang="ar-AE" sz="1800">
+                          <a:rPr lang="ar-AE" sz="2400">
                             <a:solidFill>
                               <a:schemeClr val="accent6">
                                 <a:lumMod val="60000"/>
@@ -4995,7 +6462,7 @@
                       </m:lim>
                     </m:limUpp>
                     <m:r>
-                      <a:rPr lang="ar-AE" sz="1800">
+                      <a:rPr lang="ar-AE" sz="2400">
                         <a:solidFill>
                           <a:schemeClr val="accent6">
                             <a:lumMod val="60000"/>
@@ -5007,7 +6474,7 @@
                       <m:t>=</m:t>
                     </m:r>
                     <m:r>
-                      <a:rPr lang="ar-AE" sz="1800">
+                      <a:rPr lang="ar-AE" sz="2400">
                         <a:solidFill>
                           <a:schemeClr val="accent6">
                             <a:lumMod val="60000"/>
@@ -5021,7 +6488,7 @@
                   </m:oMath>
                 </a14:m>
                 <a:r>
-                  <a:rPr lang="en-US" sz="1800" dirty="0">
+                  <a:rPr lang="en-US" sz="2400" dirty="0">
                     <a:solidFill>
                       <a:schemeClr val="accent6">
                         <a:lumMod val="60000"/>
@@ -5034,7 +6501,7 @@
                 <a14:m>
                   <m:oMath xmlns:m="http://schemas.openxmlformats.org/officeDocument/2006/math">
                     <m:r>
-                      <a:rPr lang="en-US" sz="1800" i="1">
+                      <a:rPr lang="en-US" sz="2400" i="1">
                         <a:solidFill>
                           <a:schemeClr val="accent6">
                             <a:lumMod val="60000"/>
@@ -5046,7 +6513,7 @@
                       <m:t>𝜎</m:t>
                     </m:r>
                     <m:r>
-                      <a:rPr lang="en-US" sz="1800">
+                      <a:rPr lang="en-US" sz="2400">
                         <a:solidFill>
                           <a:schemeClr val="accent6">
                             <a:lumMod val="60000"/>
@@ -5058,7 +6525,7 @@
                       <m:t>=</m:t>
                     </m:r>
                     <m:r>
-                      <a:rPr lang="en-US" sz="1800">
+                      <a:rPr lang="en-US" sz="2400">
                         <a:solidFill>
                           <a:schemeClr val="accent6">
                             <a:lumMod val="60000"/>
@@ -5072,7 +6539,7 @@
                   </m:oMath>
                 </a14:m>
                 <a:r>
-                  <a:rPr lang="en-US" sz="1800" dirty="0">
+                  <a:rPr lang="en-US" sz="2400" dirty="0">
                     <a:solidFill>
                       <a:schemeClr val="accent6">
                         <a:lumMod val="60000"/>
@@ -5088,7 +6555,7 @@
                   <a:buAutoNum type="arabicPeriod"/>
                 </a:pPr>
                 <a:r>
-                  <a:rPr lang="en-US" sz="1800" dirty="0">
+                  <a:rPr lang="en-US" sz="2400" dirty="0">
                     <a:solidFill>
                       <a:schemeClr val="accent6">
                         <a:lumMod val="60000"/>
@@ -5101,7 +6568,7 @@
                 <a14:m>
                   <m:oMath xmlns:m="http://schemas.openxmlformats.org/officeDocument/2006/math">
                     <m:r>
-                      <a:rPr lang="en-US" sz="1800" i="1">
+                      <a:rPr lang="en-US" sz="2400" i="1">
                         <a:solidFill>
                           <a:schemeClr val="accent6">
                             <a:lumMod val="60000"/>
@@ -5113,7 +6580,7 @@
                       <m:t>𝜎</m:t>
                     </m:r>
                     <m:r>
-                      <a:rPr lang="en-US" sz="1800" i="1">
+                      <a:rPr lang="en-US" sz="2400" i="1">
                         <a:solidFill>
                           <a:schemeClr val="accent6">
                             <a:lumMod val="60000"/>
@@ -5127,7 +6594,7 @@
                   </m:oMath>
                 </a14:m>
                 <a:r>
-                  <a:rPr lang="en-US" sz="1800" dirty="0">
+                  <a:rPr lang="en-US" sz="2400" dirty="0">
                     <a:solidFill>
                       <a:schemeClr val="accent6">
                         <a:lumMod val="60000"/>
@@ -5140,7 +6607,7 @@
               </a:p>
               <a:p>
                 <a:r>
-                  <a:rPr lang="en-US" dirty="0">
+                  <a:rPr lang="en-US" sz="2400" dirty="0">
                     <a:solidFill>
                       <a:schemeClr val="accent6">
                         <a:lumMod val="60000"/>
@@ -5148,23 +6615,12 @@
                       </a:schemeClr>
                     </a:solidFill>
                   </a:rPr>
-                  <a:t>       </a:t>
-                </a:r>
-                <a:r>
-                  <a:rPr lang="en-US" sz="1800" dirty="0">
-                    <a:solidFill>
-                      <a:schemeClr val="accent6">
-                        <a:lumMod val="60000"/>
-                        <a:lumOff val="40000"/>
-                      </a:schemeClr>
-                    </a:solidFill>
-                  </a:rPr>
-                  <a:t>Critical z value for 95%: </a:t>
+                  <a:t>       Critical z value for 95%: </a:t>
                 </a:r>
                 <a14:m>
                   <m:oMath xmlns:m="http://schemas.openxmlformats.org/officeDocument/2006/math">
                     <m:r>
-                      <a:rPr lang="en-US" sz="1800" b="1">
+                      <a:rPr lang="en-US" sz="2400" b="1">
                         <a:solidFill>
                           <a:schemeClr val="accent6">
                             <a:lumMod val="60000"/>
@@ -5176,7 +6632,7 @@
                       <m:t> </m:t>
                     </m:r>
                     <m:r>
-                      <a:rPr lang="ar-AE" sz="1800" i="1">
+                      <a:rPr lang="ar-AE" sz="2400" i="1">
                         <a:solidFill>
                           <a:schemeClr val="accent6">
                             <a:lumMod val="60000"/>
@@ -5188,7 +6644,7 @@
                       <m:t>𝑧</m:t>
                     </m:r>
                     <m:r>
-                      <a:rPr lang="ar-AE" sz="1800">
+                      <a:rPr lang="ar-AE" sz="2400">
                         <a:solidFill>
                           <a:schemeClr val="accent6">
                             <a:lumMod val="60000"/>
@@ -5200,7 +6656,7 @@
                       <m:t>=</m:t>
                     </m:r>
                     <m:r>
-                      <a:rPr lang="ar-AE" sz="1800">
+                      <a:rPr lang="ar-AE" sz="2400">
                         <a:solidFill>
                           <a:schemeClr val="accent6">
                             <a:lumMod val="60000"/>
@@ -5212,7 +6668,7 @@
                       <m:t>1</m:t>
                     </m:r>
                     <m:r>
-                      <a:rPr lang="ar-AE" sz="1800">
+                      <a:rPr lang="ar-AE" sz="2400">
                         <a:solidFill>
                           <a:schemeClr val="accent6">
                             <a:lumMod val="60000"/>
@@ -5224,7 +6680,7 @@
                       <m:t>.</m:t>
                     </m:r>
                     <m:r>
-                      <a:rPr lang="ar-AE" sz="1800">
+                      <a:rPr lang="ar-AE" sz="2400">
                         <a:solidFill>
                           <a:schemeClr val="accent6">
                             <a:lumMod val="60000"/>
@@ -5237,7 +6693,17 @@
                     </m:r>
                   </m:oMath>
                 </a14:m>
-                <a:endParaRPr lang="en-US" sz="1800" dirty="0">
+                <a:endParaRPr lang="en-US" sz="2400" dirty="0">
+                  <a:solidFill>
+                    <a:schemeClr val="accent6">
+                      <a:lumMod val="60000"/>
+                      <a:lumOff val="40000"/>
+                    </a:schemeClr>
+                  </a:solidFill>
+                </a:endParaRPr>
+              </a:p>
+              <a:p>
+                <a:endParaRPr lang="en-US" sz="2400" dirty="0">
                   <a:solidFill>
                     <a:schemeClr val="accent6">
                       <a:lumMod val="60000"/>
@@ -5251,7 +6717,7 @@
                   <a:buNone/>
                 </a:pPr>
                 <a:r>
-                  <a:rPr lang="en-US" sz="1800" dirty="0">
+                  <a:rPr lang="en-US" sz="2400" dirty="0">
                     <a:solidFill>
                       <a:schemeClr val="accent6">
                         <a:lumMod val="60000"/>
@@ -5264,7 +6730,7 @@
                 <a14:m>
                   <m:oMath xmlns:m="http://schemas.openxmlformats.org/officeDocument/2006/math">
                     <m:r>
-                      <a:rPr lang="en-US" sz="1800" i="1">
+                      <a:rPr lang="en-US" sz="2400" i="1">
                         <a:solidFill>
                           <a:schemeClr val="accent6">
                             <a:lumMod val="60000"/>
@@ -5278,7 +6744,7 @@
                     <m:d>
                       <m:dPr>
                         <m:ctrlPr>
-                          <a:rPr lang="en-US" sz="1800" i="1">
+                          <a:rPr lang="en-US" sz="2400" i="1">
                             <a:solidFill>
                               <a:schemeClr val="accent6">
                                 <a:lumMod val="60000"/>
@@ -5293,7 +6759,7 @@
                         <m:f>
                           <m:fPr>
                             <m:ctrlPr>
-                              <a:rPr lang="en-US" sz="1800" i="1">
+                              <a:rPr lang="en-US" sz="2400" i="1">
                                 <a:solidFill>
                                   <a:schemeClr val="accent6">
                                     <a:lumMod val="60000"/>
@@ -5306,7 +6772,7 @@
                           </m:fPr>
                           <m:num>
                             <m:r>
-                              <a:rPr lang="en-US" sz="1800" i="1">
+                              <a:rPr lang="en-US" sz="2400" i="1">
                                 <a:solidFill>
                                   <a:schemeClr val="accent6">
                                     <a:lumMod val="60000"/>
@@ -5323,7 +6789,7 @@
                               <m:radPr>
                                 <m:degHide m:val="on"/>
                                 <m:ctrlPr>
-                                  <a:rPr lang="en-US" sz="1800" i="1">
+                                  <a:rPr lang="en-US" sz="2400" i="1">
                                     <a:solidFill>
                                       <a:schemeClr val="accent6">
                                         <a:lumMod val="60000"/>
@@ -5337,7 +6803,7 @@
                               <m:deg/>
                               <m:e>
                                 <m:r>
-                                  <a:rPr lang="en-US" sz="1800" i="1">
+                                  <a:rPr lang="en-US" sz="2400" i="1">
                                     <a:solidFill>
                                       <a:schemeClr val="accent6">
                                         <a:lumMod val="60000"/>
@@ -5357,7 +6823,7 @@
                   </m:oMath>
                 </a14:m>
                 <a:r>
-                  <a:rPr lang="en-US" sz="1800" dirty="0">
+                  <a:rPr lang="en-US" sz="2400" dirty="0">
                     <a:solidFill>
                       <a:schemeClr val="accent6">
                         <a:lumMod val="60000"/>
@@ -5373,7 +6839,7 @@
                       <m:radPr>
                         <m:degHide m:val="on"/>
                         <m:ctrlPr>
-                          <a:rPr lang="en-US" sz="1800" i="1" smtClean="0">
+                          <a:rPr lang="en-US" sz="2400" i="1" smtClean="0">
                             <a:solidFill>
                               <a:schemeClr val="accent6">
                                 <a:lumMod val="60000"/>
@@ -5387,7 +6853,7 @@
                       <m:deg/>
                       <m:e>
                         <m:r>
-                          <a:rPr lang="en-US" sz="1800" b="0" i="1" smtClean="0">
+                          <a:rPr lang="en-US" sz="2400" b="0" i="1" smtClean="0">
                             <a:solidFill>
                               <a:schemeClr val="accent6">
                                 <a:lumMod val="60000"/>
@@ -5403,7 +6869,7 @@
                   </m:oMath>
                 </a14:m>
                 <a:r>
-                  <a:rPr lang="en-US" sz="1800" dirty="0">
+                  <a:rPr lang="en-US" sz="2400" dirty="0">
                     <a:solidFill>
                       <a:schemeClr val="accent6">
                         <a:lumMod val="60000"/>
@@ -5414,7 +6880,7 @@
                   <a:t>) = </a:t>
                 </a:r>
                 <a:r>
-                  <a:rPr lang="en-US" sz="1800" b="1" dirty="0">
+                  <a:rPr lang="en-US" sz="2400" b="1" dirty="0">
                     <a:solidFill>
                       <a:schemeClr val="accent6">
                         <a:lumMod val="60000"/>
@@ -5430,7 +6896,7 @@
                   <a:buNone/>
                 </a:pPr>
                 <a:r>
-                  <a:rPr lang="en-US" sz="1800" dirty="0">
+                  <a:rPr lang="en-US" sz="2400" dirty="0">
                     <a:solidFill>
                       <a:schemeClr val="accent6">
                         <a:lumMod val="60000"/>
@@ -5445,8 +6911,21 @@
                 <a:pPr marL="0" indent="0">
                   <a:buNone/>
                 </a:pPr>
-                <a:r>
-                  <a:rPr lang="en-US" sz="1800" dirty="0">
+                <a:endParaRPr lang="en-US" sz="2400" dirty="0">
+                  <a:solidFill>
+                    <a:schemeClr val="accent6">
+                      <a:lumMod val="60000"/>
+                      <a:lumOff val="40000"/>
+                    </a:schemeClr>
+                  </a:solidFill>
+                </a:endParaRPr>
+              </a:p>
+              <a:p>
+                <a:pPr marL="0" indent="0">
+                  <a:buNone/>
+                </a:pPr>
+                <a:r>
+                  <a:rPr lang="en-US" sz="2400" dirty="0">
                     <a:solidFill>
                       <a:schemeClr val="accent6">
                         <a:lumMod val="60000"/>
@@ -5462,7 +6941,7 @@
                   <a:buNone/>
                 </a:pPr>
                 <a:r>
-                  <a:rPr lang="en-US" sz="1800" dirty="0">
+                  <a:rPr lang="en-US" sz="2400" dirty="0">
                     <a:solidFill>
                       <a:schemeClr val="accent6">
                         <a:lumMod val="60000"/>
@@ -5473,7 +6952,7 @@
                   <a:t> 50 – 2.24 &lt; </a:t>
                 </a:r>
                 <a:r>
-                  <a:rPr lang="el-GR" sz="1800" dirty="0">
+                  <a:rPr lang="el-GR" sz="2400" dirty="0">
                     <a:solidFill>
                       <a:schemeClr val="accent6">
                         <a:lumMod val="60000"/>
@@ -5484,7 +6963,7 @@
                   <a:t>μ</a:t>
                 </a:r>
                 <a:r>
-                  <a:rPr lang="en-US" sz="1800" dirty="0">
+                  <a:rPr lang="en-US" sz="2400" dirty="0">
                     <a:solidFill>
                       <a:schemeClr val="accent6">
                         <a:lumMod val="60000"/>
@@ -5500,7 +6979,7 @@
                   <a:buNone/>
                 </a:pPr>
                 <a:r>
-                  <a:rPr lang="en-US" sz="1800" dirty="0">
+                  <a:rPr lang="en-US" sz="2400" dirty="0">
                     <a:solidFill>
                       <a:schemeClr val="accent6">
                         <a:lumMod val="60000"/>
@@ -5511,7 +6990,7 @@
                   <a:t> =&gt; 47.76 g &lt; </a:t>
                 </a:r>
                 <a:r>
-                  <a:rPr lang="el-GR" sz="1800" dirty="0">
+                  <a:rPr lang="el-GR" sz="2400" dirty="0">
                     <a:solidFill>
                       <a:schemeClr val="accent6">
                         <a:lumMod val="60000"/>
@@ -5522,7 +7001,7 @@
                   <a:t>μ</a:t>
                 </a:r>
                 <a:r>
-                  <a:rPr lang="en-US" sz="1800" dirty="0">
+                  <a:rPr lang="en-US" sz="2400" dirty="0">
                     <a:solidFill>
                       <a:schemeClr val="accent6">
                         <a:lumMod val="60000"/>
@@ -5537,8 +7016,21 @@
                 <a:pPr marL="0" indent="0">
                   <a:buNone/>
                 </a:pPr>
-                <a:r>
-                  <a:rPr lang="en-US" sz="1800" dirty="0">
+                <a:endParaRPr lang="en-US" sz="2400" dirty="0">
+                  <a:solidFill>
+                    <a:schemeClr val="accent6">
+                      <a:lumMod val="60000"/>
+                      <a:lumOff val="40000"/>
+                    </a:schemeClr>
+                  </a:solidFill>
+                </a:endParaRPr>
+              </a:p>
+              <a:p>
+                <a:pPr marL="0" indent="0">
+                  <a:buNone/>
+                </a:pPr>
+                <a:r>
+                  <a:rPr lang="en-US" sz="2400" dirty="0">
                     <a:solidFill>
                       <a:schemeClr val="accent6">
                         <a:lumMod val="60000"/>
@@ -5551,7 +7043,7 @@
                 <a14:m>
                   <m:oMath xmlns:m="http://schemas.openxmlformats.org/officeDocument/2006/math">
                     <m:r>
-                      <a:rPr lang="en-US" sz="1800" i="1">
+                      <a:rPr lang="en-US" sz="2400" i="1">
                         <a:solidFill>
                           <a:schemeClr val="accent6">
                             <a:lumMod val="60000"/>
@@ -5565,7 +7057,7 @@
                   </m:oMath>
                 </a14:m>
                 <a:r>
-                  <a:rPr lang="en-US" sz="1800" dirty="0">
+                  <a:rPr lang="en-US" sz="2400" dirty="0">
                     <a:solidFill>
                       <a:schemeClr val="accent6">
                         <a:lumMod val="60000"/>
@@ -5576,7 +7068,7 @@
                   <a:t> of the packaged product lies between </a:t>
                 </a:r>
                 <a:r>
-                  <a:rPr lang="en-US" sz="1800" b="1" dirty="0">
+                  <a:rPr lang="en-US" sz="2400" b="1" dirty="0">
                     <a:solidFill>
                       <a:schemeClr val="accent6">
                         <a:lumMod val="60000"/>
@@ -5587,7 +7079,7 @@
                   <a:t>47.76g</a:t>
                 </a:r>
                 <a:r>
-                  <a:rPr lang="en-US" sz="1800" dirty="0">
+                  <a:rPr lang="en-US" sz="2400" dirty="0">
                     <a:solidFill>
                       <a:schemeClr val="accent6">
                         <a:lumMod val="60000"/>
@@ -5598,7 +7090,7 @@
                   <a:t> and </a:t>
                 </a:r>
                 <a:r>
-                  <a:rPr lang="en-US" sz="1800" b="1" dirty="0">
+                  <a:rPr lang="en-US" sz="2400" b="1" dirty="0">
                     <a:solidFill>
                       <a:schemeClr val="accent6">
                         <a:lumMod val="60000"/>
@@ -5609,7 +7101,7 @@
                   <a:t>52.24g</a:t>
                 </a:r>
                 <a:r>
-                  <a:rPr lang="en-US" sz="1800" dirty="0">
+                  <a:rPr lang="en-US" sz="2400" dirty="0">
                     <a:solidFill>
                       <a:schemeClr val="accent6">
                         <a:lumMod val="60000"/>
@@ -5620,7 +7112,7 @@
                   <a:t>.”</a:t>
                 </a:r>
                 <a:br>
-                  <a:rPr lang="en-US" sz="1800" dirty="0">
+                  <a:rPr lang="en-US" sz="2400" dirty="0">
                     <a:solidFill>
                       <a:schemeClr val="accent6">
                         <a:lumMod val="60000"/>
@@ -5629,7 +7121,7 @@
                     </a:solidFill>
                   </a:rPr>
                 </a:br>
-                <a:endParaRPr lang="en-US" sz="1800" dirty="0">
+                <a:endParaRPr lang="en-US" sz="2400" dirty="0">
                   <a:solidFill>
                     <a:schemeClr val="accent6">
                       <a:lumMod val="60000"/>
@@ -5638,130 +7130,16 @@
                   </a:solidFill>
                 </a:endParaRPr>
               </a:p>
-              <a:p>
-                <a:pPr marL="0" indent="0">
-                  <a:buNone/>
-                </a:pPr>
-                <a:r>
-                  <a:rPr lang="en-US" sz="1800" dirty="0">
-                    <a:solidFill>
-                      <a:schemeClr val="accent6">
-                        <a:lumMod val="60000"/>
-                        <a:lumOff val="40000"/>
-                      </a:schemeClr>
-                    </a:solidFill>
-                  </a:rPr>
-                  <a:t>For n = 100, the CI was [</a:t>
-                </a:r>
-                <a:r>
-                  <a:rPr lang="en-US" sz="1800" b="1" dirty="0">
-                    <a:solidFill>
-                      <a:schemeClr val="accent6">
-                        <a:lumMod val="60000"/>
-                        <a:lumOff val="40000"/>
-                      </a:schemeClr>
-                    </a:solidFill>
-                  </a:rPr>
-                  <a:t>48.43, 51.57</a:t>
-                </a:r>
-                <a:r>
-                  <a:rPr lang="en-US" sz="1800" dirty="0">
-                    <a:solidFill>
-                      <a:schemeClr val="accent6">
-                        <a:lumMod val="60000"/>
-                        <a:lumOff val="40000"/>
-                      </a:schemeClr>
-                    </a:solidFill>
-                  </a:rPr>
-                  <a:t> ]</a:t>
-                </a:r>
-              </a:p>
-              <a:p>
-                <a:pPr marL="0" indent="0">
-                  <a:buNone/>
-                </a:pPr>
-                <a:r>
-                  <a:rPr lang="en-US" sz="1800" dirty="0">
-                    <a:solidFill>
-                      <a:schemeClr val="accent6">
-                        <a:lumMod val="60000"/>
-                        <a:lumOff val="40000"/>
-                      </a:schemeClr>
-                    </a:solidFill>
-                  </a:rPr>
-                  <a:t>For n = 49,   the CI was [</a:t>
-                </a:r>
-                <a:r>
-                  <a:rPr lang="en-US" sz="1800" b="1" dirty="0">
-                    <a:solidFill>
-                      <a:schemeClr val="accent6">
-                        <a:lumMod val="60000"/>
-                        <a:lumOff val="40000"/>
-                      </a:schemeClr>
-                    </a:solidFill>
-                  </a:rPr>
-                  <a:t>47.76</a:t>
-                </a:r>
-                <a:r>
-                  <a:rPr lang="en-US" sz="1800" dirty="0">
-                    <a:solidFill>
-                      <a:schemeClr val="accent6">
-                        <a:lumMod val="60000"/>
-                        <a:lumOff val="40000"/>
-                      </a:schemeClr>
-                    </a:solidFill>
-                  </a:rPr>
-                  <a:t>, </a:t>
-                </a:r>
-                <a:r>
-                  <a:rPr lang="en-US" sz="1800" b="1" dirty="0">
-                    <a:solidFill>
-                      <a:schemeClr val="accent6">
-                        <a:lumMod val="60000"/>
-                        <a:lumOff val="40000"/>
-                      </a:schemeClr>
-                    </a:solidFill>
-                  </a:rPr>
-                  <a:t>52.24</a:t>
-                </a:r>
-                <a:r>
-                  <a:rPr lang="en-US" sz="1800" dirty="0">
-                    <a:solidFill>
-                      <a:schemeClr val="accent6">
-                        <a:lumMod val="60000"/>
-                        <a:lumOff val="40000"/>
-                      </a:schemeClr>
-                    </a:solidFill>
-                  </a:rPr>
-                  <a:t> ]</a:t>
-                </a:r>
-              </a:p>
-              <a:p>
-                <a:pPr marL="0" indent="0">
-                  <a:buNone/>
-                </a:pPr>
-                <a:r>
-                  <a:rPr lang="en-US" sz="1800" dirty="0">
-                    <a:solidFill>
-                      <a:schemeClr val="accent6">
-                        <a:lumMod val="60000"/>
-                        <a:lumOff val="40000"/>
-                      </a:schemeClr>
-                    </a:solidFill>
-                  </a:rPr>
-                  <a:t>Conclusion: As the sample size decreases, the interval becomes wider, so the estimate is less precise.</a:t>
-                </a:r>
-              </a:p>
             </p:txBody>
           </p:sp>
         </mc:Choice>
-        <mc:Fallback xmlns="">
+        <mc:Fallback>
           <p:sp>
             <p:nvSpPr>
               <p:cNvPr id="9" name="TextBox 8">
                 <a:extLst>
                   <a:ext uri="{FF2B5EF4-FFF2-40B4-BE49-F238E27FC236}">
-                    <a16:creationId xmlns:a16="http://schemas.microsoft.com/office/drawing/2014/main" id="{AFDE1D28-5E44-6011-F4BC-E24CC60765D1}"/>
+                    <a16:creationId xmlns:a16="http://schemas.microsoft.com/office/drawing/2014/main" id="{52903719-50D8-053C-6AFB-667366E5BEC0}"/>
                   </a:ext>
                 </a:extLst>
               </p:cNvPr>
@@ -5772,8 +7150,8 @@
             </p:nvSpPr>
             <p:spPr>
               <a:xfrm>
-                <a:off x="229727" y="769683"/>
-                <a:ext cx="10688497" cy="5954835"/>
+                <a:off x="229727" y="440499"/>
+                <a:ext cx="11374009" cy="5952592"/>
               </a:xfrm>
               <a:prstGeom prst="rect">
                 <a:avLst/>
@@ -5781,7 +7159,7 @@
               <a:blipFill>
                 <a:blip r:embed="rId5"/>
                 <a:stretch>
-                  <a:fillRect l="-513" t="-512" r="-342" b="-716"/>
+                  <a:fillRect l="-857" t="-819"/>
                 </a:stretch>
               </a:blipFill>
             </p:spPr>
@@ -5803,7 +7181,7 @@
     </p:spTree>
     <p:extLst>
       <p:ext uri="{BB962C8B-B14F-4D97-AF65-F5344CB8AC3E}">
-        <p14:creationId xmlns:p14="http://schemas.microsoft.com/office/powerpoint/2010/main" val="1404785048"/>
+        <p14:creationId xmlns:p14="http://schemas.microsoft.com/office/powerpoint/2010/main" val="3435061468"/>
       </p:ext>
     </p:extLst>
   </p:cSld>
@@ -5813,7 +7191,304 @@
 </p:sld>
 </file>
 
-<file path=ppt/slides/slide11.xml><?xml version="1.0" encoding="utf-8"?>
+<file path=ppt/slides/slide13.xml><?xml version="1.0" encoding="utf-8"?>
+<p:sld xmlns:a="http://schemas.openxmlformats.org/drawingml/2006/main" xmlns:r="http://schemas.openxmlformats.org/officeDocument/2006/relationships" xmlns:p="http://schemas.openxmlformats.org/presentationml/2006/main">
+  <p:cSld>
+    <p:spTree>
+      <p:nvGrpSpPr>
+        <p:cNvPr id="1" name="">
+          <a:extLst>
+            <a:ext uri="{FF2B5EF4-FFF2-40B4-BE49-F238E27FC236}">
+              <a16:creationId xmlns:a16="http://schemas.microsoft.com/office/drawing/2014/main" id="{42D792F3-856D-DEA6-2AF2-3A9D3831B8F9}"/>
+            </a:ext>
+          </a:extLst>
+        </p:cNvPr>
+        <p:cNvGrpSpPr/>
+        <p:nvPr/>
+      </p:nvGrpSpPr>
+      <p:grpSpPr>
+        <a:xfrm>
+          <a:off x="0" y="0"/>
+          <a:ext cx="0" cy="0"/>
+          <a:chOff x="0" y="0"/>
+          <a:chExt cx="0" cy="0"/>
+        </a:xfrm>
+      </p:grpSpPr>
+      <p:pic>
+        <p:nvPicPr>
+          <p:cNvPr id="7" name="Picture 6">
+            <a:extLst>
+              <a:ext uri="{FF2B5EF4-FFF2-40B4-BE49-F238E27FC236}">
+                <a16:creationId xmlns:a16="http://schemas.microsoft.com/office/drawing/2014/main" id="{D7B6CDAB-3B97-6720-85C8-EAD1FCB1A24F}"/>
+              </a:ext>
+            </a:extLst>
+          </p:cNvPr>
+          <p:cNvPicPr>
+            <a:picLocks noChangeAspect="1"/>
+          </p:cNvPicPr>
+          <p:nvPr/>
+        </p:nvPicPr>
+        <p:blipFill>
+          <a:blip r:embed="rId3"/>
+          <a:stretch>
+            <a:fillRect/>
+          </a:stretch>
+        </p:blipFill>
+        <p:spPr>
+          <a:xfrm>
+            <a:off x="6322727" y="54116"/>
+            <a:ext cx="4714370" cy="668260"/>
+          </a:xfrm>
+          <a:prstGeom prst="rect">
+            <a:avLst/>
+          </a:prstGeom>
+        </p:spPr>
+      </p:pic>
+      <p:pic>
+        <p:nvPicPr>
+          <p:cNvPr id="2" name="Picture 1">
+            <a:extLst>
+              <a:ext uri="{FF2B5EF4-FFF2-40B4-BE49-F238E27FC236}">
+                <a16:creationId xmlns:a16="http://schemas.microsoft.com/office/drawing/2014/main" id="{E2B3AF32-E187-8D49-8BBB-CBB8C780FCD7}"/>
+              </a:ext>
+            </a:extLst>
+          </p:cNvPr>
+          <p:cNvPicPr>
+            <a:picLocks noChangeAspect="1"/>
+          </p:cNvPicPr>
+          <p:nvPr/>
+        </p:nvPicPr>
+        <p:blipFill>
+          <a:blip r:embed="rId4"/>
+          <a:stretch>
+            <a:fillRect/>
+          </a:stretch>
+        </p:blipFill>
+        <p:spPr>
+          <a:xfrm>
+            <a:off x="8394192" y="2221423"/>
+            <a:ext cx="3797808" cy="2006282"/>
+          </a:xfrm>
+          <a:prstGeom prst="rect">
+            <a:avLst/>
+          </a:prstGeom>
+        </p:spPr>
+      </p:pic>
+      <p:sp>
+        <p:nvSpPr>
+          <p:cNvPr id="9" name="TextBox 8">
+            <a:extLst>
+              <a:ext uri="{FF2B5EF4-FFF2-40B4-BE49-F238E27FC236}">
+                <a16:creationId xmlns:a16="http://schemas.microsoft.com/office/drawing/2014/main" id="{4B272F18-A7EE-18F8-88D6-BA3BE5189645}"/>
+              </a:ext>
+            </a:extLst>
+          </p:cNvPr>
+          <p:cNvSpPr txBox="1"/>
+          <p:nvPr/>
+        </p:nvSpPr>
+        <p:spPr>
+          <a:xfrm>
+            <a:off x="229727" y="440499"/>
+            <a:ext cx="11374009" cy="2677656"/>
+          </a:xfrm>
+          <a:prstGeom prst="rect">
+            <a:avLst/>
+          </a:prstGeom>
+          <a:noFill/>
+        </p:spPr>
+        <p:txBody>
+          <a:bodyPr wrap="square">
+            <a:spAutoFit/>
+          </a:bodyPr>
+          <a:lstStyle/>
+          <a:p>
+            <a:pPr marL="0" indent="0">
+              <a:buNone/>
+            </a:pPr>
+            <a:r>
+              <a:rPr lang="en-US" sz="2400" dirty="0">
+                <a:solidFill>
+                  <a:schemeClr val="accent6">
+                    <a:lumMod val="60000"/>
+                    <a:lumOff val="40000"/>
+                  </a:schemeClr>
+                </a:solidFill>
+              </a:rPr>
+              <a:t>For n = 100, the CI was [</a:t>
+            </a:r>
+            <a:r>
+              <a:rPr lang="en-US" sz="2400" b="1" dirty="0">
+                <a:solidFill>
+                  <a:schemeClr val="accent6">
+                    <a:lumMod val="60000"/>
+                    <a:lumOff val="40000"/>
+                  </a:schemeClr>
+                </a:solidFill>
+              </a:rPr>
+              <a:t>48.43, 51.57</a:t>
+            </a:r>
+            <a:r>
+              <a:rPr lang="en-US" sz="2400" dirty="0">
+                <a:solidFill>
+                  <a:schemeClr val="accent6">
+                    <a:lumMod val="60000"/>
+                    <a:lumOff val="40000"/>
+                  </a:schemeClr>
+                </a:solidFill>
+              </a:rPr>
+              <a:t> ]</a:t>
+            </a:r>
+          </a:p>
+          <a:p>
+            <a:pPr marL="0" indent="0">
+              <a:buNone/>
+            </a:pPr>
+            <a:endParaRPr lang="en-US" sz="2400" dirty="0">
+              <a:solidFill>
+                <a:schemeClr val="accent6">
+                  <a:lumMod val="60000"/>
+                  <a:lumOff val="40000"/>
+                </a:schemeClr>
+              </a:solidFill>
+            </a:endParaRPr>
+          </a:p>
+          <a:p>
+            <a:pPr marL="0" indent="0">
+              <a:buNone/>
+            </a:pPr>
+            <a:r>
+              <a:rPr lang="en-US" sz="2400" dirty="0">
+                <a:solidFill>
+                  <a:schemeClr val="accent6">
+                    <a:lumMod val="60000"/>
+                    <a:lumOff val="40000"/>
+                  </a:schemeClr>
+                </a:solidFill>
+              </a:rPr>
+              <a:t>For n = 49,   the CI was [</a:t>
+            </a:r>
+            <a:r>
+              <a:rPr lang="en-US" sz="2400" b="1" dirty="0">
+                <a:solidFill>
+                  <a:schemeClr val="accent6">
+                    <a:lumMod val="60000"/>
+                    <a:lumOff val="40000"/>
+                  </a:schemeClr>
+                </a:solidFill>
+              </a:rPr>
+              <a:t>47.76</a:t>
+            </a:r>
+            <a:r>
+              <a:rPr lang="en-US" sz="2400" dirty="0">
+                <a:solidFill>
+                  <a:schemeClr val="accent6">
+                    <a:lumMod val="60000"/>
+                    <a:lumOff val="40000"/>
+                  </a:schemeClr>
+                </a:solidFill>
+              </a:rPr>
+              <a:t>, </a:t>
+            </a:r>
+            <a:r>
+              <a:rPr lang="en-US" sz="2400" b="1" dirty="0">
+                <a:solidFill>
+                  <a:schemeClr val="accent6">
+                    <a:lumMod val="60000"/>
+                    <a:lumOff val="40000"/>
+                  </a:schemeClr>
+                </a:solidFill>
+              </a:rPr>
+              <a:t>52.24</a:t>
+            </a:r>
+            <a:r>
+              <a:rPr lang="en-US" sz="2400" dirty="0">
+                <a:solidFill>
+                  <a:schemeClr val="accent6">
+                    <a:lumMod val="60000"/>
+                    <a:lumOff val="40000"/>
+                  </a:schemeClr>
+                </a:solidFill>
+              </a:rPr>
+              <a:t> ]</a:t>
+            </a:r>
+          </a:p>
+          <a:p>
+            <a:pPr marL="0" indent="0">
+              <a:buNone/>
+            </a:pPr>
+            <a:endParaRPr lang="en-US" sz="2400" dirty="0">
+              <a:solidFill>
+                <a:schemeClr val="accent6">
+                  <a:lumMod val="60000"/>
+                  <a:lumOff val="40000"/>
+                </a:schemeClr>
+              </a:solidFill>
+            </a:endParaRPr>
+          </a:p>
+          <a:p>
+            <a:pPr marL="0" indent="0">
+              <a:buNone/>
+            </a:pPr>
+            <a:r>
+              <a:rPr lang="en-US" sz="2400" dirty="0">
+                <a:solidFill>
+                  <a:schemeClr val="accent6">
+                    <a:lumMod val="60000"/>
+                    <a:lumOff val="40000"/>
+                  </a:schemeClr>
+                </a:solidFill>
+              </a:rPr>
+              <a:t>Conclusion: </a:t>
+            </a:r>
+          </a:p>
+          <a:p>
+            <a:pPr marL="0" indent="0">
+              <a:buNone/>
+            </a:pPr>
+            <a:r>
+              <a:rPr lang="en-US" sz="2400" dirty="0">
+                <a:solidFill>
+                  <a:schemeClr val="accent6">
+                    <a:lumMod val="60000"/>
+                    <a:lumOff val="40000"/>
+                  </a:schemeClr>
+                </a:solidFill>
+              </a:rPr>
+              <a:t>As the sample size decreases, the interval becomes wider, </a:t>
+            </a:r>
+          </a:p>
+          <a:p>
+            <a:pPr marL="0" indent="0">
+              <a:buNone/>
+            </a:pPr>
+            <a:r>
+              <a:rPr lang="en-US" sz="2400" dirty="0">
+                <a:solidFill>
+                  <a:schemeClr val="accent6">
+                    <a:lumMod val="60000"/>
+                    <a:lumOff val="40000"/>
+                  </a:schemeClr>
+                </a:solidFill>
+              </a:rPr>
+              <a:t>so the estimate is less precise.</a:t>
+            </a:r>
+          </a:p>
+        </p:txBody>
+      </p:sp>
+    </p:spTree>
+    <p:extLst>
+      <p:ext uri="{BB962C8B-B14F-4D97-AF65-F5344CB8AC3E}">
+        <p14:creationId xmlns:p14="http://schemas.microsoft.com/office/powerpoint/2010/main" val="3750265977"/>
+      </p:ext>
+    </p:extLst>
+  </p:cSld>
+  <p:clrMapOvr>
+    <a:masterClrMapping/>
+  </p:clrMapOvr>
+</p:sld>
+</file>
+
+<file path=ppt/slides/slide14.xml><?xml version="1.0" encoding="utf-8"?>
 <p:sld xmlns:a="http://schemas.openxmlformats.org/drawingml/2006/main" xmlns:r="http://schemas.openxmlformats.org/officeDocument/2006/relationships" xmlns:p="http://schemas.openxmlformats.org/presentationml/2006/main">
   <p:cSld>
     <p:spTree>
@@ -5836,688 +7511,6 @@
           <a:chExt cx="0" cy="0"/>
         </a:xfrm>
       </p:grpSpPr>
-      <mc:AlternateContent xmlns:mc="http://schemas.openxmlformats.org/markup-compatibility/2006" xmlns:a14="http://schemas.microsoft.com/office/drawing/2010/main">
-        <mc:Choice Requires="a14">
-          <p:sp>
-            <p:nvSpPr>
-              <p:cNvPr id="8" name="Content Placeholder 7">
-                <a:extLst>
-                  <a:ext uri="{FF2B5EF4-FFF2-40B4-BE49-F238E27FC236}">
-                    <a16:creationId xmlns:a16="http://schemas.microsoft.com/office/drawing/2014/main" id="{72757EEC-C566-5F54-6902-9CCA20E2A3AB}"/>
-                  </a:ext>
-                </a:extLst>
-              </p:cNvPr>
-              <p:cNvSpPr>
-                <a:spLocks noGrp="1"/>
-              </p:cNvSpPr>
-              <p:nvPr>
-                <p:ph idx="1"/>
-              </p:nvPr>
-            </p:nvSpPr>
-            <p:spPr>
-              <a:xfrm>
-                <a:off x="128016" y="874647"/>
-                <a:ext cx="10689336" cy="5983353"/>
-              </a:xfrm>
-            </p:spPr>
-            <p:txBody>
-              <a:bodyPr>
-                <a:noAutofit/>
-              </a:bodyPr>
-              <a:lstStyle/>
-              <a:p>
-                <a:pPr marL="0" indent="0">
-                  <a:buNone/>
-                </a:pPr>
-                <a:r>
-                  <a:rPr lang="en-US" sz="1800" dirty="0"/>
-                  <a:t>Problem: Let’s redo previous problem but smaller sample size n = 25</a:t>
-                </a:r>
-              </a:p>
-              <a:p>
-                <a:pPr marL="0" indent="0">
-                  <a:buNone/>
-                </a:pPr>
-                <a:r>
-                  <a:rPr lang="en-US" sz="1800" dirty="0"/>
-                  <a:t>A factory wants to find average weight </a:t>
-                </a:r>
-                <a14:m>
-                  <m:oMath xmlns:m="http://schemas.openxmlformats.org/officeDocument/2006/math">
-                    <m:r>
-                      <a:rPr lang="en-US" sz="1800" i="1">
-                        <a:latin typeface="Cambria Math" panose="02040503050406030204" pitchFamily="18" charset="0"/>
-                      </a:rPr>
-                      <m:t>𝜇</m:t>
-                    </m:r>
-                  </m:oMath>
-                </a14:m>
-                <a:r>
-                  <a:rPr lang="en-US" sz="1800" dirty="0"/>
-                  <a:t> of a packaged product. You take a random sample of </a:t>
-                </a:r>
-                <a14:m>
-                  <m:oMath xmlns:m="http://schemas.openxmlformats.org/officeDocument/2006/math">
-                    <m:r>
-                      <a:rPr lang="en-US" sz="1800" i="1">
-                        <a:latin typeface="Cambria Math" panose="02040503050406030204" pitchFamily="18" charset="0"/>
-                      </a:rPr>
-                      <m:t>𝑛</m:t>
-                    </m:r>
-                    <m:r>
-                      <a:rPr lang="en-US" sz="1800">
-                        <a:latin typeface="Cambria Math" panose="02040503050406030204" pitchFamily="18" charset="0"/>
-                      </a:rPr>
-                      <m:t>=</m:t>
-                    </m:r>
-                  </m:oMath>
-                </a14:m>
-                <a:r>
-                  <a:rPr lang="en-US" sz="1800" dirty="0"/>
-                  <a:t> 25 packages and find the </a:t>
-                </a:r>
-                <a:r>
-                  <a:rPr lang="en-US" sz="1800" b="1" dirty="0"/>
-                  <a:t>sample mean</a:t>
-                </a:r>
-                <a:r>
-                  <a:rPr lang="en-US" sz="1800" dirty="0"/>
-                  <a:t> </a:t>
-                </a:r>
-                <a14:m>
-                  <m:oMath xmlns:m="http://schemas.openxmlformats.org/officeDocument/2006/math">
-                    <m:limUpp>
-                      <m:limUppPr>
-                        <m:ctrlPr>
-                          <a:rPr lang="ar-AE" sz="1800" i="1">
-                            <a:latin typeface="Cambria Math" panose="02040503050406030204" pitchFamily="18" charset="0"/>
-                          </a:rPr>
-                        </m:ctrlPr>
-                      </m:limUppPr>
-                      <m:e>
-                        <m:r>
-                          <a:rPr lang="ar-AE" sz="1800" i="1">
-                            <a:latin typeface="Cambria Math" panose="02040503050406030204" pitchFamily="18" charset="0"/>
-                          </a:rPr>
-                          <m:t>𝑥</m:t>
-                        </m:r>
-                      </m:e>
-                      <m:lim>
-                        <m:r>
-                          <a:rPr lang="ar-AE" sz="1800">
-                            <a:latin typeface="Cambria Math" panose="02040503050406030204" pitchFamily="18" charset="0"/>
-                          </a:rPr>
-                          <m:t>ˉ</m:t>
-                        </m:r>
-                      </m:lim>
-                    </m:limUpp>
-                    <m:r>
-                      <a:rPr lang="ar-AE" sz="1800">
-                        <a:latin typeface="Cambria Math" panose="02040503050406030204" pitchFamily="18" charset="0"/>
-                      </a:rPr>
-                      <m:t>=</m:t>
-                    </m:r>
-                    <m:r>
-                      <a:rPr lang="ar-AE" sz="1800">
-                        <a:latin typeface="Cambria Math" panose="02040503050406030204" pitchFamily="18" charset="0"/>
-                      </a:rPr>
-                      <m:t>50</m:t>
-                    </m:r>
-                  </m:oMath>
-                </a14:m>
-                <a:r>
-                  <a:rPr lang="en-US" sz="1800" dirty="0"/>
-                  <a:t> grams. The </a:t>
-                </a:r>
-                <a:r>
-                  <a:rPr lang="en-US" sz="1800" b="1" dirty="0">
-                    <a:solidFill>
-                      <a:schemeClr val="accent4">
-                        <a:lumMod val="60000"/>
-                        <a:lumOff val="40000"/>
-                      </a:schemeClr>
-                    </a:solidFill>
-                  </a:rPr>
-                  <a:t>sample</a:t>
-                </a:r>
-                <a:r>
-                  <a:rPr lang="en-US" sz="1800" dirty="0"/>
-                  <a:t> standard deviation was calculated to be </a:t>
-                </a:r>
-                <a14:m>
-                  <m:oMath xmlns:m="http://schemas.openxmlformats.org/officeDocument/2006/math">
-                    <m:r>
-                      <m:rPr>
-                        <m:sty m:val="p"/>
-                      </m:rPr>
-                      <a:rPr lang="en-US" sz="1800" b="0" i="0" smtClean="0">
-                        <a:latin typeface="Cambria Math" panose="02040503050406030204" pitchFamily="18" charset="0"/>
-                      </a:rPr>
-                      <m:t>s</m:t>
-                    </m:r>
-                    <m:r>
-                      <a:rPr lang="en-US" sz="1800">
-                        <a:latin typeface="Cambria Math" panose="02040503050406030204" pitchFamily="18" charset="0"/>
-                      </a:rPr>
-                      <m:t>=</m:t>
-                    </m:r>
-                    <m:r>
-                      <a:rPr lang="en-US" sz="1800">
-                        <a:latin typeface="Cambria Math" panose="02040503050406030204" pitchFamily="18" charset="0"/>
-                      </a:rPr>
-                      <m:t>8</m:t>
-                    </m:r>
-                  </m:oMath>
-                </a14:m>
-                <a:r>
-                  <a:rPr lang="en-US" sz="1800" dirty="0"/>
-                  <a:t> grams. </a:t>
-                </a:r>
-              </a:p>
-              <a:p>
-                <a:pPr marL="0" indent="0">
-                  <a:buNone/>
-                </a:pPr>
-                <a:r>
-                  <a:rPr lang="en-US" sz="1800" dirty="0"/>
-                  <a:t>Find a </a:t>
-                </a:r>
-                <a:r>
-                  <a:rPr lang="en-US" sz="1800" b="1" dirty="0"/>
-                  <a:t>95% confidence interval</a:t>
-                </a:r>
-                <a:r>
-                  <a:rPr lang="en-US" sz="1800" dirty="0"/>
-                  <a:t> for the true mean weight.</a:t>
-                </a:r>
-              </a:p>
-              <a:p>
-                <a:pPr marL="0" indent="0">
-                  <a:buNone/>
-                </a:pPr>
-                <a:endParaRPr lang="en-US" sz="1800" dirty="0"/>
-              </a:p>
-              <a:p>
-                <a:pPr marL="0" indent="0">
-                  <a:buNone/>
-                </a:pPr>
-                <a:r>
-                  <a:rPr lang="en-US" sz="1800" dirty="0"/>
-                  <a:t>Ans: </a:t>
-                </a:r>
-              </a:p>
-              <a:p>
-                <a:pPr marL="0" indent="0">
-                  <a:buNone/>
-                </a:pPr>
-                <a:r>
-                  <a:rPr lang="en-US" sz="1800" b="1" dirty="0"/>
-                  <a:t>Given:</a:t>
-                </a:r>
-                <a14:m>
-                  <m:oMath xmlns:m="http://schemas.openxmlformats.org/officeDocument/2006/math">
-                    <m:r>
-                      <a:rPr lang="en-US" sz="1800" b="1" i="0" smtClean="0">
-                        <a:latin typeface="Cambria Math" panose="02040503050406030204" pitchFamily="18" charset="0"/>
-                      </a:rPr>
-                      <m:t> </m:t>
-                    </m:r>
-                    <m:r>
-                      <a:rPr lang="en-US" sz="1800" i="1">
-                        <a:latin typeface="Cambria Math" panose="02040503050406030204" pitchFamily="18" charset="0"/>
-                      </a:rPr>
-                      <m:t>𝑛</m:t>
-                    </m:r>
-                    <m:r>
-                      <a:rPr lang="en-US" sz="1800">
-                        <a:latin typeface="Cambria Math" panose="02040503050406030204" pitchFamily="18" charset="0"/>
-                      </a:rPr>
-                      <m:t>=</m:t>
-                    </m:r>
-                    <m:r>
-                      <a:rPr lang="en-US" sz="1800" b="0" i="0" smtClean="0">
-                        <a:latin typeface="Cambria Math" panose="02040503050406030204" pitchFamily="18" charset="0"/>
-                      </a:rPr>
-                      <m:t>25</m:t>
-                    </m:r>
-                  </m:oMath>
-                </a14:m>
-                <a:r>
-                  <a:rPr lang="en-US" sz="1800" dirty="0"/>
-                  <a:t>, </a:t>
-                </a:r>
-                <a14:m>
-                  <m:oMath xmlns:m="http://schemas.openxmlformats.org/officeDocument/2006/math">
-                    <m:limUpp>
-                      <m:limUppPr>
-                        <m:ctrlPr>
-                          <a:rPr lang="ar-AE" sz="1800" i="1">
-                            <a:latin typeface="Cambria Math" panose="02040503050406030204" pitchFamily="18" charset="0"/>
-                          </a:rPr>
-                        </m:ctrlPr>
-                      </m:limUppPr>
-                      <m:e>
-                        <m:r>
-                          <a:rPr lang="ar-AE" sz="1800" i="1">
-                            <a:latin typeface="Cambria Math" panose="02040503050406030204" pitchFamily="18" charset="0"/>
-                          </a:rPr>
-                          <m:t>𝑥</m:t>
-                        </m:r>
-                      </m:e>
-                      <m:lim>
-                        <m:r>
-                          <a:rPr lang="ar-AE" sz="1800">
-                            <a:latin typeface="Cambria Math" panose="02040503050406030204" pitchFamily="18" charset="0"/>
-                          </a:rPr>
-                          <m:t>ˉ</m:t>
-                        </m:r>
-                      </m:lim>
-                    </m:limUpp>
-                    <m:r>
-                      <a:rPr lang="ar-AE" sz="1800">
-                        <a:latin typeface="Cambria Math" panose="02040503050406030204" pitchFamily="18" charset="0"/>
-                      </a:rPr>
-                      <m:t>=</m:t>
-                    </m:r>
-                    <m:r>
-                      <a:rPr lang="ar-AE" sz="1800">
-                        <a:latin typeface="Cambria Math" panose="02040503050406030204" pitchFamily="18" charset="0"/>
-                      </a:rPr>
-                      <m:t>50</m:t>
-                    </m:r>
-                  </m:oMath>
-                </a14:m>
-                <a:r>
-                  <a:rPr lang="en-US" sz="1800" dirty="0"/>
-                  <a:t> g, </a:t>
-                </a:r>
-                <a14:m>
-                  <m:oMath xmlns:m="http://schemas.openxmlformats.org/officeDocument/2006/math">
-                    <m:r>
-                      <m:rPr>
-                        <m:sty m:val="p"/>
-                      </m:rPr>
-                      <a:rPr lang="en-US" sz="1800" b="0" i="0" smtClean="0">
-                        <a:latin typeface="Cambria Math" panose="02040503050406030204" pitchFamily="18" charset="0"/>
-                      </a:rPr>
-                      <m:t>s</m:t>
-                    </m:r>
-                    <m:r>
-                      <a:rPr lang="en-US" sz="1800">
-                        <a:latin typeface="Cambria Math" panose="02040503050406030204" pitchFamily="18" charset="0"/>
-                      </a:rPr>
-                      <m:t>=</m:t>
-                    </m:r>
-                    <m:r>
-                      <a:rPr lang="en-US" sz="1800">
-                        <a:latin typeface="Cambria Math" panose="02040503050406030204" pitchFamily="18" charset="0"/>
-                      </a:rPr>
-                      <m:t>8</m:t>
-                    </m:r>
-                  </m:oMath>
-                </a14:m>
-                <a:r>
-                  <a:rPr lang="en-US" sz="1800" dirty="0"/>
-                  <a:t> g, Confidence level = 95%</a:t>
-                </a:r>
-              </a:p>
-              <a:p>
-                <a:pPr marL="342900" indent="-342900">
-                  <a:buAutoNum type="arabicPeriod"/>
-                </a:pPr>
-                <a:r>
-                  <a:rPr lang="en-US" sz="1800" dirty="0"/>
-                  <a:t>Since we know sample. std dev. </a:t>
-                </a:r>
-                <a14:m>
-                  <m:oMath xmlns:m="http://schemas.openxmlformats.org/officeDocument/2006/math">
-                    <m:r>
-                      <m:rPr>
-                        <m:sty m:val="p"/>
-                      </m:rPr>
-                      <a:rPr lang="en-US" sz="1800" b="0" i="0" smtClean="0">
-                        <a:latin typeface="Cambria Math" panose="02040503050406030204" pitchFamily="18" charset="0"/>
-                      </a:rPr>
-                      <m:t>s</m:t>
-                    </m:r>
-                    <m:r>
-                      <a:rPr lang="en-US" sz="1800" i="1">
-                        <a:latin typeface="Cambria Math" panose="02040503050406030204" pitchFamily="18" charset="0"/>
-                      </a:rPr>
-                      <m:t> </m:t>
-                    </m:r>
-                  </m:oMath>
-                </a14:m>
-                <a:r>
-                  <a:rPr lang="en-US" sz="1800" dirty="0"/>
-                  <a:t>, we use t-distribution. Here </a:t>
-                </a:r>
-                <a:r>
-                  <a:rPr lang="en-US" sz="1800" dirty="0" err="1"/>
-                  <a:t>d.f.</a:t>
-                </a:r>
-                <a:r>
-                  <a:rPr lang="en-US" sz="1800" dirty="0"/>
-                  <a:t> is 25-1=24. </a:t>
-                </a:r>
-              </a:p>
-              <a:p>
-                <a:pPr marL="0" indent="0">
-                  <a:buNone/>
-                </a:pPr>
-                <a:r>
-                  <a:rPr lang="en-US" sz="1800" dirty="0"/>
-                  <a:t>        Using t-table, we find critical t- value for 95%: </a:t>
-                </a:r>
-                <a14:m>
-                  <m:oMath xmlns:m="http://schemas.openxmlformats.org/officeDocument/2006/math">
-                    <m:r>
-                      <a:rPr lang="en-US" sz="1800" b="1">
-                        <a:latin typeface="Cambria Math" panose="02040503050406030204" pitchFamily="18" charset="0"/>
-                      </a:rPr>
-                      <m:t> </m:t>
-                    </m:r>
-                    <m:r>
-                      <m:rPr>
-                        <m:sty m:val="p"/>
-                      </m:rPr>
-                      <a:rPr lang="en-US" sz="1800" b="0" i="0" smtClean="0">
-                        <a:latin typeface="Cambria Math" panose="02040503050406030204" pitchFamily="18" charset="0"/>
-                      </a:rPr>
-                      <m:t>t</m:t>
-                    </m:r>
-                    <m:r>
-                      <a:rPr lang="ar-AE" sz="1800">
-                        <a:latin typeface="Cambria Math" panose="02040503050406030204" pitchFamily="18" charset="0"/>
-                      </a:rPr>
-                      <m:t>=</m:t>
-                    </m:r>
-                    <m:r>
-                      <m:rPr>
-                        <m:nor/>
-                      </m:rPr>
-                      <a:rPr lang="en-US" sz="1800"/>
-                      <m:t>2.064</m:t>
-                    </m:r>
-                  </m:oMath>
-                </a14:m>
-                <a:endParaRPr lang="en-US" sz="1800" dirty="0"/>
-              </a:p>
-              <a:p>
-                <a:pPr marL="0" indent="0">
-                  <a:buNone/>
-                </a:pPr>
-                <a:r>
-                  <a:rPr lang="en-US" sz="1800" dirty="0"/>
-                  <a:t>2. Compute the margin of error (ME):  t</a:t>
-                </a:r>
-                <a14:m>
-                  <m:oMath xmlns:m="http://schemas.openxmlformats.org/officeDocument/2006/math">
-                    <m:d>
-                      <m:dPr>
-                        <m:ctrlPr>
-                          <a:rPr lang="en-US" sz="1800" i="1">
-                            <a:latin typeface="Cambria Math" panose="02040503050406030204" pitchFamily="18" charset="0"/>
-                          </a:rPr>
-                        </m:ctrlPr>
-                      </m:dPr>
-                      <m:e>
-                        <m:f>
-                          <m:fPr>
-                            <m:ctrlPr>
-                              <a:rPr lang="en-US" sz="1800" i="1">
-                                <a:latin typeface="Cambria Math" panose="02040503050406030204" pitchFamily="18" charset="0"/>
-                              </a:rPr>
-                            </m:ctrlPr>
-                          </m:fPr>
-                          <m:num>
-                            <m:r>
-                              <a:rPr lang="en-US" sz="1800" b="0" i="1" smtClean="0">
-                                <a:latin typeface="Cambria Math" panose="02040503050406030204" pitchFamily="18" charset="0"/>
-                              </a:rPr>
-                              <m:t>𝑠</m:t>
-                            </m:r>
-                          </m:num>
-                          <m:den>
-                            <m:rad>
-                              <m:radPr>
-                                <m:degHide m:val="on"/>
-                                <m:ctrlPr>
-                                  <a:rPr lang="en-US" sz="1800" i="1">
-                                    <a:latin typeface="Cambria Math" panose="02040503050406030204" pitchFamily="18" charset="0"/>
-                                  </a:rPr>
-                                </m:ctrlPr>
-                              </m:radPr>
-                              <m:deg/>
-                              <m:e>
-                                <m:r>
-                                  <a:rPr lang="en-US" sz="1800" i="1">
-                                    <a:latin typeface="Cambria Math" panose="02040503050406030204" pitchFamily="18" charset="0"/>
-                                  </a:rPr>
-                                  <m:t>𝑛</m:t>
-                                </m:r>
-                              </m:e>
-                            </m:rad>
-                          </m:den>
-                        </m:f>
-                      </m:e>
-                    </m:d>
-                  </m:oMath>
-                </a14:m>
-                <a:r>
-                  <a:rPr lang="en-US" sz="1800" dirty="0"/>
-                  <a:t>  = 2.064 x (8/</a:t>
-                </a:r>
-                <a14:m>
-                  <m:oMath xmlns:m="http://schemas.openxmlformats.org/officeDocument/2006/math">
-                    <m:rad>
-                      <m:radPr>
-                        <m:degHide m:val="on"/>
-                        <m:ctrlPr>
-                          <a:rPr lang="en-US" sz="1800" i="1" smtClean="0">
-                            <a:latin typeface="Cambria Math" panose="02040503050406030204" pitchFamily="18" charset="0"/>
-                          </a:rPr>
-                        </m:ctrlPr>
-                      </m:radPr>
-                      <m:deg/>
-                      <m:e>
-                        <m:r>
-                          <a:rPr lang="en-US" sz="1800" b="0" i="1" smtClean="0">
-                            <a:latin typeface="Cambria Math" panose="02040503050406030204" pitchFamily="18" charset="0"/>
-                          </a:rPr>
-                          <m:t>25</m:t>
-                        </m:r>
-                      </m:e>
-                    </m:rad>
-                  </m:oMath>
-                </a14:m>
-                <a:r>
-                  <a:rPr lang="en-US" sz="1800" dirty="0"/>
-                  <a:t>) = 3.3024</a:t>
-                </a:r>
-                <a:r>
-                  <a:rPr lang="en-US" sz="1800" b="1" dirty="0"/>
-                  <a:t> </a:t>
-                </a:r>
-              </a:p>
-              <a:p>
-                <a:pPr marL="0" indent="0">
-                  <a:buNone/>
-                </a:pPr>
-                <a:r>
-                  <a:rPr lang="en-US" sz="1800" dirty="0"/>
-                  <a:t>          (Note: ME became larger now)</a:t>
-                </a:r>
-              </a:p>
-              <a:p>
-                <a:pPr marL="0" indent="0">
-                  <a:buNone/>
-                </a:pPr>
-                <a:r>
-                  <a:rPr lang="en-US" sz="1800" dirty="0"/>
-                  <a:t>3. Construct the confidence interval:</a:t>
-                </a:r>
-              </a:p>
-              <a:p>
-                <a:pPr marL="0" indent="0">
-                  <a:buNone/>
-                </a:pPr>
-                <a:r>
-                  <a:rPr lang="en-US" sz="1800" dirty="0"/>
-                  <a:t>    50 – 3.30 &lt; </a:t>
-                </a:r>
-                <a:r>
-                  <a:rPr lang="el-GR" sz="1800" dirty="0"/>
-                  <a:t>μ</a:t>
-                </a:r>
-                <a:r>
-                  <a:rPr lang="en-US" sz="1800" dirty="0"/>
-                  <a:t> &lt; 50 + 3.30</a:t>
-                </a:r>
-              </a:p>
-              <a:p>
-                <a:pPr marL="0" indent="0">
-                  <a:buNone/>
-                </a:pPr>
-                <a:r>
-                  <a:rPr lang="en-US" sz="1800" dirty="0"/>
-                  <a:t> =&gt; 46.70 g &lt; </a:t>
-                </a:r>
-                <a:r>
-                  <a:rPr lang="el-GR" sz="1800" dirty="0"/>
-                  <a:t>μ</a:t>
-                </a:r>
-                <a:r>
-                  <a:rPr lang="en-US" sz="1800" dirty="0"/>
-                  <a:t> &lt; 53.30 g</a:t>
-                </a:r>
-              </a:p>
-              <a:p>
-                <a:pPr marL="0" indent="0">
-                  <a:buNone/>
-                </a:pPr>
-                <a:r>
-                  <a:rPr lang="en-US" sz="1800" dirty="0"/>
-                  <a:t>Interpretation: “We are 95% confident that the true mean weight </a:t>
-                </a:r>
-                <a14:m>
-                  <m:oMath xmlns:m="http://schemas.openxmlformats.org/officeDocument/2006/math">
-                    <m:r>
-                      <a:rPr lang="en-US" sz="1800" i="1">
-                        <a:latin typeface="Cambria Math" panose="02040503050406030204" pitchFamily="18" charset="0"/>
-                      </a:rPr>
-                      <m:t>𝜇</m:t>
-                    </m:r>
-                  </m:oMath>
-                </a14:m>
-                <a:r>
-                  <a:rPr lang="en-US" sz="1800" dirty="0"/>
-                  <a:t> of the packaged product lies between </a:t>
-                </a:r>
-                <a:r>
-                  <a:rPr lang="en-US" sz="1800" b="1" dirty="0"/>
-                  <a:t>46.70g</a:t>
-                </a:r>
-                <a:r>
-                  <a:rPr lang="en-US" sz="1800" dirty="0"/>
-                  <a:t> and </a:t>
-                </a:r>
-                <a:r>
-                  <a:rPr lang="en-US" sz="1800" b="1" dirty="0"/>
-                  <a:t>53.30g</a:t>
-                </a:r>
-                <a:r>
-                  <a:rPr lang="en-US" sz="1800" dirty="0"/>
-                  <a:t>.”</a:t>
-                </a:r>
-                <a:br>
-                  <a:rPr lang="en-US" sz="1800" dirty="0"/>
-                </a:br>
-                <a:endParaRPr lang="en-US" sz="1800" dirty="0"/>
-              </a:p>
-            </p:txBody>
-          </p:sp>
-        </mc:Choice>
-        <mc:Fallback xmlns="">
-          <p:sp>
-            <p:nvSpPr>
-              <p:cNvPr id="8" name="Content Placeholder 7">
-                <a:extLst>
-                  <a:ext uri="{FF2B5EF4-FFF2-40B4-BE49-F238E27FC236}">
-                    <a16:creationId xmlns:a16="http://schemas.microsoft.com/office/drawing/2014/main" id="{72757EEC-C566-5F54-6902-9CCA20E2A3AB}"/>
-                  </a:ext>
-                </a:extLst>
-              </p:cNvPr>
-              <p:cNvSpPr>
-                <a:spLocks noGrp="1" noRot="1" noChangeAspect="1" noMove="1" noResize="1" noEditPoints="1" noAdjustHandles="1" noChangeArrowheads="1" noChangeShapeType="1" noTextEdit="1"/>
-              </p:cNvSpPr>
-              <p:nvPr>
-                <p:ph idx="1"/>
-              </p:nvPr>
-            </p:nvSpPr>
-            <p:spPr>
-              <a:xfrm>
-                <a:off x="128016" y="874647"/>
-                <a:ext cx="10689336" cy="5983353"/>
-              </a:xfrm>
-              <a:blipFill>
-                <a:blip r:embed="rId3"/>
-                <a:stretch>
-                  <a:fillRect l="-456" t="-916" r="-285" b="-1527"/>
-                </a:stretch>
-              </a:blipFill>
-            </p:spPr>
-            <p:txBody>
-              <a:bodyPr/>
-              <a:lstStyle/>
-              <a:p>
-                <a:r>
-                  <a:rPr lang="en-US">
-                    <a:noFill/>
-                  </a:rPr>
-                  <a:t> </a:t>
-                </a:r>
-              </a:p>
-            </p:txBody>
-          </p:sp>
-        </mc:Fallback>
-      </mc:AlternateContent>
-      <p:sp>
-        <p:nvSpPr>
-          <p:cNvPr id="6" name="Title 1">
-            <a:extLst>
-              <a:ext uri="{FF2B5EF4-FFF2-40B4-BE49-F238E27FC236}">
-                <a16:creationId xmlns:a16="http://schemas.microsoft.com/office/drawing/2014/main" id="{68FEA277-D95E-36DA-FE8A-2D983CB59F7C}"/>
-              </a:ext>
-            </a:extLst>
-          </p:cNvPr>
-          <p:cNvSpPr>
-            <a:spLocks noGrp="1"/>
-          </p:cNvSpPr>
-          <p:nvPr>
-            <p:ph type="title"/>
-          </p:nvPr>
-        </p:nvSpPr>
-        <p:spPr>
-          <a:xfrm>
-            <a:off x="838200" y="154813"/>
-            <a:ext cx="10515600" cy="604139"/>
-          </a:xfrm>
-        </p:spPr>
-        <p:txBody>
-          <a:bodyPr>
-            <a:normAutofit/>
-          </a:bodyPr>
-          <a:lstStyle/>
-          <a:p>
-            <a:r>
-              <a:rPr lang="en-US" sz="3600" b="1" dirty="0"/>
-              <a:t>Confidence Interval: Application</a:t>
-            </a:r>
-            <a:endParaRPr lang="en-US" sz="3600" dirty="0"/>
-          </a:p>
-        </p:txBody>
-      </p:sp>
       <p:pic>
         <p:nvPicPr>
           <p:cNvPr id="2" name="Picture 1">
@@ -6533,7 +7526,7 @@
           <p:nvPr/>
         </p:nvPicPr>
         <p:blipFill>
-          <a:blip r:embed="rId4"/>
+          <a:blip r:embed="rId3"/>
           <a:stretch>
             <a:fillRect/>
           </a:stretch>
@@ -6563,7 +7556,7 @@
           <p:nvPr/>
         </p:nvPicPr>
         <p:blipFill>
-          <a:blip r:embed="rId5"/>
+          <a:blip r:embed="rId4"/>
           <a:stretch>
             <a:fillRect/>
           </a:stretch>
@@ -6578,6 +7571,460 @@
           </a:prstGeom>
         </p:spPr>
       </p:pic>
+      <mc:AlternateContent xmlns:mc="http://schemas.openxmlformats.org/markup-compatibility/2006">
+        <mc:Choice xmlns:a14="http://schemas.microsoft.com/office/drawing/2010/main" Requires="a14">
+          <p:sp>
+            <p:nvSpPr>
+              <p:cNvPr id="9" name="TextBox 8">
+                <a:extLst>
+                  <a:ext uri="{FF2B5EF4-FFF2-40B4-BE49-F238E27FC236}">
+                    <a16:creationId xmlns:a16="http://schemas.microsoft.com/office/drawing/2014/main" id="{17C081A9-353C-6270-139E-63D03A64781F}"/>
+                  </a:ext>
+                </a:extLst>
+              </p:cNvPr>
+              <p:cNvSpPr txBox="1"/>
+              <p:nvPr/>
+            </p:nvSpPr>
+            <p:spPr>
+              <a:xfrm>
+                <a:off x="255838" y="1098356"/>
+                <a:ext cx="11283890" cy="2787173"/>
+              </a:xfrm>
+              <a:prstGeom prst="rect">
+                <a:avLst/>
+              </a:prstGeom>
+              <a:noFill/>
+            </p:spPr>
+            <p:txBody>
+              <a:bodyPr wrap="square">
+                <a:spAutoFit/>
+              </a:bodyPr>
+              <a:lstStyle/>
+              <a:p>
+                <a:pPr marL="0" indent="0">
+                  <a:buNone/>
+                </a:pPr>
+                <a:r>
+                  <a:rPr lang="en-US" sz="2400" dirty="0">
+                    <a:solidFill>
+                      <a:schemeClr val="accent6">
+                        <a:lumMod val="60000"/>
+                        <a:lumOff val="40000"/>
+                      </a:schemeClr>
+                    </a:solidFill>
+                  </a:rPr>
+                  <a:t>Problem: </a:t>
+                </a:r>
+              </a:p>
+              <a:p>
+                <a:pPr marL="0" indent="0">
+                  <a:buNone/>
+                </a:pPr>
+                <a:r>
+                  <a:rPr lang="en-US" sz="2400" dirty="0">
+                    <a:solidFill>
+                      <a:schemeClr val="accent6">
+                        <a:lumMod val="60000"/>
+                        <a:lumOff val="40000"/>
+                      </a:schemeClr>
+                    </a:solidFill>
+                  </a:rPr>
+                  <a:t>Let’s redo previous problem but smaller sample size n = 25</a:t>
+                </a:r>
+              </a:p>
+              <a:p>
+                <a:pPr marL="0" indent="0">
+                  <a:buNone/>
+                </a:pPr>
+                <a:r>
+                  <a:rPr lang="en-US" sz="2400" dirty="0">
+                    <a:solidFill>
+                      <a:schemeClr val="accent6">
+                        <a:lumMod val="60000"/>
+                        <a:lumOff val="40000"/>
+                      </a:schemeClr>
+                    </a:solidFill>
+                  </a:rPr>
+                  <a:t>A factory wants to find average weight </a:t>
+                </a:r>
+                <a14:m>
+                  <m:oMath xmlns:m="http://schemas.openxmlformats.org/officeDocument/2006/math">
+                    <m:r>
+                      <a:rPr lang="en-US" sz="2400" i="1">
+                        <a:solidFill>
+                          <a:schemeClr val="accent6">
+                            <a:lumMod val="60000"/>
+                            <a:lumOff val="40000"/>
+                          </a:schemeClr>
+                        </a:solidFill>
+                        <a:latin typeface="Cambria Math" panose="02040503050406030204" pitchFamily="18" charset="0"/>
+                      </a:rPr>
+                      <m:t>𝜇</m:t>
+                    </m:r>
+                  </m:oMath>
+                </a14:m>
+                <a:r>
+                  <a:rPr lang="en-US" sz="2400" dirty="0">
+                    <a:solidFill>
+                      <a:schemeClr val="accent6">
+                        <a:lumMod val="60000"/>
+                        <a:lumOff val="40000"/>
+                      </a:schemeClr>
+                    </a:solidFill>
+                  </a:rPr>
+                  <a:t> of a packaged product. </a:t>
+                </a:r>
+              </a:p>
+              <a:p>
+                <a:pPr marL="0" indent="0">
+                  <a:buNone/>
+                </a:pPr>
+                <a:r>
+                  <a:rPr lang="en-US" sz="2400" dirty="0">
+                    <a:solidFill>
+                      <a:schemeClr val="accent6">
+                        <a:lumMod val="60000"/>
+                        <a:lumOff val="40000"/>
+                      </a:schemeClr>
+                    </a:solidFill>
+                  </a:rPr>
+                  <a:t>You take a random sample of </a:t>
+                </a:r>
+                <a14:m>
+                  <m:oMath xmlns:m="http://schemas.openxmlformats.org/officeDocument/2006/math">
+                    <m:r>
+                      <a:rPr lang="en-US" sz="2400" i="1">
+                        <a:solidFill>
+                          <a:schemeClr val="accent6">
+                            <a:lumMod val="60000"/>
+                            <a:lumOff val="40000"/>
+                          </a:schemeClr>
+                        </a:solidFill>
+                        <a:latin typeface="Cambria Math" panose="02040503050406030204" pitchFamily="18" charset="0"/>
+                      </a:rPr>
+                      <m:t>𝑛</m:t>
+                    </m:r>
+                    <m:r>
+                      <a:rPr lang="en-US" sz="2400">
+                        <a:solidFill>
+                          <a:schemeClr val="accent6">
+                            <a:lumMod val="60000"/>
+                            <a:lumOff val="40000"/>
+                          </a:schemeClr>
+                        </a:solidFill>
+                        <a:latin typeface="Cambria Math" panose="02040503050406030204" pitchFamily="18" charset="0"/>
+                      </a:rPr>
+                      <m:t>=</m:t>
+                    </m:r>
+                  </m:oMath>
+                </a14:m>
+                <a:r>
+                  <a:rPr lang="en-US" sz="2400" dirty="0">
+                    <a:solidFill>
+                      <a:schemeClr val="accent6">
+                        <a:lumMod val="60000"/>
+                        <a:lumOff val="40000"/>
+                      </a:schemeClr>
+                    </a:solidFill>
+                  </a:rPr>
+                  <a:t> 25 packages and find the </a:t>
+                </a:r>
+                <a:r>
+                  <a:rPr lang="en-US" sz="2400" b="1" dirty="0">
+                    <a:solidFill>
+                      <a:schemeClr val="accent6">
+                        <a:lumMod val="60000"/>
+                        <a:lumOff val="40000"/>
+                      </a:schemeClr>
+                    </a:solidFill>
+                  </a:rPr>
+                  <a:t>sample mean</a:t>
+                </a:r>
+                <a:r>
+                  <a:rPr lang="en-US" sz="2400" dirty="0">
+                    <a:solidFill>
+                      <a:schemeClr val="accent6">
+                        <a:lumMod val="60000"/>
+                        <a:lumOff val="40000"/>
+                      </a:schemeClr>
+                    </a:solidFill>
+                  </a:rPr>
+                  <a:t> </a:t>
+                </a:r>
+                <a14:m>
+                  <m:oMath xmlns:m="http://schemas.openxmlformats.org/officeDocument/2006/math">
+                    <m:limUpp>
+                      <m:limUppPr>
+                        <m:ctrlPr>
+                          <a:rPr lang="ar-AE" sz="2400" i="1">
+                            <a:solidFill>
+                              <a:schemeClr val="accent6">
+                                <a:lumMod val="60000"/>
+                                <a:lumOff val="40000"/>
+                              </a:schemeClr>
+                            </a:solidFill>
+                            <a:latin typeface="Cambria Math" panose="02040503050406030204" pitchFamily="18" charset="0"/>
+                          </a:rPr>
+                        </m:ctrlPr>
+                      </m:limUppPr>
+                      <m:e>
+                        <m:r>
+                          <a:rPr lang="ar-AE" sz="2400" i="1">
+                            <a:solidFill>
+                              <a:schemeClr val="accent6">
+                                <a:lumMod val="60000"/>
+                                <a:lumOff val="40000"/>
+                              </a:schemeClr>
+                            </a:solidFill>
+                            <a:latin typeface="Cambria Math" panose="02040503050406030204" pitchFamily="18" charset="0"/>
+                          </a:rPr>
+                          <m:t>𝑥</m:t>
+                        </m:r>
+                      </m:e>
+                      <m:lim>
+                        <m:r>
+                          <a:rPr lang="ar-AE" sz="2400">
+                            <a:solidFill>
+                              <a:schemeClr val="accent6">
+                                <a:lumMod val="60000"/>
+                                <a:lumOff val="40000"/>
+                              </a:schemeClr>
+                            </a:solidFill>
+                            <a:latin typeface="Cambria Math" panose="02040503050406030204" pitchFamily="18" charset="0"/>
+                          </a:rPr>
+                          <m:t>ˉ</m:t>
+                        </m:r>
+                      </m:lim>
+                    </m:limUpp>
+                    <m:r>
+                      <a:rPr lang="ar-AE" sz="2400">
+                        <a:solidFill>
+                          <a:schemeClr val="accent6">
+                            <a:lumMod val="60000"/>
+                            <a:lumOff val="40000"/>
+                          </a:schemeClr>
+                        </a:solidFill>
+                        <a:latin typeface="Cambria Math" panose="02040503050406030204" pitchFamily="18" charset="0"/>
+                      </a:rPr>
+                      <m:t>=</m:t>
+                    </m:r>
+                    <m:r>
+                      <a:rPr lang="ar-AE" sz="2400">
+                        <a:solidFill>
+                          <a:schemeClr val="accent6">
+                            <a:lumMod val="60000"/>
+                            <a:lumOff val="40000"/>
+                          </a:schemeClr>
+                        </a:solidFill>
+                        <a:latin typeface="Cambria Math" panose="02040503050406030204" pitchFamily="18" charset="0"/>
+                      </a:rPr>
+                      <m:t>50</m:t>
+                    </m:r>
+                  </m:oMath>
+                </a14:m>
+                <a:r>
+                  <a:rPr lang="en-US" sz="2400" dirty="0">
+                    <a:solidFill>
+                      <a:schemeClr val="accent6">
+                        <a:lumMod val="60000"/>
+                        <a:lumOff val="40000"/>
+                      </a:schemeClr>
+                    </a:solidFill>
+                  </a:rPr>
+                  <a:t> grams. </a:t>
+                </a:r>
+              </a:p>
+              <a:p>
+                <a:pPr marL="0" indent="0">
+                  <a:buNone/>
+                </a:pPr>
+                <a:r>
+                  <a:rPr lang="en-US" sz="2400" dirty="0">
+                    <a:solidFill>
+                      <a:schemeClr val="accent6">
+                        <a:lumMod val="60000"/>
+                        <a:lumOff val="40000"/>
+                      </a:schemeClr>
+                    </a:solidFill>
+                  </a:rPr>
+                  <a:t>The </a:t>
+                </a:r>
+                <a:r>
+                  <a:rPr lang="en-US" sz="2400" b="1" dirty="0">
+                    <a:solidFill>
+                      <a:schemeClr val="accent6">
+                        <a:lumMod val="60000"/>
+                        <a:lumOff val="40000"/>
+                      </a:schemeClr>
+                    </a:solidFill>
+                  </a:rPr>
+                  <a:t>sample</a:t>
+                </a:r>
+                <a:r>
+                  <a:rPr lang="en-US" sz="2400" dirty="0">
+                    <a:solidFill>
+                      <a:schemeClr val="accent6">
+                        <a:lumMod val="60000"/>
+                        <a:lumOff val="40000"/>
+                      </a:schemeClr>
+                    </a:solidFill>
+                  </a:rPr>
+                  <a:t> standard deviation was calculated to be </a:t>
+                </a:r>
+                <a14:m>
+                  <m:oMath xmlns:m="http://schemas.openxmlformats.org/officeDocument/2006/math">
+                    <m:r>
+                      <m:rPr>
+                        <m:sty m:val="p"/>
+                      </m:rPr>
+                      <a:rPr lang="en-US" sz="2400" b="0" i="0" smtClean="0">
+                        <a:solidFill>
+                          <a:schemeClr val="accent6">
+                            <a:lumMod val="60000"/>
+                            <a:lumOff val="40000"/>
+                          </a:schemeClr>
+                        </a:solidFill>
+                        <a:latin typeface="Cambria Math" panose="02040503050406030204" pitchFamily="18" charset="0"/>
+                      </a:rPr>
+                      <m:t>s</m:t>
+                    </m:r>
+                    <m:r>
+                      <a:rPr lang="en-US" sz="2400">
+                        <a:solidFill>
+                          <a:schemeClr val="accent6">
+                            <a:lumMod val="60000"/>
+                            <a:lumOff val="40000"/>
+                          </a:schemeClr>
+                        </a:solidFill>
+                        <a:latin typeface="Cambria Math" panose="02040503050406030204" pitchFamily="18" charset="0"/>
+                      </a:rPr>
+                      <m:t>=</m:t>
+                    </m:r>
+                    <m:r>
+                      <a:rPr lang="en-US" sz="2400">
+                        <a:solidFill>
+                          <a:schemeClr val="accent6">
+                            <a:lumMod val="60000"/>
+                            <a:lumOff val="40000"/>
+                          </a:schemeClr>
+                        </a:solidFill>
+                        <a:latin typeface="Cambria Math" panose="02040503050406030204" pitchFamily="18" charset="0"/>
+                      </a:rPr>
+                      <m:t>8</m:t>
+                    </m:r>
+                  </m:oMath>
+                </a14:m>
+                <a:r>
+                  <a:rPr lang="en-US" sz="2400" dirty="0">
+                    <a:solidFill>
+                      <a:schemeClr val="accent6">
+                        <a:lumMod val="60000"/>
+                        <a:lumOff val="40000"/>
+                      </a:schemeClr>
+                    </a:solidFill>
+                  </a:rPr>
+                  <a:t> grams. </a:t>
+                </a:r>
+              </a:p>
+              <a:p>
+                <a:pPr marL="0" indent="0">
+                  <a:buNone/>
+                </a:pPr>
+                <a:endParaRPr lang="en-US" sz="2400" dirty="0">
+                  <a:solidFill>
+                    <a:schemeClr val="accent6">
+                      <a:lumMod val="60000"/>
+                      <a:lumOff val="40000"/>
+                    </a:schemeClr>
+                  </a:solidFill>
+                </a:endParaRPr>
+              </a:p>
+              <a:p>
+                <a:pPr marL="0" indent="0">
+                  <a:buNone/>
+                </a:pPr>
+                <a:r>
+                  <a:rPr lang="en-US" sz="2400" dirty="0">
+                    <a:solidFill>
+                      <a:schemeClr val="accent6">
+                        <a:lumMod val="60000"/>
+                        <a:lumOff val="40000"/>
+                      </a:schemeClr>
+                    </a:solidFill>
+                  </a:rPr>
+                  <a:t>Find a </a:t>
+                </a:r>
+                <a:r>
+                  <a:rPr lang="en-US" sz="2400" b="1" dirty="0">
+                    <a:solidFill>
+                      <a:schemeClr val="accent6">
+                        <a:lumMod val="60000"/>
+                        <a:lumOff val="40000"/>
+                      </a:schemeClr>
+                    </a:solidFill>
+                  </a:rPr>
+                  <a:t>95% confidence interval</a:t>
+                </a:r>
+                <a:r>
+                  <a:rPr lang="en-US" sz="2400" dirty="0">
+                    <a:solidFill>
+                      <a:schemeClr val="accent6">
+                        <a:lumMod val="60000"/>
+                        <a:lumOff val="40000"/>
+                      </a:schemeClr>
+                    </a:solidFill>
+                  </a:rPr>
+                  <a:t> for the true mean weight.</a:t>
+                </a:r>
+              </a:p>
+            </p:txBody>
+          </p:sp>
+        </mc:Choice>
+        <mc:Fallback>
+          <p:sp>
+            <p:nvSpPr>
+              <p:cNvPr id="9" name="TextBox 8">
+                <a:extLst>
+                  <a:ext uri="{FF2B5EF4-FFF2-40B4-BE49-F238E27FC236}">
+                    <a16:creationId xmlns:a16="http://schemas.microsoft.com/office/drawing/2014/main" id="{17C081A9-353C-6270-139E-63D03A64781F}"/>
+                  </a:ext>
+                </a:extLst>
+              </p:cNvPr>
+              <p:cNvSpPr txBox="1">
+                <a:spLocks noRot="1" noChangeAspect="1" noMove="1" noResize="1" noEditPoints="1" noAdjustHandles="1" noChangeArrowheads="1" noChangeShapeType="1" noTextEdit="1"/>
+              </p:cNvSpPr>
+              <p:nvPr/>
+            </p:nvSpPr>
+            <p:spPr>
+              <a:xfrm>
+                <a:off x="255838" y="1098356"/>
+                <a:ext cx="11283890" cy="2787173"/>
+              </a:xfrm>
+              <a:prstGeom prst="rect">
+                <a:avLst/>
+              </a:prstGeom>
+              <a:blipFill>
+                <a:blip r:embed="rId5"/>
+                <a:stretch>
+                  <a:fillRect l="-864" t="-1751" b="-4158"/>
+                </a:stretch>
+              </a:blipFill>
+            </p:spPr>
+            <p:txBody>
+              <a:bodyPr/>
+              <a:lstStyle/>
+              <a:p>
+                <a:r>
+                  <a:rPr lang="en-US">
+                    <a:noFill/>
+                  </a:rPr>
+                  <a:t> </a:t>
+                </a:r>
+              </a:p>
+            </p:txBody>
+          </p:sp>
+        </mc:Fallback>
+      </mc:AlternateContent>
     </p:spTree>
     <p:extLst>
       <p:ext uri="{BB962C8B-B14F-4D97-AF65-F5344CB8AC3E}">
@@ -6591,7 +8038,7 @@
 </p:sld>
 </file>
 
-<file path=ppt/slides/slide12.xml><?xml version="1.0" encoding="utf-8"?>
+<file path=ppt/slides/slide15.xml><?xml version="1.0" encoding="utf-8"?>
 <p:sld xmlns:a="http://schemas.openxmlformats.org/drawingml/2006/main" xmlns:r="http://schemas.openxmlformats.org/officeDocument/2006/relationships" xmlns:p="http://schemas.openxmlformats.org/presentationml/2006/main">
   <p:cSld>
     <p:spTree>
@@ -6599,7 +8046,7 @@
         <p:cNvPr id="1" name="">
           <a:extLst>
             <a:ext uri="{FF2B5EF4-FFF2-40B4-BE49-F238E27FC236}">
-              <a16:creationId xmlns:a16="http://schemas.microsoft.com/office/drawing/2014/main" id="{3FCE8EE8-E34A-9248-7F3B-E0A17575389A}"/>
+              <a16:creationId xmlns:a16="http://schemas.microsoft.com/office/drawing/2014/main" id="{BCE395BB-E080-FCFC-99E7-2973E3BDAC56}"/>
             </a:ext>
           </a:extLst>
         </p:cNvPr>
@@ -6614,305 +8061,12 @@
           <a:chExt cx="0" cy="0"/>
         </a:xfrm>
       </p:grpSpPr>
-      <p:sp>
-        <p:nvSpPr>
-          <p:cNvPr id="2" name="Title 1">
+      <p:pic>
+        <p:nvPicPr>
+          <p:cNvPr id="2" name="Picture 1">
             <a:extLst>
               <a:ext uri="{FF2B5EF4-FFF2-40B4-BE49-F238E27FC236}">
-                <a16:creationId xmlns:a16="http://schemas.microsoft.com/office/drawing/2014/main" id="{11C23AA1-466E-83DC-5CB0-126AEB2B73C7}"/>
-              </a:ext>
-            </a:extLst>
-          </p:cNvPr>
-          <p:cNvSpPr>
-            <a:spLocks noGrp="1"/>
-          </p:cNvSpPr>
-          <p:nvPr>
-            <p:ph type="title"/>
-          </p:nvPr>
-        </p:nvSpPr>
-        <p:spPr>
-          <a:xfrm>
-            <a:off x="274320" y="136525"/>
-            <a:ext cx="11466576" cy="832739"/>
-          </a:xfrm>
-        </p:spPr>
-        <p:txBody>
-          <a:bodyPr>
-            <a:normAutofit/>
-          </a:bodyPr>
-          <a:lstStyle/>
-          <a:p>
-            <a:r>
-              <a:rPr lang="en-US" sz="3600" dirty="0"/>
-              <a:t>Confidence Interval: Why Do We Need CI?</a:t>
-            </a:r>
-          </a:p>
-        </p:txBody>
-      </p:sp>
-      <p:sp>
-        <p:nvSpPr>
-          <p:cNvPr id="4" name="TextBox 3">
-            <a:extLst>
-              <a:ext uri="{FF2B5EF4-FFF2-40B4-BE49-F238E27FC236}">
-                <a16:creationId xmlns:a16="http://schemas.microsoft.com/office/drawing/2014/main" id="{29DD139F-6ECD-7860-95B1-B584EF82FE93}"/>
-              </a:ext>
-            </a:extLst>
-          </p:cNvPr>
-          <p:cNvSpPr txBox="1"/>
-          <p:nvPr/>
-        </p:nvSpPr>
-        <p:spPr>
-          <a:xfrm>
-            <a:off x="274320" y="933117"/>
-            <a:ext cx="11658600" cy="5078313"/>
-          </a:xfrm>
-          <a:prstGeom prst="rect">
-            <a:avLst/>
-          </a:prstGeom>
-          <a:noFill/>
-        </p:spPr>
-        <p:txBody>
-          <a:bodyPr wrap="square">
-            <a:spAutoFit/>
-          </a:bodyPr>
-          <a:lstStyle/>
-          <a:p>
-            <a:pPr marL="0" indent="0">
-              <a:buNone/>
-            </a:pPr>
-            <a:r>
-              <a:rPr lang="en-US" dirty="0">
-                <a:solidFill>
-                  <a:schemeClr val="accent6">
-                    <a:lumMod val="60000"/>
-                    <a:lumOff val="40000"/>
-                  </a:schemeClr>
-                </a:solidFill>
-              </a:rPr>
-              <a:t>1) Point estimates alone are incomplete</a:t>
-            </a:r>
-          </a:p>
-          <a:p>
-            <a:endParaRPr lang="en-US" dirty="0">
-              <a:solidFill>
-                <a:schemeClr val="accent6">
-                  <a:lumMod val="60000"/>
-                  <a:lumOff val="40000"/>
-                </a:schemeClr>
-              </a:solidFill>
-            </a:endParaRPr>
-          </a:p>
-          <a:p>
-            <a:pPr marL="342900" indent="-342900">
-              <a:buFont typeface="Arial" panose="020B0604020202020204" pitchFamily="34" charset="0"/>
-              <a:buChar char="•"/>
-            </a:pPr>
-            <a:r>
-              <a:rPr lang="en-US" dirty="0">
-                <a:solidFill>
-                  <a:schemeClr val="accent6">
-                    <a:lumMod val="60000"/>
-                    <a:lumOff val="40000"/>
-                  </a:schemeClr>
-                </a:solidFill>
-              </a:rPr>
-              <a:t>A sample mean (e.g., 3.5 hours) doesn’t tell us how accurate it is.</a:t>
-            </a:r>
-          </a:p>
-          <a:p>
-            <a:pPr marL="342900" indent="-342900">
-              <a:buFont typeface="Arial" panose="020B0604020202020204" pitchFamily="34" charset="0"/>
-              <a:buChar char="•"/>
-            </a:pPr>
-            <a:r>
-              <a:rPr lang="en-US" dirty="0">
-                <a:solidFill>
-                  <a:schemeClr val="accent6">
-                    <a:lumMod val="60000"/>
-                    <a:lumOff val="40000"/>
-                  </a:schemeClr>
-                </a:solidFill>
-              </a:rPr>
-              <a:t>CI gives a range that quantifies the uncertainty.</a:t>
-            </a:r>
-          </a:p>
-          <a:p>
-            <a:pPr marL="0" indent="0">
-              <a:buNone/>
-            </a:pPr>
-            <a:endParaRPr lang="en-US" dirty="0">
-              <a:solidFill>
-                <a:schemeClr val="accent6">
-                  <a:lumMod val="60000"/>
-                  <a:lumOff val="40000"/>
-                </a:schemeClr>
-              </a:solidFill>
-            </a:endParaRPr>
-          </a:p>
-          <a:p>
-            <a:pPr marL="0" indent="0">
-              <a:buNone/>
-            </a:pPr>
-            <a:r>
-              <a:rPr lang="en-US" dirty="0">
-                <a:solidFill>
-                  <a:schemeClr val="accent6">
-                    <a:lumMod val="60000"/>
-                    <a:lumOff val="40000"/>
-                  </a:schemeClr>
-                </a:solidFill>
-              </a:rPr>
-              <a:t>2) Accounts for sampling variability</a:t>
-            </a:r>
-          </a:p>
-          <a:p>
-            <a:endParaRPr lang="en-US" dirty="0">
-              <a:solidFill>
-                <a:schemeClr val="accent6">
-                  <a:lumMod val="60000"/>
-                  <a:lumOff val="40000"/>
-                </a:schemeClr>
-              </a:solidFill>
-            </a:endParaRPr>
-          </a:p>
-          <a:p>
-            <a:pPr marL="342900" indent="-342900">
-              <a:buFont typeface="Arial" panose="020B0604020202020204" pitchFamily="34" charset="0"/>
-              <a:buChar char="•"/>
-            </a:pPr>
-            <a:r>
-              <a:rPr lang="en-US" dirty="0">
-                <a:solidFill>
-                  <a:schemeClr val="accent6">
-                    <a:lumMod val="60000"/>
-                    <a:lumOff val="40000"/>
-                  </a:schemeClr>
-                </a:solidFill>
-              </a:rPr>
-              <a:t>Every sample gives a slightly different result.</a:t>
-            </a:r>
-          </a:p>
-          <a:p>
-            <a:pPr marL="342900" indent="-342900">
-              <a:buFont typeface="Arial" panose="020B0604020202020204" pitchFamily="34" charset="0"/>
-              <a:buChar char="•"/>
-            </a:pPr>
-            <a:r>
-              <a:rPr lang="en-US" dirty="0">
-                <a:solidFill>
-                  <a:schemeClr val="accent6">
-                    <a:lumMod val="60000"/>
-                    <a:lumOff val="40000"/>
-                  </a:schemeClr>
-                </a:solidFill>
-              </a:rPr>
-              <a:t>CI shows how much variation to expect.</a:t>
-            </a:r>
-          </a:p>
-          <a:p>
-            <a:pPr marL="342900" indent="-342900">
-              <a:buFont typeface="Arial" panose="020B0604020202020204" pitchFamily="34" charset="0"/>
-              <a:buChar char="•"/>
-            </a:pPr>
-            <a:endParaRPr lang="en-US" dirty="0">
-              <a:solidFill>
-                <a:schemeClr val="accent6">
-                  <a:lumMod val="60000"/>
-                  <a:lumOff val="40000"/>
-                </a:schemeClr>
-              </a:solidFill>
-            </a:endParaRPr>
-          </a:p>
-          <a:p>
-            <a:r>
-              <a:rPr lang="en-US" dirty="0">
-                <a:solidFill>
-                  <a:schemeClr val="accent6">
-                    <a:lumMod val="60000"/>
-                    <a:lumOff val="40000"/>
-                  </a:schemeClr>
-                </a:solidFill>
-              </a:rPr>
-              <a:t>3) Helps in decision-making</a:t>
-            </a:r>
-          </a:p>
-          <a:p>
-            <a:endParaRPr lang="en-US" dirty="0">
-              <a:solidFill>
-                <a:schemeClr val="accent6">
-                  <a:lumMod val="60000"/>
-                  <a:lumOff val="40000"/>
-                </a:schemeClr>
-              </a:solidFill>
-            </a:endParaRPr>
-          </a:p>
-          <a:p>
-            <a:r>
-              <a:rPr lang="en-US" dirty="0">
-                <a:solidFill>
-                  <a:schemeClr val="accent6">
-                    <a:lumMod val="60000"/>
-                    <a:lumOff val="40000"/>
-                  </a:schemeClr>
-                </a:solidFill>
-              </a:rPr>
-              <a:t>Example: If a new medicine’s 95% CI for improvement = [1.2, 2.8], and it doesn’t include 0, we can infer the drug likely has a real effect.</a:t>
-            </a:r>
-          </a:p>
-          <a:p>
-            <a:endParaRPr lang="en-US" dirty="0">
-              <a:solidFill>
-                <a:schemeClr val="accent6">
-                  <a:lumMod val="60000"/>
-                  <a:lumOff val="40000"/>
-                </a:schemeClr>
-              </a:solidFill>
-            </a:endParaRPr>
-          </a:p>
-          <a:p>
-            <a:r>
-              <a:rPr lang="en-US" dirty="0">
-                <a:solidFill>
-                  <a:schemeClr val="accent6">
-                    <a:lumMod val="60000"/>
-                    <a:lumOff val="40000"/>
-                  </a:schemeClr>
-                </a:solidFill>
-              </a:rPr>
-              <a:t>4) Interpretable in real-world terms</a:t>
-            </a:r>
-          </a:p>
-          <a:p>
-            <a:endParaRPr lang="en-US" dirty="0">
-              <a:solidFill>
-                <a:schemeClr val="accent6">
-                  <a:lumMod val="60000"/>
-                  <a:lumOff val="40000"/>
-                </a:schemeClr>
-              </a:solidFill>
-            </a:endParaRPr>
-          </a:p>
-          <a:p>
-            <a:r>
-              <a:rPr lang="en-US" dirty="0">
-                <a:solidFill>
-                  <a:schemeClr val="accent6">
-                    <a:lumMod val="60000"/>
-                    <a:lumOff val="40000"/>
-                  </a:schemeClr>
-                </a:solidFill>
-              </a:rPr>
-              <a:t>Easier to explain uncertainty than p-values.</a:t>
-            </a:r>
-          </a:p>
-        </p:txBody>
-      </p:sp>
-      <p:pic>
-        <p:nvPicPr>
-          <p:cNvPr id="6" name="Picture 5">
-            <a:extLst>
-              <a:ext uri="{FF2B5EF4-FFF2-40B4-BE49-F238E27FC236}">
-                <a16:creationId xmlns:a16="http://schemas.microsoft.com/office/drawing/2014/main" id="{3ABD0E3A-7B39-DBE9-F406-82D20BE1DD96}"/>
+                <a16:creationId xmlns:a16="http://schemas.microsoft.com/office/drawing/2014/main" id="{4CCB4383-6403-BE54-59CB-FC724477328E}"/>
               </a:ext>
             </a:extLst>
           </p:cNvPr>
@@ -6922,15 +8076,538 @@
           <p:nvPr/>
         </p:nvPicPr>
         <p:blipFill>
-          <a:blip r:embed="rId2"/>
+          <a:blip r:embed="rId3"/>
           <a:stretch>
             <a:fillRect/>
           </a:stretch>
         </p:blipFill>
         <p:spPr>
           <a:xfrm>
-            <a:off x="7436869" y="799455"/>
-            <a:ext cx="3618515" cy="512923"/>
+            <a:off x="8183880" y="3033865"/>
+            <a:ext cx="4008120" cy="2117384"/>
+          </a:xfrm>
+          <a:prstGeom prst="rect">
+            <a:avLst/>
+          </a:prstGeom>
+        </p:spPr>
+      </p:pic>
+      <mc:AlternateContent xmlns:mc="http://schemas.openxmlformats.org/markup-compatibility/2006">
+        <mc:Choice xmlns:a14="http://schemas.microsoft.com/office/drawing/2010/main" Requires="a14">
+          <p:sp>
+            <p:nvSpPr>
+              <p:cNvPr id="8" name="Content Placeholder 7">
+                <a:extLst>
+                  <a:ext uri="{FF2B5EF4-FFF2-40B4-BE49-F238E27FC236}">
+                    <a16:creationId xmlns:a16="http://schemas.microsoft.com/office/drawing/2014/main" id="{AAFEB97C-C944-7C62-4C54-FBB1F7C39E22}"/>
+                  </a:ext>
+                </a:extLst>
+              </p:cNvPr>
+              <p:cNvSpPr>
+                <a:spLocks noGrp="1"/>
+              </p:cNvSpPr>
+              <p:nvPr>
+                <p:ph idx="1"/>
+              </p:nvPr>
+            </p:nvSpPr>
+            <p:spPr>
+              <a:xfrm>
+                <a:off x="128016" y="874647"/>
+                <a:ext cx="10689336" cy="5260977"/>
+              </a:xfrm>
+            </p:spPr>
+            <p:txBody>
+              <a:bodyPr>
+                <a:noAutofit/>
+              </a:bodyPr>
+              <a:lstStyle/>
+              <a:p>
+                <a:pPr marL="0" indent="0">
+                  <a:buNone/>
+                </a:pPr>
+                <a:r>
+                  <a:rPr lang="en-US" sz="2400" dirty="0"/>
+                  <a:t>Ans: </a:t>
+                </a:r>
+              </a:p>
+              <a:p>
+                <a:pPr marL="0" indent="0">
+                  <a:buNone/>
+                </a:pPr>
+                <a:r>
+                  <a:rPr lang="en-US" sz="2400" b="1" dirty="0"/>
+                  <a:t>Given:</a:t>
+                </a:r>
+                <a14:m>
+                  <m:oMath xmlns:m="http://schemas.openxmlformats.org/officeDocument/2006/math">
+                    <m:r>
+                      <a:rPr lang="en-US" sz="2400" b="1" i="0" smtClean="0">
+                        <a:latin typeface="Cambria Math" panose="02040503050406030204" pitchFamily="18" charset="0"/>
+                      </a:rPr>
+                      <m:t> </m:t>
+                    </m:r>
+                    <m:r>
+                      <a:rPr lang="en-US" sz="2400" i="1">
+                        <a:latin typeface="Cambria Math" panose="02040503050406030204" pitchFamily="18" charset="0"/>
+                      </a:rPr>
+                      <m:t>𝑛</m:t>
+                    </m:r>
+                    <m:r>
+                      <a:rPr lang="en-US" sz="2400">
+                        <a:latin typeface="Cambria Math" panose="02040503050406030204" pitchFamily="18" charset="0"/>
+                      </a:rPr>
+                      <m:t>=</m:t>
+                    </m:r>
+                    <m:r>
+                      <a:rPr lang="en-US" sz="2400" b="0" i="0" smtClean="0">
+                        <a:latin typeface="Cambria Math" panose="02040503050406030204" pitchFamily="18" charset="0"/>
+                      </a:rPr>
+                      <m:t>25</m:t>
+                    </m:r>
+                  </m:oMath>
+                </a14:m>
+                <a:r>
+                  <a:rPr lang="en-US" sz="2400" dirty="0"/>
+                  <a:t>, </a:t>
+                </a:r>
+                <a14:m>
+                  <m:oMath xmlns:m="http://schemas.openxmlformats.org/officeDocument/2006/math">
+                    <m:limUpp>
+                      <m:limUppPr>
+                        <m:ctrlPr>
+                          <a:rPr lang="ar-AE" sz="2400" i="1">
+                            <a:latin typeface="Cambria Math" panose="02040503050406030204" pitchFamily="18" charset="0"/>
+                          </a:rPr>
+                        </m:ctrlPr>
+                      </m:limUppPr>
+                      <m:e>
+                        <m:r>
+                          <a:rPr lang="ar-AE" sz="2400" i="1">
+                            <a:latin typeface="Cambria Math" panose="02040503050406030204" pitchFamily="18" charset="0"/>
+                          </a:rPr>
+                          <m:t>𝑥</m:t>
+                        </m:r>
+                      </m:e>
+                      <m:lim>
+                        <m:r>
+                          <a:rPr lang="ar-AE" sz="2400">
+                            <a:latin typeface="Cambria Math" panose="02040503050406030204" pitchFamily="18" charset="0"/>
+                          </a:rPr>
+                          <m:t>ˉ</m:t>
+                        </m:r>
+                      </m:lim>
+                    </m:limUpp>
+                    <m:r>
+                      <a:rPr lang="ar-AE" sz="2400">
+                        <a:latin typeface="Cambria Math" panose="02040503050406030204" pitchFamily="18" charset="0"/>
+                      </a:rPr>
+                      <m:t>=</m:t>
+                    </m:r>
+                    <m:r>
+                      <a:rPr lang="ar-AE" sz="2400">
+                        <a:latin typeface="Cambria Math" panose="02040503050406030204" pitchFamily="18" charset="0"/>
+                      </a:rPr>
+                      <m:t>50</m:t>
+                    </m:r>
+                  </m:oMath>
+                </a14:m>
+                <a:r>
+                  <a:rPr lang="en-US" sz="2400" dirty="0"/>
+                  <a:t> g, </a:t>
+                </a:r>
+                <a14:m>
+                  <m:oMath xmlns:m="http://schemas.openxmlformats.org/officeDocument/2006/math">
+                    <m:r>
+                      <m:rPr>
+                        <m:sty m:val="p"/>
+                      </m:rPr>
+                      <a:rPr lang="en-US" sz="2400" b="0" i="0" smtClean="0">
+                        <a:latin typeface="Cambria Math" panose="02040503050406030204" pitchFamily="18" charset="0"/>
+                      </a:rPr>
+                      <m:t>s</m:t>
+                    </m:r>
+                    <m:r>
+                      <a:rPr lang="en-US" sz="2400">
+                        <a:latin typeface="Cambria Math" panose="02040503050406030204" pitchFamily="18" charset="0"/>
+                      </a:rPr>
+                      <m:t>=</m:t>
+                    </m:r>
+                    <m:r>
+                      <a:rPr lang="en-US" sz="2400">
+                        <a:latin typeface="Cambria Math" panose="02040503050406030204" pitchFamily="18" charset="0"/>
+                      </a:rPr>
+                      <m:t>8</m:t>
+                    </m:r>
+                  </m:oMath>
+                </a14:m>
+                <a:r>
+                  <a:rPr lang="en-US" sz="2400" dirty="0"/>
+                  <a:t> g, Confidence level = 95%</a:t>
+                </a:r>
+              </a:p>
+              <a:p>
+                <a:pPr marL="342900" indent="-342900">
+                  <a:buAutoNum type="arabicPeriod"/>
+                </a:pPr>
+                <a:r>
+                  <a:rPr lang="en-US" sz="2400" dirty="0"/>
+                  <a:t>Since we do  not know </a:t>
+                </a:r>
+                <a14:m>
+                  <m:oMath xmlns:m="http://schemas.openxmlformats.org/officeDocument/2006/math">
+                    <m:r>
+                      <a:rPr lang="en-US" sz="2400" i="1">
+                        <a:latin typeface="Cambria Math" panose="02040503050406030204" pitchFamily="18" charset="0"/>
+                      </a:rPr>
+                      <m:t>𝜎</m:t>
+                    </m:r>
+                  </m:oMath>
+                </a14:m>
+                <a:r>
+                  <a:rPr lang="en-US" sz="2400" dirty="0"/>
+                  <a:t>,  we know sample std dev. </a:t>
+                </a:r>
+                <a14:m>
+                  <m:oMath xmlns:m="http://schemas.openxmlformats.org/officeDocument/2006/math">
+                    <m:r>
+                      <m:rPr>
+                        <m:sty m:val="p"/>
+                      </m:rPr>
+                      <a:rPr lang="en-US" sz="2400" b="0" i="0" smtClean="0">
+                        <a:latin typeface="Cambria Math" panose="02040503050406030204" pitchFamily="18" charset="0"/>
+                      </a:rPr>
+                      <m:t>s</m:t>
+                    </m:r>
+                    <m:r>
+                      <a:rPr lang="en-US" sz="2400" i="1">
+                        <a:latin typeface="Cambria Math" panose="02040503050406030204" pitchFamily="18" charset="0"/>
+                      </a:rPr>
+                      <m:t> </m:t>
+                    </m:r>
+                  </m:oMath>
+                </a14:m>
+                <a:r>
+                  <a:rPr lang="en-US" sz="2400" dirty="0"/>
+                  <a:t>, we use t-distribution. </a:t>
+                </a:r>
+              </a:p>
+              <a:p>
+                <a:pPr marL="0" indent="0">
+                  <a:buNone/>
+                </a:pPr>
+                <a:r>
+                  <a:rPr lang="en-US" sz="2400" dirty="0"/>
+                  <a:t>Here </a:t>
+                </a:r>
+                <a:r>
+                  <a:rPr lang="en-US" sz="2400" dirty="0" err="1"/>
+                  <a:t>d.f.</a:t>
+                </a:r>
+                <a:r>
+                  <a:rPr lang="en-US" sz="2400" dirty="0"/>
+                  <a:t> is 25-1=24. </a:t>
+                </a:r>
+              </a:p>
+              <a:p>
+                <a:pPr marL="0" indent="0">
+                  <a:buNone/>
+                </a:pPr>
+                <a:r>
+                  <a:rPr lang="en-US" sz="2400" dirty="0"/>
+                  <a:t>        Using t-table, we find critical t- value for 95%: </a:t>
+                </a:r>
+                <a14:m>
+                  <m:oMath xmlns:m="http://schemas.openxmlformats.org/officeDocument/2006/math">
+                    <m:r>
+                      <a:rPr lang="en-US" sz="2400" b="1">
+                        <a:latin typeface="Cambria Math" panose="02040503050406030204" pitchFamily="18" charset="0"/>
+                      </a:rPr>
+                      <m:t> </m:t>
+                    </m:r>
+                    <m:r>
+                      <m:rPr>
+                        <m:sty m:val="p"/>
+                      </m:rPr>
+                      <a:rPr lang="en-US" sz="2400" b="0" i="0" smtClean="0">
+                        <a:latin typeface="Cambria Math" panose="02040503050406030204" pitchFamily="18" charset="0"/>
+                      </a:rPr>
+                      <m:t>t</m:t>
+                    </m:r>
+                    <m:r>
+                      <a:rPr lang="ar-AE" sz="2400">
+                        <a:latin typeface="Cambria Math" panose="02040503050406030204" pitchFamily="18" charset="0"/>
+                      </a:rPr>
+                      <m:t>=</m:t>
+                    </m:r>
+                    <m:r>
+                      <m:rPr>
+                        <m:nor/>
+                      </m:rPr>
+                      <a:rPr lang="en-US" sz="2400"/>
+                      <m:t>2.064</m:t>
+                    </m:r>
+                  </m:oMath>
+                </a14:m>
+                <a:endParaRPr lang="en-US" sz="2400" dirty="0"/>
+              </a:p>
+              <a:p>
+                <a:pPr marL="0" indent="0">
+                  <a:buNone/>
+                </a:pPr>
+                <a:r>
+                  <a:rPr lang="en-US" sz="2400" dirty="0"/>
+                  <a:t>2. Compute the margin of error (ME):  t</a:t>
+                </a:r>
+                <a14:m>
+                  <m:oMath xmlns:m="http://schemas.openxmlformats.org/officeDocument/2006/math">
+                    <m:d>
+                      <m:dPr>
+                        <m:ctrlPr>
+                          <a:rPr lang="en-US" sz="2400" i="1">
+                            <a:latin typeface="Cambria Math" panose="02040503050406030204" pitchFamily="18" charset="0"/>
+                          </a:rPr>
+                        </m:ctrlPr>
+                      </m:dPr>
+                      <m:e>
+                        <m:f>
+                          <m:fPr>
+                            <m:ctrlPr>
+                              <a:rPr lang="en-US" sz="2400" i="1">
+                                <a:latin typeface="Cambria Math" panose="02040503050406030204" pitchFamily="18" charset="0"/>
+                              </a:rPr>
+                            </m:ctrlPr>
+                          </m:fPr>
+                          <m:num>
+                            <m:r>
+                              <a:rPr lang="en-US" sz="2400" b="0" i="1" smtClean="0">
+                                <a:latin typeface="Cambria Math" panose="02040503050406030204" pitchFamily="18" charset="0"/>
+                              </a:rPr>
+                              <m:t>𝑠</m:t>
+                            </m:r>
+                          </m:num>
+                          <m:den>
+                            <m:rad>
+                              <m:radPr>
+                                <m:degHide m:val="on"/>
+                                <m:ctrlPr>
+                                  <a:rPr lang="en-US" sz="2400" i="1">
+                                    <a:latin typeface="Cambria Math" panose="02040503050406030204" pitchFamily="18" charset="0"/>
+                                  </a:rPr>
+                                </m:ctrlPr>
+                              </m:radPr>
+                              <m:deg/>
+                              <m:e>
+                                <m:r>
+                                  <a:rPr lang="en-US" sz="2400" i="1">
+                                    <a:latin typeface="Cambria Math" panose="02040503050406030204" pitchFamily="18" charset="0"/>
+                                  </a:rPr>
+                                  <m:t>𝑛</m:t>
+                                </m:r>
+                              </m:e>
+                            </m:rad>
+                          </m:den>
+                        </m:f>
+                      </m:e>
+                    </m:d>
+                  </m:oMath>
+                </a14:m>
+                <a:r>
+                  <a:rPr lang="en-US" sz="2400" dirty="0"/>
+                  <a:t>  = 2.064 x (8/</a:t>
+                </a:r>
+                <a14:m>
+                  <m:oMath xmlns:m="http://schemas.openxmlformats.org/officeDocument/2006/math">
+                    <m:rad>
+                      <m:radPr>
+                        <m:degHide m:val="on"/>
+                        <m:ctrlPr>
+                          <a:rPr lang="en-US" sz="2400" i="1" smtClean="0">
+                            <a:latin typeface="Cambria Math" panose="02040503050406030204" pitchFamily="18" charset="0"/>
+                          </a:rPr>
+                        </m:ctrlPr>
+                      </m:radPr>
+                      <m:deg/>
+                      <m:e>
+                        <m:r>
+                          <a:rPr lang="en-US" sz="2400" b="0" i="1" smtClean="0">
+                            <a:latin typeface="Cambria Math" panose="02040503050406030204" pitchFamily="18" charset="0"/>
+                          </a:rPr>
+                          <m:t>25</m:t>
+                        </m:r>
+                      </m:e>
+                    </m:rad>
+                  </m:oMath>
+                </a14:m>
+                <a:r>
+                  <a:rPr lang="en-US" sz="2400" dirty="0"/>
+                  <a:t>) = 3.3024</a:t>
+                </a:r>
+                <a:r>
+                  <a:rPr lang="en-US" sz="2400" b="1" dirty="0"/>
+                  <a:t> </a:t>
+                </a:r>
+              </a:p>
+              <a:p>
+                <a:pPr marL="0" indent="0">
+                  <a:buNone/>
+                </a:pPr>
+                <a:r>
+                  <a:rPr lang="en-US" sz="2400" dirty="0"/>
+                  <a:t>          (Note: ME became larger now)</a:t>
+                </a:r>
+              </a:p>
+              <a:p>
+                <a:pPr marL="0" indent="0">
+                  <a:buNone/>
+                </a:pPr>
+                <a:r>
+                  <a:rPr lang="en-US" sz="2400" dirty="0"/>
+                  <a:t>3. Construct the confidence interval:</a:t>
+                </a:r>
+              </a:p>
+              <a:p>
+                <a:pPr marL="0" indent="0">
+                  <a:buNone/>
+                </a:pPr>
+                <a:r>
+                  <a:rPr lang="en-US" sz="2400" dirty="0"/>
+                  <a:t>    50 – 3.30 &lt; </a:t>
+                </a:r>
+                <a:r>
+                  <a:rPr lang="el-GR" sz="2400" dirty="0"/>
+                  <a:t>μ</a:t>
+                </a:r>
+                <a:r>
+                  <a:rPr lang="en-US" sz="2400" dirty="0"/>
+                  <a:t> &lt; 50 + 3.30</a:t>
+                </a:r>
+              </a:p>
+              <a:p>
+                <a:pPr marL="0" indent="0">
+                  <a:buNone/>
+                </a:pPr>
+                <a:r>
+                  <a:rPr lang="en-US" sz="2400" dirty="0"/>
+                  <a:t> =&gt; 46.70 g &lt; </a:t>
+                </a:r>
+                <a:r>
+                  <a:rPr lang="el-GR" sz="2400" dirty="0"/>
+                  <a:t>μ</a:t>
+                </a:r>
+                <a:r>
+                  <a:rPr lang="en-US" sz="2400" dirty="0"/>
+                  <a:t> &lt; 53.30 g</a:t>
+                </a:r>
+              </a:p>
+              <a:p>
+                <a:pPr marL="0" indent="0">
+                  <a:buNone/>
+                </a:pPr>
+                <a:r>
+                  <a:rPr lang="en-US" sz="2400" dirty="0"/>
+                  <a:t>Interpretation: “We are 95% confident that the true mean weight </a:t>
+                </a:r>
+                <a14:m>
+                  <m:oMath xmlns:m="http://schemas.openxmlformats.org/officeDocument/2006/math">
+                    <m:r>
+                      <a:rPr lang="en-US" sz="2400" i="1">
+                        <a:latin typeface="Cambria Math" panose="02040503050406030204" pitchFamily="18" charset="0"/>
+                      </a:rPr>
+                      <m:t>𝜇</m:t>
+                    </m:r>
+                  </m:oMath>
+                </a14:m>
+                <a:r>
+                  <a:rPr lang="en-US" sz="2400" dirty="0"/>
+                  <a:t> of the packaged product lies between </a:t>
+                </a:r>
+                <a:r>
+                  <a:rPr lang="en-US" sz="2400" b="1" dirty="0"/>
+                  <a:t>46.70g</a:t>
+                </a:r>
+                <a:r>
+                  <a:rPr lang="en-US" sz="2400" dirty="0"/>
+                  <a:t> and </a:t>
+                </a:r>
+                <a:r>
+                  <a:rPr lang="en-US" sz="2400" b="1" dirty="0"/>
+                  <a:t>53.30g</a:t>
+                </a:r>
+                <a:r>
+                  <a:rPr lang="en-US" sz="2400" dirty="0"/>
+                  <a:t>.”</a:t>
+                </a:r>
+              </a:p>
+            </p:txBody>
+          </p:sp>
+        </mc:Choice>
+        <mc:Fallback>
+          <p:sp>
+            <p:nvSpPr>
+              <p:cNvPr id="8" name="Content Placeholder 7">
+                <a:extLst>
+                  <a:ext uri="{FF2B5EF4-FFF2-40B4-BE49-F238E27FC236}">
+                    <a16:creationId xmlns:a16="http://schemas.microsoft.com/office/drawing/2014/main" id="{AAFEB97C-C944-7C62-4C54-FBB1F7C39E22}"/>
+                  </a:ext>
+                </a:extLst>
+              </p:cNvPr>
+              <p:cNvSpPr>
+                <a:spLocks noGrp="1" noRot="1" noChangeAspect="1" noMove="1" noResize="1" noEditPoints="1" noAdjustHandles="1" noChangeArrowheads="1" noChangeShapeType="1" noTextEdit="1"/>
+              </p:cNvSpPr>
+              <p:nvPr>
+                <p:ph idx="1"/>
+              </p:nvPr>
+            </p:nvSpPr>
+            <p:spPr>
+              <a:xfrm>
+                <a:off x="128016" y="874647"/>
+                <a:ext cx="10689336" cy="5260977"/>
+              </a:xfrm>
+              <a:blipFill>
+                <a:blip r:embed="rId4"/>
+                <a:stretch>
+                  <a:fillRect l="-912" t="-1620" b="-8912"/>
+                </a:stretch>
+              </a:blipFill>
+            </p:spPr>
+            <p:txBody>
+              <a:bodyPr/>
+              <a:lstStyle/>
+              <a:p>
+                <a:r>
+                  <a:rPr lang="en-US">
+                    <a:noFill/>
+                  </a:rPr>
+                  <a:t> </a:t>
+                </a:r>
+              </a:p>
+            </p:txBody>
+          </p:sp>
+        </mc:Fallback>
+      </mc:AlternateContent>
+      <p:pic>
+        <p:nvPicPr>
+          <p:cNvPr id="3" name="Picture 2">
+            <a:extLst>
+              <a:ext uri="{FF2B5EF4-FFF2-40B4-BE49-F238E27FC236}">
+                <a16:creationId xmlns:a16="http://schemas.microsoft.com/office/drawing/2014/main" id="{902B029B-3274-60AB-9121-AD7D9C132260}"/>
+              </a:ext>
+            </a:extLst>
+          </p:cNvPr>
+          <p:cNvPicPr>
+            <a:picLocks noChangeAspect="1"/>
+          </p:cNvPicPr>
+          <p:nvPr/>
+        </p:nvPicPr>
+        <p:blipFill>
+          <a:blip r:embed="rId5"/>
+          <a:stretch>
+            <a:fillRect/>
+          </a:stretch>
+        </p:blipFill>
+        <p:spPr>
+          <a:xfrm>
+            <a:off x="6068568" y="255117"/>
+            <a:ext cx="4665669" cy="619530"/>
           </a:xfrm>
           <a:prstGeom prst="rect">
             <a:avLst/>
@@ -6940,7 +8617,7 @@
     </p:spTree>
     <p:extLst>
       <p:ext uri="{BB962C8B-B14F-4D97-AF65-F5344CB8AC3E}">
-        <p14:creationId xmlns:p14="http://schemas.microsoft.com/office/powerpoint/2010/main" val="3598445282"/>
+        <p14:creationId xmlns:p14="http://schemas.microsoft.com/office/powerpoint/2010/main" val="3151991735"/>
       </p:ext>
     </p:extLst>
   </p:cSld>
@@ -6950,7 +8627,7 @@
 </p:sld>
 </file>
 
-<file path=ppt/slides/slide13.xml><?xml version="1.0" encoding="utf-8"?>
+<file path=ppt/slides/slide16.xml><?xml version="1.0" encoding="utf-8"?>
 <p:sld xmlns:a="http://schemas.openxmlformats.org/drawingml/2006/main" xmlns:r="http://schemas.openxmlformats.org/officeDocument/2006/relationships" xmlns:p="http://schemas.openxmlformats.org/presentationml/2006/main">
   <p:cSld>
     <p:spTree>
@@ -7148,6 +8825,365 @@
 </p:sld>
 </file>
 
+<file path=ppt/slides/slide17.xml><?xml version="1.0" encoding="utf-8"?>
+<p:sld xmlns:a="http://schemas.openxmlformats.org/drawingml/2006/main" xmlns:r="http://schemas.openxmlformats.org/officeDocument/2006/relationships" xmlns:p="http://schemas.openxmlformats.org/presentationml/2006/main">
+  <p:cSld>
+    <p:spTree>
+      <p:nvGrpSpPr>
+        <p:cNvPr id="1" name="">
+          <a:extLst>
+            <a:ext uri="{FF2B5EF4-FFF2-40B4-BE49-F238E27FC236}">
+              <a16:creationId xmlns:a16="http://schemas.microsoft.com/office/drawing/2014/main" id="{3FCE8EE8-E34A-9248-7F3B-E0A17575389A}"/>
+            </a:ext>
+          </a:extLst>
+        </p:cNvPr>
+        <p:cNvGrpSpPr/>
+        <p:nvPr/>
+      </p:nvGrpSpPr>
+      <p:grpSpPr>
+        <a:xfrm>
+          <a:off x="0" y="0"/>
+          <a:ext cx="0" cy="0"/>
+          <a:chOff x="0" y="0"/>
+          <a:chExt cx="0" cy="0"/>
+        </a:xfrm>
+      </p:grpSpPr>
+      <p:sp>
+        <p:nvSpPr>
+          <p:cNvPr id="2" name="Title 1">
+            <a:extLst>
+              <a:ext uri="{FF2B5EF4-FFF2-40B4-BE49-F238E27FC236}">
+                <a16:creationId xmlns:a16="http://schemas.microsoft.com/office/drawing/2014/main" id="{11C23AA1-466E-83DC-5CB0-126AEB2B73C7}"/>
+              </a:ext>
+            </a:extLst>
+          </p:cNvPr>
+          <p:cNvSpPr>
+            <a:spLocks noGrp="1"/>
+          </p:cNvSpPr>
+          <p:nvPr>
+            <p:ph type="title"/>
+          </p:nvPr>
+        </p:nvSpPr>
+        <p:spPr>
+          <a:xfrm>
+            <a:off x="274320" y="136525"/>
+            <a:ext cx="11466576" cy="512923"/>
+          </a:xfrm>
+        </p:spPr>
+        <p:txBody>
+          <a:bodyPr>
+            <a:normAutofit fontScale="90000"/>
+          </a:bodyPr>
+          <a:lstStyle/>
+          <a:p>
+            <a:r>
+              <a:rPr lang="en-US" sz="3600" b="1" dirty="0"/>
+              <a:t>Confidence Interval: Why Do We Need CI?</a:t>
+            </a:r>
+          </a:p>
+        </p:txBody>
+      </p:sp>
+      <p:sp>
+        <p:nvSpPr>
+          <p:cNvPr id="4" name="TextBox 3">
+            <a:extLst>
+              <a:ext uri="{FF2B5EF4-FFF2-40B4-BE49-F238E27FC236}">
+                <a16:creationId xmlns:a16="http://schemas.microsoft.com/office/drawing/2014/main" id="{29DD139F-6ECD-7860-95B1-B584EF82FE93}"/>
+              </a:ext>
+            </a:extLst>
+          </p:cNvPr>
+          <p:cNvSpPr txBox="1"/>
+          <p:nvPr/>
+        </p:nvSpPr>
+        <p:spPr>
+          <a:xfrm>
+            <a:off x="274320" y="933117"/>
+            <a:ext cx="11658600" cy="5632311"/>
+          </a:xfrm>
+          <a:prstGeom prst="rect">
+            <a:avLst/>
+          </a:prstGeom>
+          <a:noFill/>
+        </p:spPr>
+        <p:txBody>
+          <a:bodyPr wrap="square">
+            <a:spAutoFit/>
+          </a:bodyPr>
+          <a:lstStyle/>
+          <a:p>
+            <a:pPr marL="0" indent="0">
+              <a:buNone/>
+            </a:pPr>
+            <a:r>
+              <a:rPr lang="en-US" sz="2000" dirty="0">
+                <a:solidFill>
+                  <a:schemeClr val="accent6">
+                    <a:lumMod val="60000"/>
+                    <a:lumOff val="40000"/>
+                  </a:schemeClr>
+                </a:solidFill>
+              </a:rPr>
+              <a:t>1) Point estimates alone are incomplete</a:t>
+            </a:r>
+          </a:p>
+          <a:p>
+            <a:endParaRPr lang="en-US" sz="2000" dirty="0">
+              <a:solidFill>
+                <a:schemeClr val="accent6">
+                  <a:lumMod val="60000"/>
+                  <a:lumOff val="40000"/>
+                </a:schemeClr>
+              </a:solidFill>
+            </a:endParaRPr>
+          </a:p>
+          <a:p>
+            <a:pPr marL="342900" indent="-342900">
+              <a:buFont typeface="Arial" panose="020B0604020202020204" pitchFamily="34" charset="0"/>
+              <a:buChar char="•"/>
+            </a:pPr>
+            <a:r>
+              <a:rPr lang="en-US" sz="2000" dirty="0">
+                <a:solidFill>
+                  <a:schemeClr val="accent6">
+                    <a:lumMod val="60000"/>
+                    <a:lumOff val="40000"/>
+                  </a:schemeClr>
+                </a:solidFill>
+              </a:rPr>
+              <a:t>A sample mean (e.g., 3.5 hours) doesn’t tell us how accurate it is.</a:t>
+            </a:r>
+          </a:p>
+          <a:p>
+            <a:pPr marL="342900" indent="-342900">
+              <a:buFont typeface="Arial" panose="020B0604020202020204" pitchFamily="34" charset="0"/>
+              <a:buChar char="•"/>
+            </a:pPr>
+            <a:r>
+              <a:rPr lang="en-US" sz="2000" dirty="0">
+                <a:solidFill>
+                  <a:schemeClr val="accent6">
+                    <a:lumMod val="60000"/>
+                    <a:lumOff val="40000"/>
+                  </a:schemeClr>
+                </a:solidFill>
+              </a:rPr>
+              <a:t>CI gives a range that quantifies the uncertainty.</a:t>
+            </a:r>
+          </a:p>
+          <a:p>
+            <a:pPr marL="0" indent="0">
+              <a:buNone/>
+            </a:pPr>
+            <a:endParaRPr lang="en-US" sz="2000" dirty="0">
+              <a:solidFill>
+                <a:schemeClr val="accent6">
+                  <a:lumMod val="60000"/>
+                  <a:lumOff val="40000"/>
+                </a:schemeClr>
+              </a:solidFill>
+            </a:endParaRPr>
+          </a:p>
+          <a:p>
+            <a:pPr marL="0" indent="0">
+              <a:buNone/>
+            </a:pPr>
+            <a:r>
+              <a:rPr lang="en-US" sz="2000" dirty="0">
+                <a:solidFill>
+                  <a:schemeClr val="accent6">
+                    <a:lumMod val="60000"/>
+                    <a:lumOff val="40000"/>
+                  </a:schemeClr>
+                </a:solidFill>
+              </a:rPr>
+              <a:t>2) Accounts for sampling variability</a:t>
+            </a:r>
+          </a:p>
+          <a:p>
+            <a:endParaRPr lang="en-US" sz="2000" dirty="0">
+              <a:solidFill>
+                <a:schemeClr val="accent6">
+                  <a:lumMod val="60000"/>
+                  <a:lumOff val="40000"/>
+                </a:schemeClr>
+              </a:solidFill>
+            </a:endParaRPr>
+          </a:p>
+          <a:p>
+            <a:pPr marL="342900" indent="-342900">
+              <a:buFont typeface="Arial" panose="020B0604020202020204" pitchFamily="34" charset="0"/>
+              <a:buChar char="•"/>
+            </a:pPr>
+            <a:r>
+              <a:rPr lang="en-US" sz="2000" dirty="0">
+                <a:solidFill>
+                  <a:schemeClr val="accent6">
+                    <a:lumMod val="60000"/>
+                    <a:lumOff val="40000"/>
+                  </a:schemeClr>
+                </a:solidFill>
+              </a:rPr>
+              <a:t>Every sample gives a slightly different result.</a:t>
+            </a:r>
+          </a:p>
+          <a:p>
+            <a:pPr marL="342900" indent="-342900">
+              <a:buFont typeface="Arial" panose="020B0604020202020204" pitchFamily="34" charset="0"/>
+              <a:buChar char="•"/>
+            </a:pPr>
+            <a:r>
+              <a:rPr lang="en-US" sz="2000" dirty="0">
+                <a:solidFill>
+                  <a:schemeClr val="accent6">
+                    <a:lumMod val="60000"/>
+                    <a:lumOff val="40000"/>
+                  </a:schemeClr>
+                </a:solidFill>
+              </a:rPr>
+              <a:t>CI shows how much variation to expect.</a:t>
+            </a:r>
+          </a:p>
+          <a:p>
+            <a:pPr marL="342900" indent="-342900">
+              <a:buFont typeface="Arial" panose="020B0604020202020204" pitchFamily="34" charset="0"/>
+              <a:buChar char="•"/>
+            </a:pPr>
+            <a:endParaRPr lang="en-US" sz="2000" dirty="0">
+              <a:solidFill>
+                <a:schemeClr val="accent6">
+                  <a:lumMod val="60000"/>
+                  <a:lumOff val="40000"/>
+                </a:schemeClr>
+              </a:solidFill>
+            </a:endParaRPr>
+          </a:p>
+          <a:p>
+            <a:r>
+              <a:rPr lang="en-US" sz="2000" dirty="0">
+                <a:solidFill>
+                  <a:schemeClr val="accent6">
+                    <a:lumMod val="60000"/>
+                    <a:lumOff val="40000"/>
+                  </a:schemeClr>
+                </a:solidFill>
+              </a:rPr>
+              <a:t>3) Helps in decision-making</a:t>
+            </a:r>
+          </a:p>
+          <a:p>
+            <a:endParaRPr lang="en-US" sz="2000" dirty="0">
+              <a:solidFill>
+                <a:schemeClr val="accent6">
+                  <a:lumMod val="60000"/>
+                  <a:lumOff val="40000"/>
+                </a:schemeClr>
+              </a:solidFill>
+            </a:endParaRPr>
+          </a:p>
+          <a:p>
+            <a:r>
+              <a:rPr lang="en-US" sz="2000" dirty="0">
+                <a:solidFill>
+                  <a:schemeClr val="accent6">
+                    <a:lumMod val="60000"/>
+                    <a:lumOff val="40000"/>
+                  </a:schemeClr>
+                </a:solidFill>
+              </a:rPr>
+              <a:t>Example: If a new medicine’s 95% CI for improvement = [1.2, 2.8], and it doesn’t include 0, we can infer the drug likely has a real effect.</a:t>
+            </a:r>
+          </a:p>
+          <a:p>
+            <a:endParaRPr lang="en-US" sz="2000" dirty="0">
+              <a:solidFill>
+                <a:schemeClr val="accent6">
+                  <a:lumMod val="60000"/>
+                  <a:lumOff val="40000"/>
+                </a:schemeClr>
+              </a:solidFill>
+            </a:endParaRPr>
+          </a:p>
+          <a:p>
+            <a:r>
+              <a:rPr lang="en-US" sz="2000" dirty="0">
+                <a:solidFill>
+                  <a:schemeClr val="accent6">
+                    <a:lumMod val="60000"/>
+                    <a:lumOff val="40000"/>
+                  </a:schemeClr>
+                </a:solidFill>
+              </a:rPr>
+              <a:t>4) Interpretable in real-world terms</a:t>
+            </a:r>
+          </a:p>
+          <a:p>
+            <a:endParaRPr lang="en-US" sz="2000" dirty="0">
+              <a:solidFill>
+                <a:schemeClr val="accent6">
+                  <a:lumMod val="60000"/>
+                  <a:lumOff val="40000"/>
+                </a:schemeClr>
+              </a:solidFill>
+            </a:endParaRPr>
+          </a:p>
+          <a:p>
+            <a:r>
+              <a:rPr lang="en-US" sz="2000" dirty="0">
+                <a:solidFill>
+                  <a:schemeClr val="accent6">
+                    <a:lumMod val="60000"/>
+                    <a:lumOff val="40000"/>
+                  </a:schemeClr>
+                </a:solidFill>
+              </a:rPr>
+              <a:t>Easier to explain uncertainty than p-values.</a:t>
+            </a:r>
+          </a:p>
+        </p:txBody>
+      </p:sp>
+      <p:pic>
+        <p:nvPicPr>
+          <p:cNvPr id="6" name="Picture 5">
+            <a:extLst>
+              <a:ext uri="{FF2B5EF4-FFF2-40B4-BE49-F238E27FC236}">
+                <a16:creationId xmlns:a16="http://schemas.microsoft.com/office/drawing/2014/main" id="{3ABD0E3A-7B39-DBE9-F406-82D20BE1DD96}"/>
+              </a:ext>
+            </a:extLst>
+          </p:cNvPr>
+          <p:cNvPicPr>
+            <a:picLocks noChangeAspect="1"/>
+          </p:cNvPicPr>
+          <p:nvPr/>
+        </p:nvPicPr>
+        <p:blipFill>
+          <a:blip r:embed="rId2"/>
+          <a:stretch>
+            <a:fillRect/>
+          </a:stretch>
+        </p:blipFill>
+        <p:spPr>
+          <a:xfrm>
+            <a:off x="6515775" y="649448"/>
+            <a:ext cx="4676769" cy="662930"/>
+          </a:xfrm>
+          <a:prstGeom prst="rect">
+            <a:avLst/>
+          </a:prstGeom>
+        </p:spPr>
+      </p:pic>
+    </p:spTree>
+    <p:extLst>
+      <p:ext uri="{BB962C8B-B14F-4D97-AF65-F5344CB8AC3E}">
+        <p14:creationId xmlns:p14="http://schemas.microsoft.com/office/powerpoint/2010/main" val="3598445282"/>
+      </p:ext>
+    </p:extLst>
+  </p:cSld>
+  <p:clrMapOvr>
+    <a:masterClrMapping/>
+  </p:clrMapOvr>
+</p:sld>
+</file>
+
 <file path=ppt/slides/slide2.xml><?xml version="1.0" encoding="utf-8"?>
 <p:sld xmlns:a="http://schemas.openxmlformats.org/drawingml/2006/main" xmlns:r="http://schemas.openxmlformats.org/officeDocument/2006/relationships" xmlns:p="http://schemas.openxmlformats.org/presentationml/2006/main">
   <p:cSld>
@@ -7171,6 +9207,36 @@
           <a:chExt cx="0" cy="0"/>
         </a:xfrm>
       </p:grpSpPr>
+      <p:pic>
+        <p:nvPicPr>
+          <p:cNvPr id="9" name="Picture 8">
+            <a:extLst>
+              <a:ext uri="{FF2B5EF4-FFF2-40B4-BE49-F238E27FC236}">
+                <a16:creationId xmlns:a16="http://schemas.microsoft.com/office/drawing/2014/main" id="{946189E9-90E3-6691-49EC-6B71470EA18F}"/>
+              </a:ext>
+            </a:extLst>
+          </p:cNvPr>
+          <p:cNvPicPr>
+            <a:picLocks noChangeAspect="1"/>
+          </p:cNvPicPr>
+          <p:nvPr/>
+        </p:nvPicPr>
+        <p:blipFill>
+          <a:blip r:embed="rId2"/>
+          <a:stretch>
+            <a:fillRect/>
+          </a:stretch>
+        </p:blipFill>
+        <p:spPr>
+          <a:xfrm>
+            <a:off x="7595210" y="4178808"/>
+            <a:ext cx="4413910" cy="1675353"/>
+          </a:xfrm>
+          <a:prstGeom prst="rect">
+            <a:avLst/>
+          </a:prstGeom>
+        </p:spPr>
+      </p:pic>
       <p:sp>
         <p:nvSpPr>
           <p:cNvPr id="8" name="Title 1">
@@ -7223,7 +9289,7 @@
         <p:spPr>
           <a:xfrm>
             <a:off x="182880" y="781223"/>
-            <a:ext cx="11018520" cy="5632311"/>
+            <a:ext cx="11018520" cy="6001643"/>
           </a:xfrm>
           <a:prstGeom prst="rect">
             <a:avLst/>
@@ -7240,7 +9306,7 @@
               <a:buNone/>
             </a:pPr>
             <a:r>
-              <a:rPr lang="en-US" dirty="0">
+              <a:rPr lang="en-US" sz="2400" dirty="0">
                 <a:solidFill>
                   <a:schemeClr val="accent6">
                     <a:lumMod val="60000"/>
@@ -7251,7 +9317,7 @@
               <a:t>A </a:t>
             </a:r>
             <a:r>
-              <a:rPr lang="en-US" b="1" dirty="0">
+              <a:rPr lang="en-US" sz="2400" b="1" dirty="0">
                 <a:solidFill>
                   <a:schemeClr val="accent6">
                     <a:lumMod val="60000"/>
@@ -7262,7 +9328,7 @@
               <a:t>confidence interval (CI)</a:t>
             </a:r>
             <a:r>
-              <a:rPr lang="en-US" dirty="0">
+              <a:rPr lang="en-US" sz="2400" dirty="0">
                 <a:solidFill>
                   <a:schemeClr val="accent6">
                     <a:lumMod val="60000"/>
@@ -7273,7 +9339,7 @@
               <a:t> is a </a:t>
             </a:r>
             <a:r>
-              <a:rPr lang="en-US" b="1" dirty="0">
+              <a:rPr lang="en-US" sz="2400" b="1" dirty="0">
                 <a:solidFill>
                   <a:schemeClr val="accent6">
                     <a:lumMod val="60000"/>
@@ -7284,7 +9350,7 @@
               <a:t>range of values</a:t>
             </a:r>
             <a:r>
-              <a:rPr lang="en-US" dirty="0">
+              <a:rPr lang="en-US" sz="2400" dirty="0">
                 <a:solidFill>
                   <a:schemeClr val="accent6">
                     <a:lumMod val="60000"/>
@@ -7292,10 +9358,32 @@
                   </a:schemeClr>
                 </a:solidFill>
               </a:rPr>
-              <a:t> that is likely to contain the </a:t>
-            </a:r>
-            <a:r>
-              <a:rPr lang="en-US" b="1" dirty="0">
+              <a:t> that is </a:t>
+            </a:r>
+            <a:r>
+              <a:rPr lang="en-US" sz="2400" b="1" dirty="0">
+                <a:solidFill>
+                  <a:schemeClr val="accent6">
+                    <a:lumMod val="60000"/>
+                    <a:lumOff val="40000"/>
+                  </a:schemeClr>
+                </a:solidFill>
+              </a:rPr>
+              <a:t>likely</a:t>
+            </a:r>
+            <a:r>
+              <a:rPr lang="en-US" sz="2400" dirty="0">
+                <a:solidFill>
+                  <a:schemeClr val="accent6">
+                    <a:lumMod val="60000"/>
+                    <a:lumOff val="40000"/>
+                  </a:schemeClr>
+                </a:solidFill>
+              </a:rPr>
+              <a:t> to contain the </a:t>
+            </a:r>
+            <a:r>
+              <a:rPr lang="en-US" sz="2400" b="1" dirty="0">
                 <a:solidFill>
                   <a:schemeClr val="accent6">
                     <a:lumMod val="60000"/>
@@ -7306,7 +9394,7 @@
               <a:t>true population parameter</a:t>
             </a:r>
             <a:r>
-              <a:rPr lang="en-US" dirty="0">
+              <a:rPr lang="en-US" sz="2400" dirty="0">
                 <a:solidFill>
                   <a:schemeClr val="accent6">
                     <a:lumMod val="60000"/>
@@ -7322,7 +9410,7 @@
               <a:buNone/>
             </a:pPr>
             <a:r>
-              <a:rPr lang="en-US" dirty="0">
+              <a:rPr lang="en-US" sz="2400" dirty="0">
                 <a:solidFill>
                   <a:schemeClr val="accent6">
                     <a:lumMod val="60000"/>
@@ -7337,7 +9425,7 @@
             <a:pPr marL="0" indent="0">
               <a:buNone/>
             </a:pPr>
-            <a:endParaRPr lang="en-US" dirty="0">
+            <a:endParaRPr lang="en-US" sz="2400" dirty="0">
               <a:solidFill>
                 <a:schemeClr val="accent6">
                   <a:lumMod val="60000"/>
@@ -7351,7 +9439,7 @@
               <a:buNone/>
             </a:pPr>
             <a:r>
-              <a:rPr lang="en-US" b="1" dirty="0">
+              <a:rPr lang="en-US" sz="2400" b="1" dirty="0">
                 <a:solidFill>
                   <a:schemeClr val="accent6">
                     <a:lumMod val="60000"/>
@@ -7367,7 +9455,7 @@
               <a:buNone/>
             </a:pPr>
             <a:r>
-              <a:rPr lang="en-US" dirty="0">
+              <a:rPr lang="en-US" sz="2400" dirty="0">
                 <a:solidFill>
                   <a:schemeClr val="accent6">
                     <a:lumMod val="60000"/>
@@ -7378,7 +9466,7 @@
               <a:t>Suppose you survey 100 students to find their </a:t>
             </a:r>
             <a:r>
-              <a:rPr lang="en-US" b="1" dirty="0">
+              <a:rPr lang="en-US" sz="2400" b="1" dirty="0">
                 <a:solidFill>
                   <a:schemeClr val="accent6">
                     <a:lumMod val="60000"/>
@@ -7389,7 +9477,7 @@
               <a:t>average study time per day</a:t>
             </a:r>
             <a:r>
-              <a:rPr lang="en-US" dirty="0">
+              <a:rPr lang="en-US" sz="2400" dirty="0">
                 <a:solidFill>
                   <a:schemeClr val="accent6">
                     <a:lumMod val="60000"/>
@@ -7405,7 +9493,7 @@
               <a:buNone/>
             </a:pPr>
             <a:r>
-              <a:rPr lang="en-US" dirty="0">
+              <a:rPr lang="en-US" sz="2400" dirty="0">
                 <a:solidFill>
                   <a:schemeClr val="accent6">
                     <a:lumMod val="60000"/>
@@ -7416,7 +9504,7 @@
               <a:t>You find the </a:t>
             </a:r>
             <a:r>
-              <a:rPr lang="en-US" b="1" dirty="0">
+              <a:rPr lang="en-US" sz="2400" b="1" dirty="0">
                 <a:solidFill>
                   <a:schemeClr val="accent6">
                     <a:lumMod val="60000"/>
@@ -7427,7 +9515,7 @@
               <a:t>sample mean = 3.4 hours</a:t>
             </a:r>
             <a:r>
-              <a:rPr lang="en-US" dirty="0">
+              <a:rPr lang="en-US" sz="2400" dirty="0">
                 <a:solidFill>
                   <a:schemeClr val="accent6">
                     <a:lumMod val="60000"/>
@@ -7438,7 +9526,7 @@
               <a:t>, with a </a:t>
             </a:r>
             <a:r>
-              <a:rPr lang="en-US" b="1" dirty="0">
+              <a:rPr lang="en-US" sz="2400" b="1" dirty="0">
                 <a:solidFill>
                   <a:schemeClr val="accent6">
                     <a:lumMod val="60000"/>
@@ -7449,7 +9537,7 @@
               <a:t>95% confidence interval = [3.1, 3.7]</a:t>
             </a:r>
             <a:r>
-              <a:rPr lang="en-US" dirty="0">
+              <a:rPr lang="en-US" sz="2400" dirty="0">
                 <a:solidFill>
                   <a:schemeClr val="accent6">
                     <a:lumMod val="60000"/>
@@ -7464,7 +9552,7 @@
             <a:pPr marL="0" indent="0">
               <a:buNone/>
             </a:pPr>
-            <a:endParaRPr lang="en-US" dirty="0">
+            <a:endParaRPr lang="en-US" sz="2400" dirty="0">
               <a:solidFill>
                 <a:schemeClr val="accent6">
                   <a:lumMod val="60000"/>
@@ -7478,7 +9566,7 @@
               <a:buNone/>
             </a:pPr>
             <a:r>
-              <a:rPr lang="en-US" dirty="0">
+              <a:rPr lang="en-US" sz="2400" dirty="0">
                 <a:solidFill>
                   <a:schemeClr val="accent6">
                     <a:lumMod val="60000"/>
@@ -7495,7 +9583,7 @@
               <a:buChar char="-"/>
             </a:pPr>
             <a:r>
-              <a:rPr lang="en-US" dirty="0">
+              <a:rPr lang="en-US" sz="2400" dirty="0">
                 <a:solidFill>
                   <a:schemeClr val="accent6">
                     <a:lumMod val="60000"/>
@@ -7503,14 +9591,27 @@
                   </a:schemeClr>
                 </a:solidFill>
               </a:rPr>
-              <a:t>  We are 95% confident that the true average study time for all students lies between 3.1 and 3.7 hours.  </a:t>
+              <a:t>  We are 95% confident that the true average study time </a:t>
+            </a:r>
+          </a:p>
+          <a:p>
+            <a:r>
+              <a:rPr lang="en-US" sz="2400" dirty="0">
+                <a:solidFill>
+                  <a:schemeClr val="accent6">
+                    <a:lumMod val="60000"/>
+                    <a:lumOff val="40000"/>
+                  </a:schemeClr>
+                </a:solidFill>
+              </a:rPr>
+              <a:t>for all students lies between 3.1 and 3.7 hours.  </a:t>
             </a:r>
           </a:p>
           <a:p>
             <a:pPr marL="0" indent="0" algn="ctr">
               <a:buNone/>
             </a:pPr>
-            <a:endParaRPr lang="en-US" dirty="0">
+            <a:endParaRPr lang="en-US" sz="2400" dirty="0">
               <a:solidFill>
                 <a:schemeClr val="accent6">
                   <a:lumMod val="60000"/>
@@ -7523,34 +9624,8 @@
             <a:pPr marL="0" indent="0" algn="ctr">
               <a:buNone/>
             </a:pPr>
-            <a:endParaRPr lang="en-US" dirty="0">
-              <a:solidFill>
-                <a:schemeClr val="accent6">
-                  <a:lumMod val="60000"/>
-                  <a:lumOff val="40000"/>
-                </a:schemeClr>
-              </a:solidFill>
-            </a:endParaRPr>
-          </a:p>
-          <a:p>
-            <a:pPr marL="0" indent="0" algn="ctr">
-              <a:buNone/>
-            </a:pPr>
-            <a:endParaRPr lang="en-US" dirty="0">
-              <a:solidFill>
-                <a:schemeClr val="accent6">
-                  <a:lumMod val="60000"/>
-                  <a:lumOff val="40000"/>
-                </a:schemeClr>
-              </a:solidFill>
-            </a:endParaRPr>
-          </a:p>
-          <a:p>
-            <a:pPr marL="0" indent="0" algn="ctr">
-              <a:buNone/>
-            </a:pPr>
-            <a:r>
-              <a:rPr lang="en-US" dirty="0">
+            <a:r>
+              <a:rPr lang="en-US" sz="2400" dirty="0">
                 <a:solidFill>
                   <a:schemeClr val="accent6">
                     <a:lumMod val="60000"/>
@@ -7562,77 +9637,12 @@
             </a:r>
           </a:p>
           <a:p>
-            <a:pPr marL="0" indent="0" algn="ctr">
-              <a:buNone/>
-            </a:pPr>
-            <a:endParaRPr lang="en-US" dirty="0">
-              <a:solidFill>
-                <a:schemeClr val="accent6">
-                  <a:lumMod val="60000"/>
-                  <a:lumOff val="40000"/>
-                </a:schemeClr>
-              </a:solidFill>
-            </a:endParaRPr>
-          </a:p>
-          <a:p>
-            <a:pPr marL="0" indent="0" algn="ctr">
-              <a:buNone/>
-            </a:pPr>
-            <a:endParaRPr lang="en-US" dirty="0">
-              <a:solidFill>
-                <a:schemeClr val="accent6">
-                  <a:lumMod val="60000"/>
-                  <a:lumOff val="40000"/>
-                </a:schemeClr>
-              </a:solidFill>
-            </a:endParaRPr>
-          </a:p>
-          <a:p>
-            <a:pPr marL="0" indent="0" algn="ctr">
-              <a:buNone/>
-            </a:pPr>
-            <a:endParaRPr lang="en-US" dirty="0">
-              <a:solidFill>
-                <a:schemeClr val="accent6">
-                  <a:lumMod val="60000"/>
-                  <a:lumOff val="40000"/>
-                </a:schemeClr>
-              </a:solidFill>
-            </a:endParaRPr>
-          </a:p>
-          <a:p>
-            <a:pPr marL="0" indent="0" algn="ctr">
-              <a:buNone/>
-            </a:pPr>
-            <a:endParaRPr lang="en-US" dirty="0">
-              <a:solidFill>
-                <a:schemeClr val="accent6">
-                  <a:lumMod val="60000"/>
-                  <a:lumOff val="40000"/>
-                </a:schemeClr>
-              </a:solidFill>
-            </a:endParaRPr>
-          </a:p>
-          <a:p>
-            <a:pPr marL="0" indent="0" algn="ctr">
-              <a:buNone/>
-            </a:pPr>
-            <a:endParaRPr lang="en-US" dirty="0">
-              <a:solidFill>
-                <a:schemeClr val="accent6">
-                  <a:lumMod val="60000"/>
-                  <a:lumOff val="40000"/>
-                </a:schemeClr>
-              </a:solidFill>
-            </a:endParaRPr>
-          </a:p>
-          <a:p>
             <a:pPr>
               <a:buFontTx/>
               <a:buChar char="-"/>
             </a:pPr>
             <a:r>
-              <a:rPr lang="en-US" dirty="0">
+              <a:rPr lang="en-US" sz="2400" dirty="0">
                 <a:solidFill>
                   <a:schemeClr val="accent6">
                     <a:lumMod val="60000"/>
@@ -7643,7 +9653,7 @@
               <a:t>  Given the sample data, there is a </a:t>
             </a:r>
             <a:r>
-              <a:rPr lang="en-US" b="1" dirty="0">
+              <a:rPr lang="en-US" sz="2400" b="1" dirty="0">
                 <a:solidFill>
                   <a:schemeClr val="accent6">
                     <a:lumMod val="60000"/>
@@ -7654,7 +9664,7 @@
               <a:t>95% probability</a:t>
             </a:r>
             <a:r>
-              <a:rPr lang="en-US" dirty="0">
+              <a:rPr lang="en-US" sz="2400" dirty="0">
                 <a:solidFill>
                   <a:schemeClr val="accent6">
                     <a:lumMod val="60000"/>
@@ -7667,36 +9677,6 @@
           </a:p>
         </p:txBody>
       </p:sp>
-      <p:pic>
-        <p:nvPicPr>
-          <p:cNvPr id="9" name="Picture 8">
-            <a:extLst>
-              <a:ext uri="{FF2B5EF4-FFF2-40B4-BE49-F238E27FC236}">
-                <a16:creationId xmlns:a16="http://schemas.microsoft.com/office/drawing/2014/main" id="{946189E9-90E3-6691-49EC-6B71470EA18F}"/>
-              </a:ext>
-            </a:extLst>
-          </p:cNvPr>
-          <p:cNvPicPr>
-            <a:picLocks noChangeAspect="1"/>
-          </p:cNvPicPr>
-          <p:nvPr/>
-        </p:nvPicPr>
-        <p:blipFill>
-          <a:blip r:embed="rId2"/>
-          <a:stretch>
-            <a:fillRect/>
-          </a:stretch>
-        </p:blipFill>
-        <p:spPr>
-          <a:xfrm>
-            <a:off x="6887353" y="3874377"/>
-            <a:ext cx="5220429" cy="1981477"/>
-          </a:xfrm>
-          <a:prstGeom prst="rect">
-            <a:avLst/>
-          </a:prstGeom>
-        </p:spPr>
-      </p:pic>
     </p:spTree>
     <p:extLst>
       <p:ext uri="{BB962C8B-B14F-4D97-AF65-F5344CB8AC3E}">
@@ -7733,6 +9713,36 @@
           <a:chExt cx="0" cy="0"/>
         </a:xfrm>
       </p:grpSpPr>
+      <p:pic>
+        <p:nvPicPr>
+          <p:cNvPr id="8" name="Picture 7">
+            <a:extLst>
+              <a:ext uri="{FF2B5EF4-FFF2-40B4-BE49-F238E27FC236}">
+                <a16:creationId xmlns:a16="http://schemas.microsoft.com/office/drawing/2014/main" id="{A4D09ACE-4D82-B7A0-CD61-6AA7386DFFF5}"/>
+              </a:ext>
+            </a:extLst>
+          </p:cNvPr>
+          <p:cNvPicPr>
+            <a:picLocks noChangeAspect="1"/>
+          </p:cNvPicPr>
+          <p:nvPr/>
+        </p:nvPicPr>
+        <p:blipFill>
+          <a:blip r:embed="rId2"/>
+          <a:stretch>
+            <a:fillRect/>
+          </a:stretch>
+        </p:blipFill>
+        <p:spPr>
+          <a:xfrm>
+            <a:off x="4789122" y="1645920"/>
+            <a:ext cx="7402878" cy="4108363"/>
+          </a:xfrm>
+          <a:prstGeom prst="rect">
+            <a:avLst/>
+          </a:prstGeom>
+        </p:spPr>
+      </p:pic>
       <p:sp>
         <p:nvSpPr>
           <p:cNvPr id="5" name="Title 1">
@@ -7802,7 +9812,7 @@
               <a:buAutoNum type="arabicParenR"/>
             </a:pPr>
             <a:r>
-              <a:rPr lang="en-US" b="1" dirty="0">
+              <a:rPr lang="en-US" sz="2000" b="1" dirty="0">
                 <a:solidFill>
                   <a:schemeClr val="accent4">
                     <a:lumMod val="60000"/>
@@ -7813,7 +9823,7 @@
               <a:t>95% CI</a:t>
             </a:r>
             <a:r>
-              <a:rPr lang="en-US" dirty="0">
+              <a:rPr lang="en-US" sz="2000" dirty="0">
                 <a:solidFill>
                   <a:schemeClr val="accent6">
                     <a:lumMod val="60000"/>
@@ -7824,7 +9834,7 @@
               <a:t> means that if we repeatedly sample from the population and calculate CIs, about </a:t>
             </a:r>
             <a:r>
-              <a:rPr lang="en-US" b="1" dirty="0">
+              <a:rPr lang="en-US" sz="2000" b="1" dirty="0">
                 <a:solidFill>
                   <a:schemeClr val="accent4">
                     <a:lumMod val="60000"/>
@@ -7835,7 +9845,7 @@
               <a:t>95% of these CIs would contain the true mean </a:t>
             </a:r>
             <a:r>
-              <a:rPr lang="el-GR" b="1" dirty="0">
+              <a:rPr lang="el-GR" sz="2000" b="1" dirty="0">
                 <a:solidFill>
                   <a:schemeClr val="accent4">
                     <a:lumMod val="60000"/>
@@ -7846,7 +9856,7 @@
               <a:t>μ</a:t>
             </a:r>
             <a:r>
-              <a:rPr lang="en-US" dirty="0">
+              <a:rPr lang="en-US" sz="2000" dirty="0">
                 <a:solidFill>
                   <a:schemeClr val="accent6">
                     <a:lumMod val="60000"/>
@@ -7859,7 +9869,7 @@
           </a:p>
           <a:p>
             <a:r>
-              <a:rPr lang="en-US" dirty="0">
+              <a:rPr lang="en-US" sz="2000" dirty="0">
                 <a:solidFill>
                   <a:schemeClr val="accent6">
                     <a:lumMod val="60000"/>
@@ -7872,7 +9882,7 @@
           </a:p>
           <a:p>
             <a:r>
-              <a:rPr lang="en-US" dirty="0">
+              <a:rPr lang="en-US" sz="2000" dirty="0">
                 <a:solidFill>
                   <a:schemeClr val="accent6">
                     <a:lumMod val="60000"/>
@@ -7883,7 +9893,7 @@
               <a:t>Suppose the pop. mean is </a:t>
             </a:r>
             <a:r>
-              <a:rPr lang="el-GR" dirty="0">
+              <a:rPr lang="el-GR" sz="2000" dirty="0">
                 <a:solidFill>
                   <a:schemeClr val="accent6">
                     <a:lumMod val="60000"/>
@@ -7894,7 +9904,7 @@
               <a:t>μ</a:t>
             </a:r>
             <a:r>
-              <a:rPr lang="en-US" dirty="0">
+              <a:rPr lang="en-US" sz="2000" dirty="0">
                 <a:solidFill>
                   <a:schemeClr val="accent6">
                     <a:lumMod val="60000"/>
@@ -7902,12 +9912,12 @@
                   </a:schemeClr>
                 </a:solidFill>
               </a:rPr>
-              <a:t> that we attempting</a:t>
-            </a:r>
-          </a:p>
-          <a:p>
-            <a:r>
-              <a:rPr lang="en-US" dirty="0">
+              <a:t> that we </a:t>
+            </a:r>
+          </a:p>
+          <a:p>
+            <a:r>
+              <a:rPr lang="en-US" sz="2000" dirty="0">
                 <a:solidFill>
                   <a:schemeClr val="accent6">
                     <a:lumMod val="60000"/>
@@ -7915,12 +9925,12 @@
                   </a:schemeClr>
                 </a:solidFill>
               </a:rPr>
-              <a:t>to find.</a:t>
-            </a:r>
-          </a:p>
-          <a:p>
-            <a:r>
-              <a:rPr lang="en-US" dirty="0">
+              <a:t>Attempting to find.</a:t>
+            </a:r>
+          </a:p>
+          <a:p>
+            <a:r>
+              <a:rPr lang="en-US" sz="2000" dirty="0">
                 <a:solidFill>
                   <a:schemeClr val="accent6">
                     <a:lumMod val="60000"/>
@@ -7933,7 +9943,7 @@
           </a:p>
           <a:p>
             <a:r>
-              <a:rPr lang="en-US" dirty="0">
+              <a:rPr lang="en-US" sz="2000" dirty="0">
                 <a:solidFill>
                   <a:schemeClr val="accent6">
                     <a:lumMod val="60000"/>
@@ -7946,7 +9956,7 @@
           </a:p>
           <a:p>
             <a:r>
-              <a:rPr lang="en-US" dirty="0">
+              <a:rPr lang="en-US" sz="2000" dirty="0">
                 <a:solidFill>
                   <a:schemeClr val="accent6">
                     <a:lumMod val="60000"/>
@@ -7959,7 +9969,7 @@
           </a:p>
           <a:p>
             <a:r>
-              <a:rPr lang="en-US" dirty="0">
+              <a:rPr lang="en-US" sz="2000" dirty="0">
                 <a:solidFill>
                   <a:schemeClr val="accent6">
                     <a:lumMod val="60000"/>
@@ -7972,7 +9982,7 @@
           </a:p>
           <a:p>
             <a:r>
-              <a:rPr lang="en-US" dirty="0">
+              <a:rPr lang="en-US" sz="2000" dirty="0">
                 <a:solidFill>
                   <a:schemeClr val="accent6">
                     <a:lumMod val="60000"/>
@@ -7985,7 +9995,7 @@
           </a:p>
           <a:p>
             <a:r>
-              <a:rPr lang="en-US" dirty="0">
+              <a:rPr lang="en-US" sz="2000" dirty="0">
                 <a:solidFill>
                   <a:schemeClr val="accent6">
                     <a:lumMod val="60000"/>
@@ -7996,7 +10006,7 @@
               <a:t>95% of these Cis would contain the true mean </a:t>
             </a:r>
             <a:r>
-              <a:rPr lang="el-GR" dirty="0">
+              <a:rPr lang="el-GR" sz="2000" dirty="0">
                 <a:solidFill>
                   <a:schemeClr val="accent6">
                     <a:lumMod val="60000"/>
@@ -8007,7 +10017,7 @@
               <a:t>μ</a:t>
             </a:r>
             <a:r>
-              <a:rPr lang="en-US" dirty="0">
+              <a:rPr lang="en-US" sz="2000" dirty="0">
                 <a:solidFill>
                   <a:schemeClr val="accent6">
                     <a:lumMod val="60000"/>
@@ -8020,7 +10030,7 @@
           </a:p>
           <a:p>
             <a:r>
-              <a:rPr lang="en-US" dirty="0">
+              <a:rPr lang="en-US" sz="2000" dirty="0">
                 <a:solidFill>
                   <a:schemeClr val="accent6">
                     <a:lumMod val="60000"/>
@@ -8035,7 +10045,7 @@
             <a:pPr marL="0" indent="0">
               <a:buNone/>
             </a:pPr>
-            <a:endParaRPr lang="en-US" dirty="0">
+            <a:endParaRPr lang="en-US" sz="2000" dirty="0">
               <a:solidFill>
                 <a:schemeClr val="accent6">
                   <a:lumMod val="60000"/>
@@ -8048,7 +10058,7 @@
             <a:pPr marL="0" indent="0">
               <a:buNone/>
             </a:pPr>
-            <a:endParaRPr lang="en-US" dirty="0">
+            <a:endParaRPr lang="en-US" sz="2000" dirty="0">
               <a:solidFill>
                 <a:schemeClr val="accent6">
                   <a:lumMod val="60000"/>
@@ -8061,7 +10071,7 @@
             <a:pPr marL="0" indent="0">
               <a:buNone/>
             </a:pPr>
-            <a:endParaRPr lang="en-US" dirty="0">
+            <a:endParaRPr lang="en-US" sz="2000" dirty="0">
               <a:solidFill>
                 <a:schemeClr val="accent6">
                   <a:lumMod val="60000"/>
@@ -8071,34 +10081,8 @@
             </a:endParaRPr>
           </a:p>
           <a:p>
-            <a:pPr marL="0" indent="0">
-              <a:buNone/>
-            </a:pPr>
-            <a:endParaRPr lang="en-US" dirty="0">
-              <a:solidFill>
-                <a:schemeClr val="accent6">
-                  <a:lumMod val="60000"/>
-                  <a:lumOff val="40000"/>
-                </a:schemeClr>
-              </a:solidFill>
-            </a:endParaRPr>
-          </a:p>
-          <a:p>
-            <a:pPr marL="0" indent="0">
-              <a:buNone/>
-            </a:pPr>
-            <a:endParaRPr lang="en-US" dirty="0">
-              <a:solidFill>
-                <a:schemeClr val="accent6">
-                  <a:lumMod val="60000"/>
-                  <a:lumOff val="40000"/>
-                </a:schemeClr>
-              </a:solidFill>
-            </a:endParaRPr>
-          </a:p>
-          <a:p>
-            <a:r>
-              <a:rPr lang="en-US" dirty="0">
+            <a:r>
+              <a:rPr lang="en-US" sz="2000" dirty="0">
                 <a:solidFill>
                   <a:schemeClr val="accent6">
                     <a:lumMod val="60000"/>
@@ -8111,7 +10095,7 @@
           </a:p>
           <a:p>
             <a:r>
-              <a:rPr lang="en-US" dirty="0">
+              <a:rPr lang="en-US" sz="2000" dirty="0">
                 <a:solidFill>
                   <a:schemeClr val="accent6">
                     <a:lumMod val="60000"/>
@@ -8124,7 +10108,7 @@
           </a:p>
           <a:p>
             <a:r>
-              <a:rPr lang="en-US" dirty="0">
+              <a:rPr lang="en-US" sz="2000" dirty="0">
                 <a:solidFill>
                   <a:schemeClr val="accent6">
                     <a:lumMod val="60000"/>
@@ -8135,7 +10119,7 @@
               <a:t>The </a:t>
             </a:r>
             <a:r>
-              <a:rPr lang="en-US" b="1" dirty="0">
+              <a:rPr lang="en-US" sz="2000" b="1" dirty="0">
                 <a:solidFill>
                   <a:schemeClr val="accent6">
                     <a:lumMod val="60000"/>
@@ -8146,7 +10130,7 @@
               <a:t>narrow CI, </a:t>
             </a:r>
             <a:r>
-              <a:rPr lang="en-US" dirty="0">
+              <a:rPr lang="en-US" sz="2000" dirty="0">
                 <a:solidFill>
                   <a:schemeClr val="accent6">
                     <a:lumMod val="60000"/>
@@ -8157,7 +10141,7 @@
               <a:t>say [2, 5], is more precise than </a:t>
             </a:r>
             <a:r>
-              <a:rPr lang="en-US" b="1" dirty="0">
+              <a:rPr lang="en-US" sz="2000" b="1" dirty="0">
                 <a:solidFill>
                   <a:schemeClr val="accent6">
                     <a:lumMod val="60000"/>
@@ -8168,7 +10152,7 @@
               <a:t>wider CI</a:t>
             </a:r>
             <a:r>
-              <a:rPr lang="en-US" dirty="0">
+              <a:rPr lang="en-US" sz="2000" dirty="0">
                 <a:solidFill>
                   <a:schemeClr val="accent6">
                     <a:lumMod val="60000"/>
@@ -8181,36 +10165,6 @@
           </a:p>
         </p:txBody>
       </p:sp>
-      <p:pic>
-        <p:nvPicPr>
-          <p:cNvPr id="8" name="Picture 7">
-            <a:extLst>
-              <a:ext uri="{FF2B5EF4-FFF2-40B4-BE49-F238E27FC236}">
-                <a16:creationId xmlns:a16="http://schemas.microsoft.com/office/drawing/2014/main" id="{A4D09ACE-4D82-B7A0-CD61-6AA7386DFFF5}"/>
-              </a:ext>
-            </a:extLst>
-          </p:cNvPr>
-          <p:cNvPicPr>
-            <a:picLocks noChangeAspect="1"/>
-          </p:cNvPicPr>
-          <p:nvPr/>
-        </p:nvPicPr>
-        <p:blipFill>
-          <a:blip r:embed="rId2"/>
-          <a:stretch>
-            <a:fillRect/>
-          </a:stretch>
-        </p:blipFill>
-        <p:spPr>
-          <a:xfrm>
-            <a:off x="4711398" y="1481328"/>
-            <a:ext cx="7402878" cy="4108363"/>
-          </a:xfrm>
-          <a:prstGeom prst="rect">
-            <a:avLst/>
-          </a:prstGeom>
-        </p:spPr>
-      </p:pic>
     </p:spTree>
     <p:extLst>
       <p:ext uri="{BB962C8B-B14F-4D97-AF65-F5344CB8AC3E}">
@@ -8247,6 +10201,542 @@
           <a:chExt cx="0" cy="0"/>
         </a:xfrm>
       </p:grpSpPr>
+      <mc:AlternateContent xmlns:mc="http://schemas.openxmlformats.org/markup-compatibility/2006">
+        <mc:Choice xmlns:a14="http://schemas.microsoft.com/office/drawing/2010/main" Requires="a14">
+          <p:sp>
+            <p:nvSpPr>
+              <p:cNvPr id="10" name="TextBox 9">
+                <a:extLst>
+                  <a:ext uri="{FF2B5EF4-FFF2-40B4-BE49-F238E27FC236}">
+                    <a16:creationId xmlns:a16="http://schemas.microsoft.com/office/drawing/2014/main" id="{ABCA853F-45AF-8A6D-D265-A54CC938D102}"/>
+                  </a:ext>
+                </a:extLst>
+              </p:cNvPr>
+              <p:cNvSpPr txBox="1"/>
+              <p:nvPr/>
+            </p:nvSpPr>
+            <p:spPr>
+              <a:xfrm>
+                <a:off x="124968" y="641253"/>
+                <a:ext cx="8881872" cy="6115777"/>
+              </a:xfrm>
+              <a:prstGeom prst="rect">
+                <a:avLst/>
+              </a:prstGeom>
+              <a:noFill/>
+            </p:spPr>
+            <p:txBody>
+              <a:bodyPr wrap="square">
+                <a:spAutoFit/>
+              </a:bodyPr>
+              <a:lstStyle/>
+              <a:p>
+                <a:r>
+                  <a:rPr lang="en-US" sz="2000" dirty="0">
+                    <a:solidFill>
+                      <a:schemeClr val="accent6">
+                        <a:lumMod val="60000"/>
+                        <a:lumOff val="40000"/>
+                      </a:schemeClr>
+                    </a:solidFill>
+                  </a:rPr>
+                  <a:t>Formula for CI of  mean:</a:t>
+                </a:r>
+              </a:p>
+              <a:p>
+                <a:pPr marL="0" indent="0">
+                  <a:buNone/>
+                </a:pPr>
+                <a:r>
+                  <a:rPr lang="en-US" sz="2000" dirty="0">
+                    <a:solidFill>
+                      <a:schemeClr val="accent6">
+                        <a:lumMod val="60000"/>
+                        <a:lumOff val="40000"/>
+                      </a:schemeClr>
+                    </a:solidFill>
+                  </a:rPr>
+                  <a:t>If </a:t>
+                </a:r>
+                <a:r>
+                  <a:rPr lang="en-US" sz="2000" dirty="0">
+                    <a:solidFill>
+                      <a:schemeClr val="accent4">
+                        <a:lumMod val="60000"/>
+                        <a:lumOff val="40000"/>
+                      </a:schemeClr>
+                    </a:solidFill>
+                  </a:rPr>
+                  <a:t>population</a:t>
+                </a:r>
+                <a:r>
+                  <a:rPr lang="en-US" sz="2000" dirty="0">
+                    <a:solidFill>
+                      <a:schemeClr val="accent6">
+                        <a:lumMod val="60000"/>
+                        <a:lumOff val="40000"/>
+                      </a:schemeClr>
+                    </a:solidFill>
+                  </a:rPr>
+                  <a:t> SD σ  is known:</a:t>
+                </a:r>
+              </a:p>
+              <a:p>
+                <a:pPr marL="0" indent="0">
+                  <a:buNone/>
+                </a:pPr>
+                <a:endParaRPr lang="en-US" sz="2000" dirty="0">
+                  <a:solidFill>
+                    <a:schemeClr val="accent6">
+                      <a:lumMod val="60000"/>
+                      <a:lumOff val="40000"/>
+                    </a:schemeClr>
+                  </a:solidFill>
+                </a:endParaRPr>
+              </a:p>
+              <a:p>
+                <a:pPr marL="0" indent="0">
+                  <a:buNone/>
+                </a:pPr>
+                <a:endParaRPr lang="en-US" sz="2000" dirty="0">
+                  <a:solidFill>
+                    <a:schemeClr val="accent6">
+                      <a:lumMod val="60000"/>
+                      <a:lumOff val="40000"/>
+                    </a:schemeClr>
+                  </a:solidFill>
+                </a:endParaRPr>
+              </a:p>
+              <a:p>
+                <a:pPr marL="0" indent="0">
+                  <a:buNone/>
+                </a:pPr>
+                <a:endParaRPr lang="en-US" sz="2000" dirty="0">
+                  <a:solidFill>
+                    <a:schemeClr val="accent6">
+                      <a:lumMod val="60000"/>
+                      <a:lumOff val="40000"/>
+                    </a:schemeClr>
+                  </a:solidFill>
+                </a:endParaRPr>
+              </a:p>
+              <a:p>
+                <a:pPr marL="0" indent="0">
+                  <a:buNone/>
+                </a:pPr>
+                <a:endParaRPr lang="en-US" sz="2000" dirty="0">
+                  <a:solidFill>
+                    <a:schemeClr val="accent6">
+                      <a:lumMod val="60000"/>
+                      <a:lumOff val="40000"/>
+                    </a:schemeClr>
+                  </a:solidFill>
+                </a:endParaRPr>
+              </a:p>
+              <a:p>
+                <a:pPr marL="0" indent="0">
+                  <a:buNone/>
+                </a:pPr>
+                <a:endParaRPr lang="en-US" sz="2000" dirty="0">
+                  <a:solidFill>
+                    <a:schemeClr val="accent6">
+                      <a:lumMod val="60000"/>
+                      <a:lumOff val="40000"/>
+                    </a:schemeClr>
+                  </a:solidFill>
+                </a:endParaRPr>
+              </a:p>
+              <a:p>
+                <a:pPr marL="0" indent="0">
+                  <a:buNone/>
+                </a:pPr>
+                <a:endParaRPr lang="en-US" sz="2000" dirty="0">
+                  <a:solidFill>
+                    <a:schemeClr val="accent6">
+                      <a:lumMod val="60000"/>
+                      <a:lumOff val="40000"/>
+                    </a:schemeClr>
+                  </a:solidFill>
+                </a:endParaRPr>
+              </a:p>
+              <a:p>
+                <a:r>
+                  <a:rPr lang="en-US" sz="2000" dirty="0">
+                    <a:solidFill>
+                      <a:schemeClr val="accent6">
+                        <a:lumMod val="60000"/>
+                        <a:lumOff val="40000"/>
+                      </a:schemeClr>
+                    </a:solidFill>
+                  </a:rPr>
+                  <a:t>Term </a:t>
+                </a:r>
+                <a14:m>
+                  <m:oMath xmlns:m="http://schemas.openxmlformats.org/officeDocument/2006/math">
+                    <m:r>
+                      <a:rPr lang="en-US" sz="2000" i="1">
+                        <a:solidFill>
+                          <a:schemeClr val="accent6">
+                            <a:lumMod val="60000"/>
+                            <a:lumOff val="40000"/>
+                          </a:schemeClr>
+                        </a:solidFill>
+                        <a:latin typeface="Cambria Math" panose="02040503050406030204" pitchFamily="18" charset="0"/>
+                      </a:rPr>
+                      <m:t>𝑧</m:t>
+                    </m:r>
+                    <m:d>
+                      <m:dPr>
+                        <m:ctrlPr>
+                          <a:rPr lang="en-US" sz="2000" i="1">
+                            <a:solidFill>
+                              <a:schemeClr val="accent6">
+                                <a:lumMod val="60000"/>
+                                <a:lumOff val="40000"/>
+                              </a:schemeClr>
+                            </a:solidFill>
+                            <a:latin typeface="Cambria Math" panose="02040503050406030204" pitchFamily="18" charset="0"/>
+                          </a:rPr>
+                        </m:ctrlPr>
+                      </m:dPr>
+                      <m:e>
+                        <m:f>
+                          <m:fPr>
+                            <m:ctrlPr>
+                              <a:rPr lang="en-US" sz="2000" i="1">
+                                <a:solidFill>
+                                  <a:schemeClr val="accent6">
+                                    <a:lumMod val="60000"/>
+                                    <a:lumOff val="40000"/>
+                                  </a:schemeClr>
+                                </a:solidFill>
+                                <a:latin typeface="Cambria Math" panose="02040503050406030204" pitchFamily="18" charset="0"/>
+                              </a:rPr>
+                            </m:ctrlPr>
+                          </m:fPr>
+                          <m:num>
+                            <m:r>
+                              <a:rPr lang="en-US" sz="2000" i="1">
+                                <a:solidFill>
+                                  <a:schemeClr val="accent6">
+                                    <a:lumMod val="60000"/>
+                                    <a:lumOff val="40000"/>
+                                  </a:schemeClr>
+                                </a:solidFill>
+                                <a:latin typeface="Cambria Math" panose="02040503050406030204" pitchFamily="18" charset="0"/>
+                              </a:rPr>
+                              <m:t>𝜎</m:t>
+                            </m:r>
+                          </m:num>
+                          <m:den>
+                            <m:rad>
+                              <m:radPr>
+                                <m:degHide m:val="on"/>
+                                <m:ctrlPr>
+                                  <a:rPr lang="en-US" sz="2000" i="1">
+                                    <a:solidFill>
+                                      <a:schemeClr val="accent6">
+                                        <a:lumMod val="60000"/>
+                                        <a:lumOff val="40000"/>
+                                      </a:schemeClr>
+                                    </a:solidFill>
+                                    <a:latin typeface="Cambria Math" panose="02040503050406030204" pitchFamily="18" charset="0"/>
+                                  </a:rPr>
+                                </m:ctrlPr>
+                              </m:radPr>
+                              <m:deg/>
+                              <m:e>
+                                <m:r>
+                                  <a:rPr lang="en-US" sz="2000" i="1">
+                                    <a:solidFill>
+                                      <a:schemeClr val="accent6">
+                                        <a:lumMod val="60000"/>
+                                        <a:lumOff val="40000"/>
+                                      </a:schemeClr>
+                                    </a:solidFill>
+                                    <a:latin typeface="Cambria Math" panose="02040503050406030204" pitchFamily="18" charset="0"/>
+                                  </a:rPr>
+                                  <m:t>𝑛</m:t>
+                                </m:r>
+                              </m:e>
+                            </m:rad>
+                          </m:den>
+                        </m:f>
+                      </m:e>
+                    </m:d>
+                  </m:oMath>
+                </a14:m>
+                <a:r>
+                  <a:rPr lang="en-US" sz="2000" dirty="0">
+                    <a:solidFill>
+                      <a:schemeClr val="accent6">
+                        <a:lumMod val="60000"/>
+                        <a:lumOff val="40000"/>
+                      </a:schemeClr>
+                    </a:solidFill>
+                  </a:rPr>
+                  <a:t> is called the </a:t>
+                </a:r>
+                <a:r>
+                  <a:rPr lang="en-US" sz="2000" b="1" dirty="0">
+                    <a:solidFill>
+                      <a:schemeClr val="accent6">
+                        <a:lumMod val="60000"/>
+                        <a:lumOff val="40000"/>
+                      </a:schemeClr>
+                    </a:solidFill>
+                  </a:rPr>
+                  <a:t>margin of error ME </a:t>
+                </a:r>
+                <a:r>
+                  <a:rPr lang="en-US" sz="2000" dirty="0">
+                    <a:solidFill>
+                      <a:schemeClr val="accent6">
+                        <a:lumMod val="60000"/>
+                        <a:lumOff val="40000"/>
+                      </a:schemeClr>
+                    </a:solidFill>
+                  </a:rPr>
+                  <a:t>(AKA </a:t>
+                </a:r>
+                <a:r>
+                  <a:rPr lang="en-US" sz="2000" b="1" dirty="0">
+                    <a:solidFill>
+                      <a:schemeClr val="accent6">
+                        <a:lumMod val="60000"/>
+                        <a:lumOff val="40000"/>
+                      </a:schemeClr>
+                    </a:solidFill>
+                  </a:rPr>
+                  <a:t>maximum error of the estimate</a:t>
+                </a:r>
+                <a:r>
+                  <a:rPr lang="en-US" sz="2000" dirty="0">
+                    <a:solidFill>
+                      <a:schemeClr val="accent6">
+                        <a:lumMod val="60000"/>
+                        <a:lumOff val="40000"/>
+                      </a:schemeClr>
+                    </a:solidFill>
+                  </a:rPr>
+                  <a:t>).</a:t>
+                </a:r>
+              </a:p>
+              <a:p>
+                <a:pPr marL="0" indent="0">
+                  <a:buNone/>
+                </a:pPr>
+                <a:endParaRPr lang="en-US" sz="2000" dirty="0">
+                  <a:solidFill>
+                    <a:schemeClr val="accent6">
+                      <a:lumMod val="60000"/>
+                      <a:lumOff val="40000"/>
+                    </a:schemeClr>
+                  </a:solidFill>
+                </a:endParaRPr>
+              </a:p>
+              <a:p>
+                <a:pPr marL="0" indent="0">
+                  <a:buNone/>
+                </a:pPr>
+                <a:r>
+                  <a:rPr lang="en-US" sz="2000" dirty="0">
+                    <a:solidFill>
+                      <a:schemeClr val="accent6">
+                        <a:lumMod val="60000"/>
+                        <a:lumOff val="40000"/>
+                      </a:schemeClr>
+                    </a:solidFill>
+                  </a:rPr>
+                  <a:t>Another way of writing above is</a:t>
+                </a:r>
+              </a:p>
+              <a:p>
+                <a:pPr marL="0" indent="0">
+                  <a:buNone/>
+                </a:pPr>
+                <a:endParaRPr lang="en-US" sz="2000" dirty="0">
+                  <a:solidFill>
+                    <a:schemeClr val="accent6">
+                      <a:lumMod val="60000"/>
+                      <a:lumOff val="40000"/>
+                    </a:schemeClr>
+                  </a:solidFill>
+                </a:endParaRPr>
+              </a:p>
+              <a:p>
+                <a:pPr marL="0" indent="0">
+                  <a:buNone/>
+                </a:pPr>
+                <a:endParaRPr lang="en-US" sz="2000" dirty="0">
+                  <a:solidFill>
+                    <a:schemeClr val="accent6">
+                      <a:lumMod val="60000"/>
+                      <a:lumOff val="40000"/>
+                    </a:schemeClr>
+                  </a:solidFill>
+                </a:endParaRPr>
+              </a:p>
+              <a:p>
+                <a:pPr marL="0" indent="0">
+                  <a:buNone/>
+                </a:pPr>
+                <a:endParaRPr lang="en-US" sz="2000" dirty="0">
+                  <a:solidFill>
+                    <a:schemeClr val="accent6">
+                      <a:lumMod val="60000"/>
+                      <a:lumOff val="40000"/>
+                    </a:schemeClr>
+                  </a:solidFill>
+                </a:endParaRPr>
+              </a:p>
+              <a:p>
+                <a:pPr marL="0" indent="0">
+                  <a:buNone/>
+                </a:pPr>
+                <a:r>
+                  <a:rPr lang="en-US" sz="2000" dirty="0">
+                    <a:solidFill>
+                      <a:schemeClr val="accent6">
+                        <a:lumMod val="60000"/>
+                        <a:lumOff val="40000"/>
+                      </a:schemeClr>
+                    </a:solidFill>
+                  </a:rPr>
+                  <a:t> where, </a:t>
+                </a:r>
+                <a:r>
+                  <a:rPr lang="el-GR" sz="2000" dirty="0">
+                    <a:solidFill>
+                      <a:schemeClr val="accent6">
+                        <a:lumMod val="60000"/>
+                        <a:lumOff val="40000"/>
+                      </a:schemeClr>
+                    </a:solidFill>
+                  </a:rPr>
+                  <a:t>μ</a:t>
+                </a:r>
+                <a:r>
+                  <a:rPr lang="en-US" sz="2000" dirty="0">
+                    <a:solidFill>
+                      <a:schemeClr val="accent6">
+                        <a:lumMod val="60000"/>
+                        <a:lumOff val="40000"/>
+                      </a:schemeClr>
+                    </a:solidFill>
+                  </a:rPr>
+                  <a:t> is the population  mean.</a:t>
+                </a:r>
+              </a:p>
+              <a:p>
+                <a:pPr marL="0" indent="0">
+                  <a:buNone/>
+                </a:pPr>
+                <a:endParaRPr lang="en-US" sz="2000" dirty="0">
+                  <a:solidFill>
+                    <a:schemeClr val="accent6">
+                      <a:lumMod val="60000"/>
+                      <a:lumOff val="40000"/>
+                    </a:schemeClr>
+                  </a:solidFill>
+                </a:endParaRPr>
+              </a:p>
+              <a:p>
+                <a:pPr marL="0" indent="0">
+                  <a:buNone/>
+                </a:pPr>
+                <a:r>
+                  <a:rPr lang="en-US" sz="2000" dirty="0">
+                    <a:solidFill>
+                      <a:schemeClr val="accent6">
+                        <a:lumMod val="60000"/>
+                        <a:lumOff val="40000"/>
+                      </a:schemeClr>
+                    </a:solidFill>
+                  </a:rPr>
+                  <a:t>2 main assumptions for finding a confidence interval for a mean when σ Is Known:</a:t>
+                </a:r>
+              </a:p>
+              <a:p>
+                <a:pPr marL="514350" indent="-514350">
+                  <a:buAutoNum type="arabicParenR"/>
+                </a:pPr>
+                <a:r>
+                  <a:rPr lang="en-US" sz="2000" dirty="0">
+                    <a:solidFill>
+                      <a:schemeClr val="accent6">
+                        <a:lumMod val="60000"/>
+                        <a:lumOff val="40000"/>
+                      </a:schemeClr>
+                    </a:solidFill>
+                  </a:rPr>
+                  <a:t>The sample is a random sample</a:t>
+                </a:r>
+              </a:p>
+              <a:p>
+                <a:pPr marL="514350" indent="-514350">
+                  <a:buAutoNum type="arabicParenR"/>
+                </a:pPr>
+                <a:r>
+                  <a:rPr lang="en-US" sz="2000" dirty="0">
+                    <a:solidFill>
+                      <a:schemeClr val="accent6">
+                        <a:lumMod val="60000"/>
+                        <a:lumOff val="40000"/>
+                      </a:schemeClr>
+                    </a:solidFill>
+                  </a:rPr>
+                  <a:t>Either n &gt;= 30 or the population is normally distributed when n &lt; 30</a:t>
+                </a:r>
+              </a:p>
+            </p:txBody>
+          </p:sp>
+        </mc:Choice>
+        <mc:Fallback>
+          <p:sp>
+            <p:nvSpPr>
+              <p:cNvPr id="10" name="TextBox 9">
+                <a:extLst>
+                  <a:ext uri="{FF2B5EF4-FFF2-40B4-BE49-F238E27FC236}">
+                    <a16:creationId xmlns:a16="http://schemas.microsoft.com/office/drawing/2014/main" id="{ABCA853F-45AF-8A6D-D265-A54CC938D102}"/>
+                  </a:ext>
+                </a:extLst>
+              </p:cNvPr>
+              <p:cNvSpPr txBox="1">
+                <a:spLocks noRot="1" noChangeAspect="1" noMove="1" noResize="1" noEditPoints="1" noAdjustHandles="1" noChangeArrowheads="1" noChangeShapeType="1" noTextEdit="1"/>
+              </p:cNvSpPr>
+              <p:nvPr/>
+            </p:nvSpPr>
+            <p:spPr>
+              <a:xfrm>
+                <a:off x="124968" y="641253"/>
+                <a:ext cx="8881872" cy="6115777"/>
+              </a:xfrm>
+              <a:prstGeom prst="rect">
+                <a:avLst/>
+              </a:prstGeom>
+              <a:blipFill>
+                <a:blip r:embed="rId2"/>
+                <a:stretch>
+                  <a:fillRect l="-755" t="-499" r="-412" b="-997"/>
+                </a:stretch>
+              </a:blipFill>
+            </p:spPr>
+            <p:txBody>
+              <a:bodyPr/>
+              <a:lstStyle/>
+              <a:p>
+                <a:r>
+                  <a:rPr lang="en-US">
+                    <a:noFill/>
+                  </a:rPr>
+                  <a:t> </a:t>
+                </a:r>
+              </a:p>
+            </p:txBody>
+          </p:sp>
+        </mc:Fallback>
+      </mc:AlternateContent>
       <p:pic>
         <p:nvPicPr>
           <p:cNvPr id="4" name="Picture 3">
@@ -8262,15 +10752,15 @@
           <p:nvPr/>
         </p:nvPicPr>
         <p:blipFill>
-          <a:blip r:embed="rId2"/>
+          <a:blip r:embed="rId3"/>
           <a:stretch>
             <a:fillRect/>
           </a:stretch>
         </p:blipFill>
         <p:spPr>
           <a:xfrm>
-            <a:off x="1527047" y="1306858"/>
-            <a:ext cx="5525851" cy="2030702"/>
+            <a:off x="4303913" y="671547"/>
+            <a:ext cx="6095690" cy="2240113"/>
           </a:xfrm>
           <a:prstGeom prst="rect">
             <a:avLst/>
@@ -8295,7 +10785,7 @@
         </p:nvSpPr>
         <p:spPr>
           <a:xfrm>
-            <a:off x="789432" y="163957"/>
+            <a:off x="789432" y="-9779"/>
             <a:ext cx="10515600" cy="604139"/>
           </a:xfrm>
         </p:spPr>
@@ -8307,578 +10797,12 @@
           <a:p>
             <a:pPr algn="ctr"/>
             <a:r>
-              <a:rPr lang="en-US" sz="3600" b="1" dirty="0"/>
+              <a:rPr lang="en-US" sz="2800" dirty="0"/>
               <a:t>Confidence Interval: Formula for z-distribution</a:t>
             </a:r>
-            <a:endParaRPr lang="en-US" sz="3600" dirty="0"/>
           </a:p>
         </p:txBody>
       </p:sp>
-      <mc:AlternateContent xmlns:mc="http://schemas.openxmlformats.org/markup-compatibility/2006" xmlns:a14="http://schemas.microsoft.com/office/drawing/2010/main">
-        <mc:Choice Requires="a14">
-          <p:sp>
-            <p:nvSpPr>
-              <p:cNvPr id="10" name="TextBox 9">
-                <a:extLst>
-                  <a:ext uri="{FF2B5EF4-FFF2-40B4-BE49-F238E27FC236}">
-                    <a16:creationId xmlns:a16="http://schemas.microsoft.com/office/drawing/2014/main" id="{ABCA853F-45AF-8A6D-D265-A54CC938D102}"/>
-                  </a:ext>
-                </a:extLst>
-              </p:cNvPr>
-              <p:cNvSpPr txBox="1"/>
-              <p:nvPr/>
-            </p:nvSpPr>
-            <p:spPr>
-              <a:xfrm>
-                <a:off x="124968" y="641253"/>
-                <a:ext cx="8881872" cy="6067430"/>
-              </a:xfrm>
-              <a:prstGeom prst="rect">
-                <a:avLst/>
-              </a:prstGeom>
-              <a:noFill/>
-            </p:spPr>
-            <p:txBody>
-              <a:bodyPr wrap="square">
-                <a:spAutoFit/>
-              </a:bodyPr>
-              <a:lstStyle/>
-              <a:p>
-                <a:pPr marL="0" indent="0">
-                  <a:buNone/>
-                </a:pPr>
-                <a:r>
-                  <a:rPr lang="en-US" dirty="0">
-                    <a:solidFill>
-                      <a:schemeClr val="accent6">
-                        <a:lumMod val="60000"/>
-                        <a:lumOff val="40000"/>
-                      </a:schemeClr>
-                    </a:solidFill>
-                  </a:rPr>
-                  <a:t>Formula for mean:</a:t>
-                </a:r>
-              </a:p>
-              <a:p>
-                <a:pPr marL="0" indent="0">
-                  <a:buNone/>
-                </a:pPr>
-                <a:r>
-                  <a:rPr lang="en-US" dirty="0">
-                    <a:solidFill>
-                      <a:schemeClr val="accent6">
-                        <a:lumMod val="60000"/>
-                        <a:lumOff val="40000"/>
-                      </a:schemeClr>
-                    </a:solidFill>
-                  </a:rPr>
-                  <a:t>If </a:t>
-                </a:r>
-                <a:r>
-                  <a:rPr lang="en-US" dirty="0">
-                    <a:solidFill>
-                      <a:schemeClr val="accent4">
-                        <a:lumMod val="60000"/>
-                        <a:lumOff val="40000"/>
-                      </a:schemeClr>
-                    </a:solidFill>
-                  </a:rPr>
-                  <a:t>population</a:t>
-                </a:r>
-                <a:r>
-                  <a:rPr lang="en-US" dirty="0">
-                    <a:solidFill>
-                      <a:schemeClr val="accent6">
-                        <a:lumMod val="60000"/>
-                        <a:lumOff val="40000"/>
-                      </a:schemeClr>
-                    </a:solidFill>
-                  </a:rPr>
-                  <a:t> SD σ  is known:</a:t>
-                </a:r>
-              </a:p>
-              <a:p>
-                <a:pPr marL="0" indent="0">
-                  <a:buNone/>
-                </a:pPr>
-                <a:endParaRPr lang="en-US" dirty="0">
-                  <a:solidFill>
-                    <a:schemeClr val="accent6">
-                      <a:lumMod val="60000"/>
-                      <a:lumOff val="40000"/>
-                    </a:schemeClr>
-                  </a:solidFill>
-                </a:endParaRPr>
-              </a:p>
-              <a:p>
-                <a:pPr marL="0" indent="0">
-                  <a:buNone/>
-                </a:pPr>
-                <a:endParaRPr lang="en-US" dirty="0">
-                  <a:solidFill>
-                    <a:schemeClr val="accent6">
-                      <a:lumMod val="60000"/>
-                      <a:lumOff val="40000"/>
-                    </a:schemeClr>
-                  </a:solidFill>
-                </a:endParaRPr>
-              </a:p>
-              <a:p>
-                <a:pPr marL="0" indent="0">
-                  <a:buNone/>
-                </a:pPr>
-                <a:endParaRPr lang="en-US" dirty="0">
-                  <a:solidFill>
-                    <a:schemeClr val="accent6">
-                      <a:lumMod val="60000"/>
-                      <a:lumOff val="40000"/>
-                    </a:schemeClr>
-                  </a:solidFill>
-                </a:endParaRPr>
-              </a:p>
-              <a:p>
-                <a:pPr marL="0" indent="0">
-                  <a:buNone/>
-                </a:pPr>
-                <a:endParaRPr lang="en-US" dirty="0">
-                  <a:solidFill>
-                    <a:schemeClr val="accent6">
-                      <a:lumMod val="60000"/>
-                      <a:lumOff val="40000"/>
-                    </a:schemeClr>
-                  </a:solidFill>
-                </a:endParaRPr>
-              </a:p>
-              <a:p>
-                <a:pPr marL="0" indent="0">
-                  <a:buNone/>
-                </a:pPr>
-                <a:endParaRPr lang="en-US" dirty="0">
-                  <a:solidFill>
-                    <a:schemeClr val="accent6">
-                      <a:lumMod val="60000"/>
-                      <a:lumOff val="40000"/>
-                    </a:schemeClr>
-                  </a:solidFill>
-                </a:endParaRPr>
-              </a:p>
-              <a:p>
-                <a:pPr marL="0" indent="0">
-                  <a:buNone/>
-                </a:pPr>
-                <a:endParaRPr lang="en-US" dirty="0">
-                  <a:solidFill>
-                    <a:schemeClr val="accent6">
-                      <a:lumMod val="60000"/>
-                      <a:lumOff val="40000"/>
-                    </a:schemeClr>
-                  </a:solidFill>
-                </a:endParaRPr>
-              </a:p>
-              <a:p>
-                <a:pPr marL="0" indent="0">
-                  <a:buNone/>
-                </a:pPr>
-                <a:endParaRPr lang="en-US" dirty="0">
-                  <a:solidFill>
-                    <a:schemeClr val="accent6">
-                      <a:lumMod val="60000"/>
-                      <a:lumOff val="40000"/>
-                    </a:schemeClr>
-                  </a:solidFill>
-                </a:endParaRPr>
-              </a:p>
-              <a:p>
-                <a:pPr marL="0" indent="0">
-                  <a:buNone/>
-                </a:pPr>
-                <a:endParaRPr lang="en-US" dirty="0">
-                  <a:solidFill>
-                    <a:schemeClr val="accent6">
-                      <a:lumMod val="60000"/>
-                      <a:lumOff val="40000"/>
-                    </a:schemeClr>
-                  </a:solidFill>
-                </a:endParaRPr>
-              </a:p>
-              <a:p>
-                <a:r>
-                  <a:rPr lang="en-US" dirty="0">
-                    <a:solidFill>
-                      <a:schemeClr val="accent6">
-                        <a:lumMod val="60000"/>
-                        <a:lumOff val="40000"/>
-                      </a:schemeClr>
-                    </a:solidFill>
-                  </a:rPr>
-                  <a:t>Term </a:t>
-                </a:r>
-                <a14:m>
-                  <m:oMath xmlns:m="http://schemas.openxmlformats.org/officeDocument/2006/math">
-                    <m:r>
-                      <a:rPr lang="en-US" i="1">
-                        <a:solidFill>
-                          <a:schemeClr val="accent6">
-                            <a:lumMod val="60000"/>
-                            <a:lumOff val="40000"/>
-                          </a:schemeClr>
-                        </a:solidFill>
-                        <a:latin typeface="Cambria Math" panose="02040503050406030204" pitchFamily="18" charset="0"/>
-                      </a:rPr>
-                      <m:t>𝑧</m:t>
-                    </m:r>
-                    <m:d>
-                      <m:dPr>
-                        <m:ctrlPr>
-                          <a:rPr lang="en-US" i="1">
-                            <a:solidFill>
-                              <a:schemeClr val="accent6">
-                                <a:lumMod val="60000"/>
-                                <a:lumOff val="40000"/>
-                              </a:schemeClr>
-                            </a:solidFill>
-                            <a:latin typeface="Cambria Math" panose="02040503050406030204" pitchFamily="18" charset="0"/>
-                          </a:rPr>
-                        </m:ctrlPr>
-                      </m:dPr>
-                      <m:e>
-                        <m:f>
-                          <m:fPr>
-                            <m:ctrlPr>
-                              <a:rPr lang="en-US" i="1">
-                                <a:solidFill>
-                                  <a:schemeClr val="accent6">
-                                    <a:lumMod val="60000"/>
-                                    <a:lumOff val="40000"/>
-                                  </a:schemeClr>
-                                </a:solidFill>
-                                <a:latin typeface="Cambria Math" panose="02040503050406030204" pitchFamily="18" charset="0"/>
-                              </a:rPr>
-                            </m:ctrlPr>
-                          </m:fPr>
-                          <m:num>
-                            <m:r>
-                              <a:rPr lang="en-US" i="1">
-                                <a:solidFill>
-                                  <a:schemeClr val="accent6">
-                                    <a:lumMod val="60000"/>
-                                    <a:lumOff val="40000"/>
-                                  </a:schemeClr>
-                                </a:solidFill>
-                                <a:latin typeface="Cambria Math" panose="02040503050406030204" pitchFamily="18" charset="0"/>
-                              </a:rPr>
-                              <m:t>𝜎</m:t>
-                            </m:r>
-                          </m:num>
-                          <m:den>
-                            <m:rad>
-                              <m:radPr>
-                                <m:degHide m:val="on"/>
-                                <m:ctrlPr>
-                                  <a:rPr lang="en-US" i="1">
-                                    <a:solidFill>
-                                      <a:schemeClr val="accent6">
-                                        <a:lumMod val="60000"/>
-                                        <a:lumOff val="40000"/>
-                                      </a:schemeClr>
-                                    </a:solidFill>
-                                    <a:latin typeface="Cambria Math" panose="02040503050406030204" pitchFamily="18" charset="0"/>
-                                  </a:rPr>
-                                </m:ctrlPr>
-                              </m:radPr>
-                              <m:deg/>
-                              <m:e>
-                                <m:r>
-                                  <a:rPr lang="en-US" i="1">
-                                    <a:solidFill>
-                                      <a:schemeClr val="accent6">
-                                        <a:lumMod val="60000"/>
-                                        <a:lumOff val="40000"/>
-                                      </a:schemeClr>
-                                    </a:solidFill>
-                                    <a:latin typeface="Cambria Math" panose="02040503050406030204" pitchFamily="18" charset="0"/>
-                                  </a:rPr>
-                                  <m:t>𝑛</m:t>
-                                </m:r>
-                              </m:e>
-                            </m:rad>
-                          </m:den>
-                        </m:f>
-                      </m:e>
-                    </m:d>
-                  </m:oMath>
-                </a14:m>
-                <a:r>
-                  <a:rPr lang="en-US" dirty="0">
-                    <a:solidFill>
-                      <a:schemeClr val="accent6">
-                        <a:lumMod val="60000"/>
-                        <a:lumOff val="40000"/>
-                      </a:schemeClr>
-                    </a:solidFill>
-                  </a:rPr>
-                  <a:t> is called the </a:t>
-                </a:r>
-                <a:r>
-                  <a:rPr lang="en-US" b="1" dirty="0">
-                    <a:solidFill>
-                      <a:schemeClr val="accent6">
-                        <a:lumMod val="60000"/>
-                        <a:lumOff val="40000"/>
-                      </a:schemeClr>
-                    </a:solidFill>
-                  </a:rPr>
-                  <a:t>margin of error ME </a:t>
-                </a:r>
-                <a:r>
-                  <a:rPr lang="en-US" dirty="0">
-                    <a:solidFill>
-                      <a:schemeClr val="accent6">
-                        <a:lumMod val="60000"/>
-                        <a:lumOff val="40000"/>
-                      </a:schemeClr>
-                    </a:solidFill>
-                  </a:rPr>
-                  <a:t>(AKA </a:t>
-                </a:r>
-                <a:r>
-                  <a:rPr lang="en-US" b="1" dirty="0">
-                    <a:solidFill>
-                      <a:schemeClr val="accent6">
-                        <a:lumMod val="60000"/>
-                        <a:lumOff val="40000"/>
-                      </a:schemeClr>
-                    </a:solidFill>
-                  </a:rPr>
-                  <a:t>maximum error of the estimate</a:t>
-                </a:r>
-                <a:r>
-                  <a:rPr lang="en-US" dirty="0">
-                    <a:solidFill>
-                      <a:schemeClr val="accent6">
-                        <a:lumMod val="60000"/>
-                        <a:lumOff val="40000"/>
-                      </a:schemeClr>
-                    </a:solidFill>
-                  </a:rPr>
-                  <a:t>).</a:t>
-                </a:r>
-              </a:p>
-              <a:p>
-                <a:pPr marL="0" indent="0">
-                  <a:buNone/>
-                </a:pPr>
-                <a:endParaRPr lang="en-US" dirty="0">
-                  <a:solidFill>
-                    <a:schemeClr val="accent6">
-                      <a:lumMod val="60000"/>
-                      <a:lumOff val="40000"/>
-                    </a:schemeClr>
-                  </a:solidFill>
-                </a:endParaRPr>
-              </a:p>
-              <a:p>
-                <a:pPr marL="0" indent="0">
-                  <a:buNone/>
-                </a:pPr>
-                <a:r>
-                  <a:rPr lang="en-US" dirty="0">
-                    <a:solidFill>
-                      <a:schemeClr val="accent6">
-                        <a:lumMod val="60000"/>
-                        <a:lumOff val="40000"/>
-                      </a:schemeClr>
-                    </a:solidFill>
-                  </a:rPr>
-                  <a:t>Another way of writing above is</a:t>
-                </a:r>
-              </a:p>
-              <a:p>
-                <a:pPr marL="0" indent="0">
-                  <a:buNone/>
-                </a:pPr>
-                <a:endParaRPr lang="en-US" dirty="0">
-                  <a:solidFill>
-                    <a:schemeClr val="accent6">
-                      <a:lumMod val="60000"/>
-                      <a:lumOff val="40000"/>
-                    </a:schemeClr>
-                  </a:solidFill>
-                </a:endParaRPr>
-              </a:p>
-              <a:p>
-                <a:pPr marL="0" indent="0">
-                  <a:buNone/>
-                </a:pPr>
-                <a:endParaRPr lang="en-US" dirty="0">
-                  <a:solidFill>
-                    <a:schemeClr val="accent6">
-                      <a:lumMod val="60000"/>
-                      <a:lumOff val="40000"/>
-                    </a:schemeClr>
-                  </a:solidFill>
-                </a:endParaRPr>
-              </a:p>
-              <a:p>
-                <a:pPr marL="0" indent="0">
-                  <a:buNone/>
-                </a:pPr>
-                <a:endParaRPr lang="en-US" dirty="0">
-                  <a:solidFill>
-                    <a:schemeClr val="accent6">
-                      <a:lumMod val="60000"/>
-                      <a:lumOff val="40000"/>
-                    </a:schemeClr>
-                  </a:solidFill>
-                </a:endParaRPr>
-              </a:p>
-              <a:p>
-                <a:pPr marL="0" indent="0">
-                  <a:buNone/>
-                </a:pPr>
-                <a:r>
-                  <a:rPr lang="en-US" dirty="0">
-                    <a:solidFill>
-                      <a:schemeClr val="accent6">
-                        <a:lumMod val="60000"/>
-                        <a:lumOff val="40000"/>
-                      </a:schemeClr>
-                    </a:solidFill>
-                  </a:rPr>
-                  <a:t> where, </a:t>
-                </a:r>
-                <a:r>
-                  <a:rPr lang="el-GR" dirty="0">
-                    <a:solidFill>
-                      <a:schemeClr val="accent6">
-                        <a:lumMod val="60000"/>
-                        <a:lumOff val="40000"/>
-                      </a:schemeClr>
-                    </a:solidFill>
-                  </a:rPr>
-                  <a:t>μ</a:t>
-                </a:r>
-                <a:r>
-                  <a:rPr lang="en-US" dirty="0">
-                    <a:solidFill>
-                      <a:schemeClr val="accent6">
-                        <a:lumMod val="60000"/>
-                        <a:lumOff val="40000"/>
-                      </a:schemeClr>
-                    </a:solidFill>
-                  </a:rPr>
-                  <a:t> is the population  mean.</a:t>
-                </a:r>
-              </a:p>
-              <a:p>
-                <a:pPr marL="0" indent="0">
-                  <a:buNone/>
-                </a:pPr>
-                <a:endParaRPr lang="en-US" dirty="0">
-                  <a:solidFill>
-                    <a:schemeClr val="accent6">
-                      <a:lumMod val="60000"/>
-                      <a:lumOff val="40000"/>
-                    </a:schemeClr>
-                  </a:solidFill>
-                </a:endParaRPr>
-              </a:p>
-              <a:p>
-                <a:pPr marL="0" indent="0">
-                  <a:buNone/>
-                </a:pPr>
-                <a:r>
-                  <a:rPr lang="en-US" dirty="0">
-                    <a:solidFill>
-                      <a:schemeClr val="accent6">
-                        <a:lumMod val="60000"/>
-                        <a:lumOff val="40000"/>
-                      </a:schemeClr>
-                    </a:solidFill>
-                  </a:rPr>
-                  <a:t>2 main assumptions for finding a confidence interval for a mean when σ Is Known:</a:t>
-                </a:r>
-              </a:p>
-              <a:p>
-                <a:pPr marL="514350" indent="-514350">
-                  <a:buAutoNum type="arabicParenR"/>
-                </a:pPr>
-                <a:r>
-                  <a:rPr lang="en-US" dirty="0">
-                    <a:solidFill>
-                      <a:schemeClr val="accent6">
-                        <a:lumMod val="60000"/>
-                        <a:lumOff val="40000"/>
-                      </a:schemeClr>
-                    </a:solidFill>
-                  </a:rPr>
-                  <a:t>The sample is a random sample</a:t>
-                </a:r>
-              </a:p>
-              <a:p>
-                <a:pPr marL="514350" indent="-514350">
-                  <a:buAutoNum type="arabicParenR"/>
-                </a:pPr>
-                <a:r>
-                  <a:rPr lang="en-US" dirty="0">
-                    <a:solidFill>
-                      <a:schemeClr val="accent6">
-                        <a:lumMod val="60000"/>
-                        <a:lumOff val="40000"/>
-                      </a:schemeClr>
-                    </a:solidFill>
-                  </a:rPr>
-                  <a:t>Either n &gt;= 30 or the population is normally distributed when n &lt; 30</a:t>
-                </a:r>
-              </a:p>
-            </p:txBody>
-          </p:sp>
-        </mc:Choice>
-        <mc:Fallback xmlns="">
-          <p:sp>
-            <p:nvSpPr>
-              <p:cNvPr id="10" name="TextBox 9">
-                <a:extLst>
-                  <a:ext uri="{FF2B5EF4-FFF2-40B4-BE49-F238E27FC236}">
-                    <a16:creationId xmlns:a16="http://schemas.microsoft.com/office/drawing/2014/main" id="{ABCA853F-45AF-8A6D-D265-A54CC938D102}"/>
-                  </a:ext>
-                </a:extLst>
-              </p:cNvPr>
-              <p:cNvSpPr txBox="1">
-                <a:spLocks noRot="1" noChangeAspect="1" noMove="1" noResize="1" noEditPoints="1" noAdjustHandles="1" noChangeArrowheads="1" noChangeShapeType="1" noTextEdit="1"/>
-              </p:cNvSpPr>
-              <p:nvPr/>
-            </p:nvSpPr>
-            <p:spPr>
-              <a:xfrm>
-                <a:off x="124968" y="641253"/>
-                <a:ext cx="8881872" cy="6067430"/>
-              </a:xfrm>
-              <a:prstGeom prst="rect">
-                <a:avLst/>
-              </a:prstGeom>
-              <a:blipFill>
-                <a:blip r:embed="rId3"/>
-                <a:stretch>
-                  <a:fillRect l="-618" t="-502" b="-602"/>
-                </a:stretch>
-              </a:blipFill>
-            </p:spPr>
-            <p:txBody>
-              <a:bodyPr/>
-              <a:lstStyle/>
-              <a:p>
-                <a:r>
-                  <a:rPr lang="en-US">
-                    <a:noFill/>
-                  </a:rPr>
-                  <a:t> </a:t>
-                </a:r>
-              </a:p>
-            </p:txBody>
-          </p:sp>
-        </mc:Fallback>
-      </mc:AlternateContent>
       <p:pic>
         <p:nvPicPr>
           <p:cNvPr id="12" name="Picture 11">
@@ -8901,7 +10825,7 @@
         </p:blipFill>
         <p:spPr>
           <a:xfrm>
-            <a:off x="3608832" y="4144666"/>
+            <a:off x="4024128" y="3684342"/>
             <a:ext cx="3998976" cy="566853"/>
           </a:xfrm>
           <a:prstGeom prst="rect">
@@ -8931,7 +10855,7 @@
         </p:blipFill>
         <p:spPr>
           <a:xfrm>
-            <a:off x="3474719" y="4773269"/>
+            <a:off x="3992980" y="4428091"/>
             <a:ext cx="4108503" cy="442978"/>
           </a:xfrm>
           <a:prstGeom prst="rect">
@@ -9023,7 +10947,7 @@
         </p:nvSpPr>
         <p:spPr>
           <a:xfrm>
-            <a:off x="789432" y="163957"/>
+            <a:off x="789432" y="54229"/>
             <a:ext cx="10515600" cy="604139"/>
           </a:xfrm>
         </p:spPr>
@@ -9035,15 +10959,15 @@
           <a:p>
             <a:pPr algn="ctr"/>
             <a:r>
-              <a:rPr lang="en-US" sz="3600" b="1" dirty="0"/>
+              <a:rPr lang="en-US" sz="2800" b="1" dirty="0"/>
               <a:t>Confidence Interval: Formula For t-distribution</a:t>
             </a:r>
-            <a:endParaRPr lang="en-US" sz="3600" dirty="0"/>
+            <a:endParaRPr lang="en-US" sz="2800" dirty="0"/>
           </a:p>
         </p:txBody>
       </p:sp>
-      <mc:AlternateContent xmlns:mc="http://schemas.openxmlformats.org/markup-compatibility/2006" xmlns:a14="http://schemas.microsoft.com/office/drawing/2010/main">
-        <mc:Choice Requires="a14">
+      <mc:AlternateContent xmlns:mc="http://schemas.openxmlformats.org/markup-compatibility/2006">
+        <mc:Choice xmlns:a14="http://schemas.microsoft.com/office/drawing/2010/main" Requires="a14">
           <p:sp>
             <p:nvSpPr>
               <p:cNvPr id="10" name="TextBox 9">
@@ -9059,7 +10983,7 @@
             <p:spPr>
               <a:xfrm>
                 <a:off x="124968" y="641253"/>
-                <a:ext cx="10811256" cy="2189446"/>
+                <a:ext cx="10811256" cy="3257751"/>
               </a:xfrm>
               <a:prstGeom prst="rect">
                 <a:avLst/>
@@ -9076,7 +11000,7 @@
                   <a:buNone/>
                 </a:pPr>
                 <a:r>
-                  <a:rPr lang="en-US" dirty="0">
+                  <a:rPr lang="en-US" sz="2400" dirty="0">
                     <a:solidFill>
                       <a:schemeClr val="accent6">
                         <a:lumMod val="60000"/>
@@ -9084,11 +11008,11 @@
                       </a:schemeClr>
                     </a:solidFill>
                   </a:rPr>
-                  <a:t>Formula for mean:</a:t>
+                  <a:t>Formula for CI of  mean:</a:t>
                 </a:r>
               </a:p>
               <a:p>
-                <a:endParaRPr lang="en-US" dirty="0">
+                <a:endParaRPr lang="en-US" sz="2400" dirty="0">
                   <a:solidFill>
                     <a:schemeClr val="accent6">
                       <a:lumMod val="60000"/>
@@ -9099,7 +11023,7 @@
               </a:p>
               <a:p>
                 <a:r>
-                  <a:rPr lang="en-US" dirty="0">
+                  <a:rPr lang="en-US" sz="2400" dirty="0">
                     <a:solidFill>
                       <a:schemeClr val="accent6">
                         <a:lumMod val="60000"/>
@@ -9110,7 +11034,7 @@
                   <a:t>Previously we used z-distribution because population SD σ was known. If population SD is unknown, then we use </a:t>
                 </a:r>
                 <a:r>
-                  <a:rPr lang="en-US" b="1" dirty="0">
+                  <a:rPr lang="en-US" sz="2400" b="1" dirty="0">
                     <a:solidFill>
                       <a:schemeClr val="accent6">
                         <a:lumMod val="60000"/>
@@ -9121,7 +11045,7 @@
                   <a:t>t-distribution</a:t>
                 </a:r>
                 <a:r>
-                  <a:rPr lang="en-US" dirty="0">
+                  <a:rPr lang="en-US" sz="2400" dirty="0">
                     <a:solidFill>
                       <a:schemeClr val="accent6">
                         <a:lumMod val="60000"/>
@@ -9137,7 +11061,7 @@
                   <a:buNone/>
                 </a:pPr>
                 <a:r>
-                  <a:rPr lang="en-US" dirty="0">
+                  <a:rPr lang="en-US" sz="2400" dirty="0">
                     <a:solidFill>
                       <a:schemeClr val="accent6">
                         <a:lumMod val="60000"/>
@@ -9148,7 +11072,7 @@
                   <a:t>The degree of freedom </a:t>
                 </a:r>
                 <a:r>
-                  <a:rPr lang="en-US" dirty="0" err="1">
+                  <a:rPr lang="en-US" sz="2400" dirty="0" err="1">
                     <a:solidFill>
                       <a:schemeClr val="accent6">
                         <a:lumMod val="60000"/>
@@ -9159,7 +11083,7 @@
                   <a:t>d.f.</a:t>
                 </a:r>
                 <a:r>
-                  <a:rPr lang="en-US" dirty="0">
+                  <a:rPr lang="en-US" sz="2400" dirty="0">
                     <a:solidFill>
                       <a:schemeClr val="accent6">
                         <a:lumMod val="60000"/>
@@ -9167,10 +11091,37 @@
                       </a:schemeClr>
                     </a:solidFill>
                   </a:rPr>
-                  <a:t> is n-1. We use </a:t>
-                </a:r>
-                <a:r>
-                  <a:rPr lang="en-US" dirty="0" err="1">
+                  <a:t> is </a:t>
+                </a:r>
+                <a:r>
+                  <a:rPr lang="en-US" sz="2400" b="1" dirty="0">
+                    <a:solidFill>
+                      <a:schemeClr val="accent6">
+                        <a:lumMod val="60000"/>
+                        <a:lumOff val="40000"/>
+                      </a:schemeClr>
+                    </a:solidFill>
+                  </a:rPr>
+                  <a:t>n-1. </a:t>
+                </a:r>
+              </a:p>
+              <a:p>
+                <a:pPr marL="0" indent="0">
+                  <a:buNone/>
+                </a:pPr>
+                <a:r>
+                  <a:rPr lang="en-US" sz="2400" dirty="0">
+                    <a:solidFill>
+                      <a:schemeClr val="accent6">
+                        <a:lumMod val="60000"/>
+                        <a:lumOff val="40000"/>
+                      </a:schemeClr>
+                    </a:solidFill>
+                  </a:rPr>
+                  <a:t>We use </a:t>
+                </a:r>
+                <a:r>
+                  <a:rPr lang="en-US" sz="2400" dirty="0" err="1">
                     <a:solidFill>
                       <a:schemeClr val="accent6">
                         <a:lumMod val="60000"/>
@@ -9181,7 +11132,7 @@
                   <a:t>d.f.</a:t>
                 </a:r>
                 <a:r>
-                  <a:rPr lang="en-US" dirty="0">
+                  <a:rPr lang="en-US" sz="2400" dirty="0">
                     <a:solidFill>
                       <a:schemeClr val="accent6">
                         <a:lumMod val="60000"/>
@@ -9196,7 +11147,7 @@
                 <a:pPr marL="0" indent="0">
                   <a:buNone/>
                 </a:pPr>
-                <a:endParaRPr lang="en-US" dirty="0">
+                <a:endParaRPr lang="en-US" sz="2400" dirty="0">
                   <a:solidFill>
                     <a:schemeClr val="accent6">
                       <a:lumMod val="60000"/>
@@ -9207,7 +11158,7 @@
               </a:p>
               <a:p>
                 <a:r>
-                  <a:rPr lang="en-US" b="1" dirty="0">
+                  <a:rPr lang="en-US" sz="2400" b="1" dirty="0">
                     <a:solidFill>
                       <a:schemeClr val="accent6">
                         <a:lumMod val="60000"/>
@@ -9218,7 +11169,7 @@
                   <a:t>Margin of error</a:t>
                 </a:r>
                 <a:r>
-                  <a:rPr lang="en-US" dirty="0">
+                  <a:rPr lang="en-US" sz="2400" dirty="0">
                     <a:solidFill>
                       <a:schemeClr val="accent6">
                         <a:lumMod val="60000"/>
@@ -9234,7 +11185,7 @@
                       <m:rPr>
                         <m:sty m:val="p"/>
                       </m:rPr>
-                      <a:rPr lang="en-US" b="0" i="0" smtClean="0">
+                      <a:rPr lang="en-US" sz="2400" b="0" i="0" smtClean="0">
                         <a:solidFill>
                           <a:schemeClr val="accent6">
                             <a:lumMod val="60000"/>
@@ -9248,7 +11199,7 @@
                     <m:d>
                       <m:dPr>
                         <m:ctrlPr>
-                          <a:rPr lang="en-US" i="1">
+                          <a:rPr lang="en-US" sz="2400" i="1">
                             <a:solidFill>
                               <a:schemeClr val="accent6">
                                 <a:lumMod val="60000"/>
@@ -9263,7 +11214,7 @@
                         <m:f>
                           <m:fPr>
                             <m:ctrlPr>
-                              <a:rPr lang="en-US" i="1">
+                              <a:rPr lang="en-US" sz="2400" i="1">
                                 <a:solidFill>
                                   <a:schemeClr val="accent6">
                                     <a:lumMod val="60000"/>
@@ -9276,7 +11227,7 @@
                           </m:fPr>
                           <m:num>
                             <m:r>
-                              <a:rPr lang="en-US" b="0" i="1" smtClean="0">
+                              <a:rPr lang="en-US" sz="2400" b="0" i="1" smtClean="0">
                                 <a:solidFill>
                                   <a:schemeClr val="accent6">
                                     <a:lumMod val="60000"/>
@@ -9293,7 +11244,7 @@
                               <m:radPr>
                                 <m:degHide m:val="on"/>
                                 <m:ctrlPr>
-                                  <a:rPr lang="en-US" i="1">
+                                  <a:rPr lang="en-US" sz="2400" i="1">
                                     <a:solidFill>
                                       <a:schemeClr val="accent6">
                                         <a:lumMod val="60000"/>
@@ -9307,7 +11258,7 @@
                               <m:deg/>
                               <m:e>
                                 <m:r>
-                                  <a:rPr lang="en-US" i="1">
+                                  <a:rPr lang="en-US" sz="2400" i="1">
                                     <a:solidFill>
                                       <a:schemeClr val="accent6">
                                         <a:lumMod val="60000"/>
@@ -9327,7 +11278,7 @@
                   </m:oMath>
                 </a14:m>
                 <a:r>
-                  <a:rPr lang="en-US" dirty="0">
+                  <a:rPr lang="en-US" sz="2400" dirty="0">
                     <a:solidFill>
                       <a:schemeClr val="accent6">
                         <a:lumMod val="60000"/>
@@ -9341,7 +11292,7 @@
             </p:txBody>
           </p:sp>
         </mc:Choice>
-        <mc:Fallback xmlns="">
+        <mc:Fallback>
           <p:sp>
             <p:nvSpPr>
               <p:cNvPr id="10" name="TextBox 9">
@@ -9359,7 +11310,7 @@
             <p:spPr>
               <a:xfrm>
                 <a:off x="124968" y="641253"/>
-                <a:ext cx="10811256" cy="2189446"/>
+                <a:ext cx="10811256" cy="3257751"/>
               </a:xfrm>
               <a:prstGeom prst="rect">
                 <a:avLst/>
@@ -9367,7 +11318,7 @@
               <a:blipFill>
                 <a:blip r:embed="rId2"/>
                 <a:stretch>
-                  <a:fillRect l="-508" t="-1393"/>
+                  <a:fillRect l="-902" t="-1495"/>
                 </a:stretch>
               </a:blipFill>
             </p:spPr>
@@ -9408,7 +11359,7 @@
         </p:blipFill>
         <p:spPr>
           <a:xfrm>
-            <a:off x="109727" y="3281381"/>
+            <a:off x="109727" y="3939749"/>
             <a:ext cx="6473565" cy="859592"/>
           </a:xfrm>
           <a:prstGeom prst="rect">
@@ -9438,7 +11389,7 @@
         </p:blipFill>
         <p:spPr>
           <a:xfrm>
-            <a:off x="-14613" y="4634217"/>
+            <a:off x="-14613" y="5292585"/>
             <a:ext cx="6597905" cy="711385"/>
           </a:xfrm>
           <a:prstGeom prst="rect">
@@ -9468,7 +11419,7 @@
         </p:blipFill>
         <p:spPr>
           <a:xfrm>
-            <a:off x="7945815" y="3429000"/>
+            <a:off x="7954959" y="3648456"/>
             <a:ext cx="3920495" cy="2071095"/>
           </a:xfrm>
           <a:prstGeom prst="rect">
@@ -9650,8 +11601,8 @@
           </a:p>
         </p:txBody>
       </p:sp>
-      <mc:AlternateContent xmlns:mc="http://schemas.openxmlformats.org/markup-compatibility/2006" xmlns:a14="http://schemas.microsoft.com/office/drawing/2010/main">
-        <mc:Choice Requires="a14">
+      <mc:AlternateContent xmlns:mc="http://schemas.openxmlformats.org/markup-compatibility/2006">
+        <mc:Choice xmlns:a14="http://schemas.microsoft.com/office/drawing/2010/main" Requires="a14">
           <p:sp>
             <p:nvSpPr>
               <p:cNvPr id="10" name="TextBox 9">
@@ -9667,7 +11618,7 @@
             <p:spPr>
               <a:xfrm>
                 <a:off x="173736" y="686973"/>
-                <a:ext cx="10177272" cy="2730235"/>
+                <a:ext cx="10177272" cy="2826864"/>
               </a:xfrm>
               <a:prstGeom prst="rect">
                 <a:avLst/>
@@ -9726,7 +11677,7 @@
                 <a14:m>
                   <m:oMath xmlns:m="http://schemas.openxmlformats.org/officeDocument/2006/math">
                     <m:r>
-                      <a:rPr lang="en-US" sz="2000" i="1">
+                      <a:rPr lang="en-US" sz="2400" i="1">
                         <a:solidFill>
                           <a:schemeClr val="accent6">
                             <a:lumMod val="60000"/>
@@ -9740,7 +11691,7 @@
                     <m:d>
                       <m:dPr>
                         <m:ctrlPr>
-                          <a:rPr lang="en-US" sz="2000" i="1">
+                          <a:rPr lang="en-US" sz="2400" i="1">
                             <a:solidFill>
                               <a:schemeClr val="accent6">
                                 <a:lumMod val="60000"/>
@@ -9755,7 +11706,7 @@
                         <m:f>
                           <m:fPr>
                             <m:ctrlPr>
-                              <a:rPr lang="en-US" sz="2000" i="1">
+                              <a:rPr lang="en-US" sz="2400" i="1">
                                 <a:solidFill>
                                   <a:schemeClr val="accent6">
                                     <a:lumMod val="60000"/>
@@ -9768,7 +11719,7 @@
                           </m:fPr>
                           <m:num>
                             <m:r>
-                              <a:rPr lang="en-US" sz="2000" i="1">
+                              <a:rPr lang="en-US" sz="2400" i="1">
                                 <a:solidFill>
                                   <a:schemeClr val="accent6">
                                     <a:lumMod val="60000"/>
@@ -9785,7 +11736,7 @@
                               <m:radPr>
                                 <m:degHide m:val="on"/>
                                 <m:ctrlPr>
-                                  <a:rPr lang="en-US" sz="2000" i="1">
+                                  <a:rPr lang="en-US" sz="2400" i="1">
                                     <a:solidFill>
                                       <a:schemeClr val="accent6">
                                         <a:lumMod val="60000"/>
@@ -9799,7 +11750,7 @@
                               <m:deg/>
                               <m:e>
                                 <m:r>
-                                  <a:rPr lang="en-US" sz="2000" i="1">
+                                  <a:rPr lang="en-US" sz="2400" i="1">
                                     <a:solidFill>
                                       <a:schemeClr val="accent6">
                                         <a:lumMod val="60000"/>
@@ -9819,7 +11770,7 @@
                   </m:oMath>
                 </a14:m>
                 <a:r>
-                  <a:rPr lang="en-US" sz="2000" dirty="0">
+                  <a:rPr lang="en-US" sz="2400" dirty="0">
                     <a:solidFill>
                       <a:schemeClr val="accent6">
                         <a:lumMod val="60000"/>
@@ -9834,7 +11785,7 @@
                     <m:d>
                       <m:dPr>
                         <m:ctrlPr>
-                          <a:rPr lang="en-US" sz="2000" i="1">
+                          <a:rPr lang="en-US" sz="2400" i="1">
                             <a:solidFill>
                               <a:schemeClr val="accent6">
                                 <a:lumMod val="60000"/>
@@ -9849,7 +11800,7 @@
                         <m:f>
                           <m:fPr>
                             <m:ctrlPr>
-                              <a:rPr lang="en-US" sz="2000" i="1">
+                              <a:rPr lang="en-US" sz="2400" i="1">
                                 <a:solidFill>
                                   <a:schemeClr val="accent6">
                                     <a:lumMod val="60000"/>
@@ -9862,7 +11813,7 @@
                           </m:fPr>
                           <m:num>
                             <m:r>
-                              <a:rPr lang="en-US" sz="2000" b="0" i="1" smtClean="0">
+                              <a:rPr lang="en-US" sz="2400" b="0" i="1" smtClean="0">
                                 <a:solidFill>
                                   <a:schemeClr val="accent6">
                                     <a:lumMod val="60000"/>
@@ -9879,7 +11830,7 @@
                               <m:radPr>
                                 <m:degHide m:val="on"/>
                                 <m:ctrlPr>
-                                  <a:rPr lang="en-US" sz="2000" i="1">
+                                  <a:rPr lang="en-US" sz="2400" i="1">
                                     <a:solidFill>
                                       <a:schemeClr val="accent6">
                                         <a:lumMod val="60000"/>
@@ -9893,7 +11844,7 @@
                               <m:deg/>
                               <m:e>
                                 <m:r>
-                                  <a:rPr lang="en-US" sz="2000" i="1">
+                                  <a:rPr lang="en-US" sz="2400" i="1">
                                     <a:solidFill>
                                       <a:schemeClr val="accent6">
                                         <a:lumMod val="60000"/>
@@ -9912,7 +11863,7 @@
                     </m:d>
                   </m:oMath>
                 </a14:m>
-                <a:endParaRPr lang="en-US" sz="2000" dirty="0">
+                <a:endParaRPr lang="en-US" sz="2400" dirty="0">
                   <a:solidFill>
                     <a:schemeClr val="accent6">
                       <a:lumMod val="60000"/>
@@ -10011,7 +11962,7 @@
             </p:txBody>
           </p:sp>
         </mc:Choice>
-        <mc:Fallback xmlns="">
+        <mc:Fallback>
           <p:sp>
             <p:nvSpPr>
               <p:cNvPr id="10" name="TextBox 9">
@@ -10029,7 +11980,7 @@
             <p:spPr>
               <a:xfrm>
                 <a:off x="173736" y="686973"/>
-                <a:ext cx="10177272" cy="2730235"/>
+                <a:ext cx="10177272" cy="2826864"/>
               </a:xfrm>
               <a:prstGeom prst="rect">
                 <a:avLst/>
@@ -10037,7 +11988,7 @@
               <a:blipFill>
                 <a:blip r:embed="rId2"/>
                 <a:stretch>
-                  <a:fillRect l="-659" t="-1563"/>
+                  <a:fillRect l="-659" t="-1512"/>
                 </a:stretch>
               </a:blipFill>
             </p:spPr>
@@ -10078,8 +12029,8 @@
         </p:blipFill>
         <p:spPr>
           <a:xfrm>
-            <a:off x="466345" y="3022175"/>
-            <a:ext cx="4489991" cy="636455"/>
+            <a:off x="466345" y="3232487"/>
+            <a:ext cx="4995241" cy="708074"/>
           </a:xfrm>
           <a:prstGeom prst="rect">
             <a:avLst/>
@@ -10108,8 +12059,8 @@
         </p:blipFill>
         <p:spPr>
           <a:xfrm>
-            <a:off x="414038" y="3910107"/>
-            <a:ext cx="4489991" cy="484110"/>
+            <a:off x="414038" y="4120419"/>
+            <a:ext cx="4995241" cy="538586"/>
           </a:xfrm>
           <a:prstGeom prst="rect">
             <a:avLst/>
@@ -10138,7 +12089,7 @@
         </p:blipFill>
         <p:spPr>
           <a:xfrm>
-            <a:off x="6327338" y="2984381"/>
+            <a:off x="6327338" y="3212981"/>
             <a:ext cx="4901106" cy="650793"/>
           </a:xfrm>
           <a:prstGeom prst="rect">
@@ -10168,7 +12119,7 @@
         </p:blipFill>
         <p:spPr>
           <a:xfrm>
-            <a:off x="6324641" y="3853163"/>
+            <a:off x="6324641" y="4081763"/>
             <a:ext cx="4995243" cy="538586"/>
           </a:xfrm>
           <a:prstGeom prst="rect">
@@ -10236,7 +12187,7 @@
         </p:blipFill>
         <p:spPr>
           <a:xfrm>
-            <a:off x="3822192" y="4754517"/>
+            <a:off x="3822192" y="4797163"/>
             <a:ext cx="3688751" cy="1948670"/>
           </a:xfrm>
           <a:prstGeom prst="rect">
@@ -10332,14 +12283,14 @@
           <p:nvPr>
             <p:extLst>
               <p:ext uri="{D42A27DB-BD31-4B8C-83A1-F6EECF244321}">
-                <p14:modId xmlns:p14="http://schemas.microsoft.com/office/powerpoint/2010/main" val="176315085"/>
+                <p14:modId xmlns:p14="http://schemas.microsoft.com/office/powerpoint/2010/main" val="3892231647"/>
               </p:ext>
             </p:extLst>
           </p:nvPr>
         </p:nvGraphicFramePr>
         <p:xfrm>
           <a:off x="137160" y="1644135"/>
-          <a:ext cx="9985248" cy="1463040"/>
+          <a:ext cx="9985248" cy="1889760"/>
         </p:xfrm>
         <a:graphic>
           <a:graphicData uri="http://schemas.openxmlformats.org/drawingml/2006/table">
@@ -10378,7 +12329,7 @@
                         <a:buNone/>
                       </a:pPr>
                       <a:r>
-                        <a:rPr lang="en-US" b="1" u="sng" dirty="0">
+                        <a:rPr lang="en-US" sz="2000" b="1" u="sng" dirty="0">
                           <a:solidFill>
                             <a:schemeClr val="accent6">
                               <a:lumMod val="60000"/>
@@ -10415,7 +12366,7 @@
                         <a:buNone/>
                       </a:pPr>
                       <a:r>
-                        <a:rPr lang="en-US" b="1" u="sng" dirty="0">
+                        <a:rPr lang="en-US" sz="2000" b="1" u="sng" dirty="0">
                           <a:solidFill>
                             <a:schemeClr val="accent6">
                               <a:lumMod val="60000"/>
@@ -10452,7 +12403,7 @@
                         <a:buNone/>
                       </a:pPr>
                       <a:r>
-                        <a:rPr lang="en-US" b="1" u="sng" dirty="0">
+                        <a:rPr lang="en-US" sz="2000" b="1" u="sng" dirty="0">
                           <a:solidFill>
                             <a:schemeClr val="accent6">
                               <a:lumMod val="60000"/>
@@ -10496,7 +12447,7 @@
                         <a:buNone/>
                       </a:pPr>
                       <a:r>
-                        <a:rPr lang="en-US" dirty="0">
+                        <a:rPr lang="en-US" sz="2000" dirty="0">
                           <a:solidFill>
                             <a:schemeClr val="accent6">
                               <a:lumMod val="60000"/>
@@ -10533,7 +12484,7 @@
                         <a:buNone/>
                       </a:pPr>
                       <a:r>
-                        <a:rPr lang="en-US" dirty="0">
+                        <a:rPr lang="en-US" sz="2000" dirty="0">
                           <a:solidFill>
                             <a:schemeClr val="accent6">
                               <a:lumMod val="60000"/>
@@ -10570,7 +12521,7 @@
                         <a:buNone/>
                       </a:pPr>
                       <a:r>
-                        <a:rPr lang="en-US" dirty="0">
+                        <a:rPr lang="en-US" sz="2000" dirty="0">
                           <a:solidFill>
                             <a:schemeClr val="accent6">
                               <a:lumMod val="60000"/>
@@ -10614,7 +12565,7 @@
                         <a:buNone/>
                       </a:pPr>
                       <a:r>
-                        <a:rPr lang="en-US" b="1" dirty="0">
+                        <a:rPr lang="en-US" sz="2000" b="1" dirty="0">
                           <a:solidFill>
                             <a:schemeClr val="accent4">
                               <a:lumMod val="60000"/>
@@ -10651,7 +12602,7 @@
                         <a:buNone/>
                       </a:pPr>
                       <a:r>
-                        <a:rPr lang="en-US" b="1" dirty="0">
+                        <a:rPr lang="en-US" sz="2000" b="1" dirty="0">
                           <a:solidFill>
                             <a:schemeClr val="accent4">
                               <a:lumMod val="60000"/>
@@ -10688,7 +12639,7 @@
                         <a:buNone/>
                       </a:pPr>
                       <a:r>
-                        <a:rPr lang="en-US" b="1" dirty="0">
+                        <a:rPr lang="en-US" sz="2000" b="1" dirty="0">
                           <a:solidFill>
                             <a:schemeClr val="accent4">
                               <a:lumMod val="60000"/>
@@ -10732,7 +12683,7 @@
                         <a:buNone/>
                       </a:pPr>
                       <a:r>
-                        <a:rPr lang="en-US">
+                        <a:rPr lang="en-US" sz="2000" dirty="0">
                           <a:solidFill>
                             <a:schemeClr val="accent6">
                               <a:lumMod val="60000"/>
@@ -10769,7 +12720,7 @@
                         <a:buNone/>
                       </a:pPr>
                       <a:r>
-                        <a:rPr lang="en-US">
+                        <a:rPr lang="en-US" sz="2000" dirty="0">
                           <a:solidFill>
                             <a:schemeClr val="accent6">
                               <a:lumMod val="60000"/>
@@ -10806,7 +12757,7 @@
                         <a:buNone/>
                       </a:pPr>
                       <a:r>
-                        <a:rPr lang="en-US" dirty="0">
+                        <a:rPr lang="en-US" sz="2000" dirty="0">
                           <a:solidFill>
                             <a:schemeClr val="accent6">
                               <a:lumMod val="60000"/>
@@ -10919,7 +12870,7 @@
         </p:blipFill>
         <p:spPr>
           <a:xfrm>
-            <a:off x="2132824" y="3502152"/>
+            <a:off x="2123680" y="3588077"/>
             <a:ext cx="5658640" cy="3115110"/>
           </a:xfrm>
           <a:prstGeom prst="rect">
@@ -10963,639 +12914,6 @@
           <a:chExt cx="0" cy="0"/>
         </a:xfrm>
       </p:grpSpPr>
-      <mc:AlternateContent xmlns:mc="http://schemas.openxmlformats.org/markup-compatibility/2006" xmlns:a14="http://schemas.microsoft.com/office/drawing/2010/main">
-        <mc:Choice Requires="a14">
-          <p:sp>
-            <p:nvSpPr>
-              <p:cNvPr id="8" name="Content Placeholder 7">
-                <a:extLst>
-                  <a:ext uri="{FF2B5EF4-FFF2-40B4-BE49-F238E27FC236}">
-                    <a16:creationId xmlns:a16="http://schemas.microsoft.com/office/drawing/2014/main" id="{8587F7D7-51E3-D7A7-B671-DA048CBF2F6F}"/>
-                  </a:ext>
-                </a:extLst>
-              </p:cNvPr>
-              <p:cNvSpPr>
-                <a:spLocks noGrp="1"/>
-              </p:cNvSpPr>
-              <p:nvPr>
-                <p:ph idx="1"/>
-              </p:nvPr>
-            </p:nvSpPr>
-            <p:spPr>
-              <a:xfrm>
-                <a:off x="128016" y="838071"/>
-                <a:ext cx="11978640" cy="5764531"/>
-              </a:xfrm>
-            </p:spPr>
-            <p:txBody>
-              <a:bodyPr>
-                <a:normAutofit fontScale="70000" lnSpcReduction="20000"/>
-              </a:bodyPr>
-              <a:lstStyle/>
-              <a:p>
-                <a:pPr marL="0" indent="0">
-                  <a:buNone/>
-                </a:pPr>
-                <a:r>
-                  <a:rPr lang="en-US" dirty="0"/>
-                  <a:t>Problem: A factory wants to find average weight </a:t>
-                </a:r>
-                <a14:m>
-                  <m:oMath xmlns:m="http://schemas.openxmlformats.org/officeDocument/2006/math">
-                    <m:r>
-                      <a:rPr lang="en-US" i="1">
-                        <a:latin typeface="Cambria Math" panose="02040503050406030204" pitchFamily="18" charset="0"/>
-                      </a:rPr>
-                      <m:t>𝜇</m:t>
-                    </m:r>
-                  </m:oMath>
-                </a14:m>
-                <a:r>
-                  <a:rPr lang="en-US" dirty="0"/>
-                  <a:t> of a packaged product. You take a random sample of </a:t>
-                </a:r>
-                <a14:m>
-                  <m:oMath xmlns:m="http://schemas.openxmlformats.org/officeDocument/2006/math">
-                    <m:r>
-                      <a:rPr lang="en-US" i="1">
-                        <a:latin typeface="Cambria Math" panose="02040503050406030204" pitchFamily="18" charset="0"/>
-                      </a:rPr>
-                      <m:t>𝑛</m:t>
-                    </m:r>
-                    <m:r>
-                      <a:rPr lang="en-US">
-                        <a:latin typeface="Cambria Math" panose="02040503050406030204" pitchFamily="18" charset="0"/>
-                      </a:rPr>
-                      <m:t>=</m:t>
-                    </m:r>
-                    <m:r>
-                      <a:rPr lang="en-US">
-                        <a:latin typeface="Cambria Math" panose="02040503050406030204" pitchFamily="18" charset="0"/>
-                      </a:rPr>
-                      <m:t>100</m:t>
-                    </m:r>
-                  </m:oMath>
-                </a14:m>
-                <a:r>
-                  <a:rPr lang="en-US" dirty="0"/>
-                  <a:t> packages and find the </a:t>
-                </a:r>
-                <a:r>
-                  <a:rPr lang="en-US" b="1" dirty="0"/>
-                  <a:t>sample mean</a:t>
-                </a:r>
-                <a:r>
-                  <a:rPr lang="en-US" dirty="0"/>
-                  <a:t> </a:t>
-                </a:r>
-                <a14:m>
-                  <m:oMath xmlns:m="http://schemas.openxmlformats.org/officeDocument/2006/math">
-                    <m:limUpp>
-                      <m:limUppPr>
-                        <m:ctrlPr>
-                          <a:rPr lang="ar-AE" i="1">
-                            <a:latin typeface="Cambria Math" panose="02040503050406030204" pitchFamily="18" charset="0"/>
-                          </a:rPr>
-                        </m:ctrlPr>
-                      </m:limUppPr>
-                      <m:e>
-                        <m:r>
-                          <a:rPr lang="ar-AE" i="1">
-                            <a:latin typeface="Cambria Math" panose="02040503050406030204" pitchFamily="18" charset="0"/>
-                          </a:rPr>
-                          <m:t>𝑥</m:t>
-                        </m:r>
-                      </m:e>
-                      <m:lim>
-                        <m:r>
-                          <a:rPr lang="ar-AE">
-                            <a:latin typeface="Cambria Math" panose="02040503050406030204" pitchFamily="18" charset="0"/>
-                          </a:rPr>
-                          <m:t>ˉ</m:t>
-                        </m:r>
-                      </m:lim>
-                    </m:limUpp>
-                    <m:r>
-                      <a:rPr lang="ar-AE">
-                        <a:latin typeface="Cambria Math" panose="02040503050406030204" pitchFamily="18" charset="0"/>
-                      </a:rPr>
-                      <m:t>=</m:t>
-                    </m:r>
-                    <m:r>
-                      <a:rPr lang="ar-AE">
-                        <a:latin typeface="Cambria Math" panose="02040503050406030204" pitchFamily="18" charset="0"/>
-                      </a:rPr>
-                      <m:t>50</m:t>
-                    </m:r>
-                  </m:oMath>
-                </a14:m>
-                <a:r>
-                  <a:rPr lang="en-US" dirty="0"/>
-                  <a:t> grams. The </a:t>
-                </a:r>
-                <a:r>
-                  <a:rPr lang="en-US" b="1" dirty="0">
-                    <a:solidFill>
-                      <a:schemeClr val="accent4">
-                        <a:lumMod val="60000"/>
-                        <a:lumOff val="40000"/>
-                      </a:schemeClr>
-                    </a:solidFill>
-                  </a:rPr>
-                  <a:t>population</a:t>
-                </a:r>
-                <a:r>
-                  <a:rPr lang="en-US" dirty="0"/>
-                  <a:t> standard deviation is known to be </a:t>
-                </a:r>
-                <a14:m>
-                  <m:oMath xmlns:m="http://schemas.openxmlformats.org/officeDocument/2006/math">
-                    <m:r>
-                      <a:rPr lang="en-US" i="1">
-                        <a:latin typeface="Cambria Math" panose="02040503050406030204" pitchFamily="18" charset="0"/>
-                      </a:rPr>
-                      <m:t>𝜎</m:t>
-                    </m:r>
-                    <m:r>
-                      <a:rPr lang="en-US">
-                        <a:latin typeface="Cambria Math" panose="02040503050406030204" pitchFamily="18" charset="0"/>
-                      </a:rPr>
-                      <m:t>=</m:t>
-                    </m:r>
-                    <m:r>
-                      <a:rPr lang="en-US">
-                        <a:latin typeface="Cambria Math" panose="02040503050406030204" pitchFamily="18" charset="0"/>
-                      </a:rPr>
-                      <m:t>8</m:t>
-                    </m:r>
-                  </m:oMath>
-                </a14:m>
-                <a:r>
-                  <a:rPr lang="en-US" dirty="0"/>
-                  <a:t> grams. </a:t>
-                </a:r>
-              </a:p>
-              <a:p>
-                <a:pPr marL="0" indent="0">
-                  <a:buNone/>
-                </a:pPr>
-                <a:r>
-                  <a:rPr lang="en-US" dirty="0"/>
-                  <a:t>Find a </a:t>
-                </a:r>
-                <a:r>
-                  <a:rPr lang="en-US" b="1" dirty="0"/>
-                  <a:t>95% confidence interval</a:t>
-                </a:r>
-                <a:r>
-                  <a:rPr lang="en-US" dirty="0"/>
-                  <a:t> for the true mean weight.</a:t>
-                </a:r>
-              </a:p>
-              <a:p>
-                <a:pPr marL="0" indent="0">
-                  <a:buNone/>
-                </a:pPr>
-                <a:endParaRPr lang="en-US" dirty="0"/>
-              </a:p>
-              <a:p>
-                <a:pPr marL="0" indent="0">
-                  <a:buNone/>
-                </a:pPr>
-                <a:r>
-                  <a:rPr lang="en-US" dirty="0"/>
-                  <a:t>Ans: </a:t>
-                </a:r>
-              </a:p>
-              <a:p>
-                <a:pPr marL="0" indent="0">
-                  <a:buNone/>
-                </a:pPr>
-                <a:r>
-                  <a:rPr lang="en-US" b="1" dirty="0"/>
-                  <a:t>Given:</a:t>
-                </a:r>
-                <a14:m>
-                  <m:oMath xmlns:m="http://schemas.openxmlformats.org/officeDocument/2006/math">
-                    <m:r>
-                      <a:rPr lang="en-US" b="1" i="0" smtClean="0">
-                        <a:latin typeface="Cambria Math" panose="02040503050406030204" pitchFamily="18" charset="0"/>
-                      </a:rPr>
-                      <m:t> </m:t>
-                    </m:r>
-                    <m:r>
-                      <a:rPr lang="en-US" i="1">
-                        <a:latin typeface="Cambria Math" panose="02040503050406030204" pitchFamily="18" charset="0"/>
-                      </a:rPr>
-                      <m:t>𝑛</m:t>
-                    </m:r>
-                    <m:r>
-                      <a:rPr lang="en-US">
-                        <a:latin typeface="Cambria Math" panose="02040503050406030204" pitchFamily="18" charset="0"/>
-                      </a:rPr>
-                      <m:t>=</m:t>
-                    </m:r>
-                    <m:r>
-                      <a:rPr lang="en-US">
-                        <a:latin typeface="Cambria Math" panose="02040503050406030204" pitchFamily="18" charset="0"/>
-                      </a:rPr>
-                      <m:t>100</m:t>
-                    </m:r>
-                  </m:oMath>
-                </a14:m>
-                <a:r>
-                  <a:rPr lang="en-US" dirty="0"/>
-                  <a:t>, </a:t>
-                </a:r>
-                <a14:m>
-                  <m:oMath xmlns:m="http://schemas.openxmlformats.org/officeDocument/2006/math">
-                    <m:limUpp>
-                      <m:limUppPr>
-                        <m:ctrlPr>
-                          <a:rPr lang="ar-AE" i="1">
-                            <a:latin typeface="Cambria Math" panose="02040503050406030204" pitchFamily="18" charset="0"/>
-                          </a:rPr>
-                        </m:ctrlPr>
-                      </m:limUppPr>
-                      <m:e>
-                        <m:r>
-                          <a:rPr lang="ar-AE" i="1">
-                            <a:latin typeface="Cambria Math" panose="02040503050406030204" pitchFamily="18" charset="0"/>
-                          </a:rPr>
-                          <m:t>𝑥</m:t>
-                        </m:r>
-                      </m:e>
-                      <m:lim>
-                        <m:r>
-                          <a:rPr lang="ar-AE">
-                            <a:latin typeface="Cambria Math" panose="02040503050406030204" pitchFamily="18" charset="0"/>
-                          </a:rPr>
-                          <m:t>ˉ</m:t>
-                        </m:r>
-                      </m:lim>
-                    </m:limUpp>
-                    <m:r>
-                      <a:rPr lang="ar-AE">
-                        <a:latin typeface="Cambria Math" panose="02040503050406030204" pitchFamily="18" charset="0"/>
-                      </a:rPr>
-                      <m:t>=</m:t>
-                    </m:r>
-                    <m:r>
-                      <a:rPr lang="ar-AE">
-                        <a:latin typeface="Cambria Math" panose="02040503050406030204" pitchFamily="18" charset="0"/>
-                      </a:rPr>
-                      <m:t>50</m:t>
-                    </m:r>
-                  </m:oMath>
-                </a14:m>
-                <a:r>
-                  <a:rPr lang="en-US" dirty="0"/>
-                  <a:t> g, </a:t>
-                </a:r>
-                <a14:m>
-                  <m:oMath xmlns:m="http://schemas.openxmlformats.org/officeDocument/2006/math">
-                    <m:r>
-                      <a:rPr lang="en-US" i="1">
-                        <a:latin typeface="Cambria Math" panose="02040503050406030204" pitchFamily="18" charset="0"/>
-                      </a:rPr>
-                      <m:t>𝜎</m:t>
-                    </m:r>
-                    <m:r>
-                      <a:rPr lang="en-US">
-                        <a:latin typeface="Cambria Math" panose="02040503050406030204" pitchFamily="18" charset="0"/>
-                      </a:rPr>
-                      <m:t>=</m:t>
-                    </m:r>
-                    <m:r>
-                      <a:rPr lang="en-US">
-                        <a:latin typeface="Cambria Math" panose="02040503050406030204" pitchFamily="18" charset="0"/>
-                      </a:rPr>
-                      <m:t>8</m:t>
-                    </m:r>
-                  </m:oMath>
-                </a14:m>
-                <a:r>
-                  <a:rPr lang="en-US" dirty="0"/>
-                  <a:t> g, Confidence level = 95%</a:t>
-                </a:r>
-              </a:p>
-              <a:p>
-                <a:pPr marL="0" indent="0">
-                  <a:buNone/>
-                </a:pPr>
-                <a:r>
-                  <a:rPr lang="en-US" dirty="0"/>
-                  <a:t>1. Since we know pop. std dev. </a:t>
-                </a:r>
-                <a14:m>
-                  <m:oMath xmlns:m="http://schemas.openxmlformats.org/officeDocument/2006/math">
-                    <m:r>
-                      <a:rPr lang="en-US" i="1">
-                        <a:latin typeface="Cambria Math" panose="02040503050406030204" pitchFamily="18" charset="0"/>
-                      </a:rPr>
-                      <m:t>𝜎</m:t>
-                    </m:r>
-                    <m:r>
-                      <a:rPr lang="en-US" i="1">
-                        <a:latin typeface="Cambria Math" panose="02040503050406030204" pitchFamily="18" charset="0"/>
-                      </a:rPr>
-                      <m:t> </m:t>
-                    </m:r>
-                  </m:oMath>
-                </a14:m>
-                <a:r>
-                  <a:rPr lang="en-US" dirty="0"/>
-                  <a:t>, we use z-distribution. Critical z value for 95%: </a:t>
-                </a:r>
-                <a14:m>
-                  <m:oMath xmlns:m="http://schemas.openxmlformats.org/officeDocument/2006/math">
-                    <m:r>
-                      <a:rPr lang="en-US" b="1" i="0" smtClean="0">
-                        <a:latin typeface="Cambria Math" panose="02040503050406030204" pitchFamily="18" charset="0"/>
-                      </a:rPr>
-                      <m:t> </m:t>
-                    </m:r>
-                    <m:r>
-                      <a:rPr lang="ar-AE" i="1">
-                        <a:latin typeface="Cambria Math" panose="02040503050406030204" pitchFamily="18" charset="0"/>
-                      </a:rPr>
-                      <m:t>𝑧</m:t>
-                    </m:r>
-                    <m:r>
-                      <a:rPr lang="ar-AE">
-                        <a:latin typeface="Cambria Math" panose="02040503050406030204" pitchFamily="18" charset="0"/>
-                      </a:rPr>
-                      <m:t>=</m:t>
-                    </m:r>
-                    <m:r>
-                      <a:rPr lang="ar-AE">
-                        <a:latin typeface="Cambria Math" panose="02040503050406030204" pitchFamily="18" charset="0"/>
-                      </a:rPr>
-                      <m:t>1</m:t>
-                    </m:r>
-                    <m:r>
-                      <a:rPr lang="ar-AE">
-                        <a:latin typeface="Cambria Math" panose="02040503050406030204" pitchFamily="18" charset="0"/>
-                      </a:rPr>
-                      <m:t>.</m:t>
-                    </m:r>
-                    <m:r>
-                      <a:rPr lang="ar-AE">
-                        <a:latin typeface="Cambria Math" panose="02040503050406030204" pitchFamily="18" charset="0"/>
-                      </a:rPr>
-                      <m:t>96</m:t>
-                    </m:r>
-                  </m:oMath>
-                </a14:m>
-                <a:endParaRPr lang="en-US" dirty="0"/>
-              </a:p>
-              <a:p>
-                <a:pPr marL="0" indent="0">
-                  <a:buNone/>
-                </a:pPr>
-                <a:r>
-                  <a:rPr lang="en-US" dirty="0"/>
-                  <a:t>2. Compute the margin of error (ME): </a:t>
-                </a:r>
-                <a14:m>
-                  <m:oMath xmlns:m="http://schemas.openxmlformats.org/officeDocument/2006/math">
-                    <m:r>
-                      <a:rPr lang="en-US" i="1">
-                        <a:latin typeface="Cambria Math" panose="02040503050406030204" pitchFamily="18" charset="0"/>
-                      </a:rPr>
-                      <m:t>𝑧</m:t>
-                    </m:r>
-                    <m:d>
-                      <m:dPr>
-                        <m:ctrlPr>
-                          <a:rPr lang="en-US" i="1">
-                            <a:latin typeface="Cambria Math" panose="02040503050406030204" pitchFamily="18" charset="0"/>
-                          </a:rPr>
-                        </m:ctrlPr>
-                      </m:dPr>
-                      <m:e>
-                        <m:f>
-                          <m:fPr>
-                            <m:ctrlPr>
-                              <a:rPr lang="en-US" i="1">
-                                <a:latin typeface="Cambria Math" panose="02040503050406030204" pitchFamily="18" charset="0"/>
-                              </a:rPr>
-                            </m:ctrlPr>
-                          </m:fPr>
-                          <m:num>
-                            <m:r>
-                              <a:rPr lang="en-US" i="1">
-                                <a:latin typeface="Cambria Math" panose="02040503050406030204" pitchFamily="18" charset="0"/>
-                              </a:rPr>
-                              <m:t>𝜎</m:t>
-                            </m:r>
-                          </m:num>
-                          <m:den>
-                            <m:rad>
-                              <m:radPr>
-                                <m:degHide m:val="on"/>
-                                <m:ctrlPr>
-                                  <a:rPr lang="en-US" i="1">
-                                    <a:latin typeface="Cambria Math" panose="02040503050406030204" pitchFamily="18" charset="0"/>
-                                  </a:rPr>
-                                </m:ctrlPr>
-                              </m:radPr>
-                              <m:deg/>
-                              <m:e>
-                                <m:r>
-                                  <a:rPr lang="en-US" i="1">
-                                    <a:latin typeface="Cambria Math" panose="02040503050406030204" pitchFamily="18" charset="0"/>
-                                  </a:rPr>
-                                  <m:t>𝑛</m:t>
-                                </m:r>
-                              </m:e>
-                            </m:rad>
-                          </m:den>
-                        </m:f>
-                      </m:e>
-                    </m:d>
-                  </m:oMath>
-                </a14:m>
-                <a:r>
-                  <a:rPr lang="en-US" dirty="0"/>
-                  <a:t>  = 1.96 x (8/</a:t>
-                </a:r>
-                <a14:m>
-                  <m:oMath xmlns:m="http://schemas.openxmlformats.org/officeDocument/2006/math">
-                    <m:rad>
-                      <m:radPr>
-                        <m:degHide m:val="on"/>
-                        <m:ctrlPr>
-                          <a:rPr lang="en-US" i="1" smtClean="0">
-                            <a:latin typeface="Cambria Math" panose="02040503050406030204" pitchFamily="18" charset="0"/>
-                          </a:rPr>
-                        </m:ctrlPr>
-                      </m:radPr>
-                      <m:deg/>
-                      <m:e>
-                        <m:r>
-                          <a:rPr lang="en-US" smtClean="0">
-                            <a:latin typeface="Cambria Math" panose="02040503050406030204" pitchFamily="18" charset="0"/>
-                          </a:rPr>
-                          <m:t>100</m:t>
-                        </m:r>
-                      </m:e>
-                    </m:rad>
-                  </m:oMath>
-                </a14:m>
-                <a:r>
-                  <a:rPr lang="en-US" dirty="0"/>
-                  <a:t>) = 1.568</a:t>
-                </a:r>
-              </a:p>
-              <a:p>
-                <a:pPr marL="0" indent="0">
-                  <a:buNone/>
-                </a:pPr>
-                <a:r>
-                  <a:rPr lang="en-US" dirty="0"/>
-                  <a:t>3. Construct the confidence interval:</a:t>
-                </a:r>
-              </a:p>
-              <a:p>
-                <a:pPr marL="0" indent="0">
-                  <a:buNone/>
-                </a:pPr>
-                <a:r>
-                  <a:rPr lang="en-US" dirty="0"/>
-                  <a:t>    50 – 1.568 &lt; </a:t>
-                </a:r>
-                <a:r>
-                  <a:rPr lang="el-GR" dirty="0"/>
-                  <a:t>μ</a:t>
-                </a:r>
-                <a:r>
-                  <a:rPr lang="en-US" dirty="0"/>
-                  <a:t> &lt; 50 + 1.568</a:t>
-                </a:r>
-              </a:p>
-              <a:p>
-                <a:pPr marL="0" indent="0">
-                  <a:buNone/>
-                </a:pPr>
-                <a:r>
-                  <a:rPr lang="en-US" dirty="0"/>
-                  <a:t> =&gt; 48.432 g &lt; </a:t>
-                </a:r>
-                <a:r>
-                  <a:rPr lang="el-GR" dirty="0"/>
-                  <a:t>μ</a:t>
-                </a:r>
-                <a:r>
-                  <a:rPr lang="en-US" dirty="0"/>
-                  <a:t> &lt; 51.568 g</a:t>
-                </a:r>
-              </a:p>
-              <a:p>
-                <a:pPr marL="0" indent="0">
-                  <a:buNone/>
-                </a:pPr>
-                <a:endParaRPr lang="en-US" dirty="0"/>
-              </a:p>
-              <a:p>
-                <a:pPr marL="0" indent="0">
-                  <a:buNone/>
-                </a:pPr>
-                <a:endParaRPr lang="en-US" dirty="0"/>
-              </a:p>
-              <a:p>
-                <a:pPr marL="0" indent="0">
-                  <a:buNone/>
-                </a:pPr>
-                <a:r>
-                  <a:rPr lang="en-US" dirty="0"/>
-                  <a:t>Interpretation: “We are 95% confident that the true mean weight </a:t>
-                </a:r>
-                <a14:m>
-                  <m:oMath xmlns:m="http://schemas.openxmlformats.org/officeDocument/2006/math">
-                    <m:r>
-                      <a:rPr lang="en-US" i="1">
-                        <a:latin typeface="Cambria Math" panose="02040503050406030204" pitchFamily="18" charset="0"/>
-                      </a:rPr>
-                      <m:t>𝜇</m:t>
-                    </m:r>
-                  </m:oMath>
-                </a14:m>
-                <a:r>
-                  <a:rPr lang="en-US" dirty="0"/>
-                  <a:t> of the packaged product lies between </a:t>
-                </a:r>
-                <a:r>
-                  <a:rPr lang="en-US" b="1" dirty="0"/>
-                  <a:t>48.43 g</a:t>
-                </a:r>
-                <a:r>
-                  <a:rPr lang="en-US" dirty="0"/>
-                  <a:t> and </a:t>
-                </a:r>
-                <a:r>
-                  <a:rPr lang="en-US" b="1" dirty="0"/>
-                  <a:t>51.57 g</a:t>
-                </a:r>
-                <a:r>
-                  <a:rPr lang="en-US" dirty="0"/>
-                  <a:t>.”</a:t>
-                </a:r>
-                <a:br>
-                  <a:rPr lang="en-US" dirty="0"/>
-                </a:br>
-                <a:r>
-                  <a:rPr lang="en-US" dirty="0"/>
-                  <a:t>(Meaning: the procedure used to create this interval will capture the true mean in about 95% of repeated random samples of size 100.)</a:t>
-                </a:r>
-              </a:p>
-            </p:txBody>
-          </p:sp>
-        </mc:Choice>
-        <mc:Fallback xmlns="">
-          <p:sp>
-            <p:nvSpPr>
-              <p:cNvPr id="8" name="Content Placeholder 7">
-                <a:extLst>
-                  <a:ext uri="{FF2B5EF4-FFF2-40B4-BE49-F238E27FC236}">
-                    <a16:creationId xmlns:a16="http://schemas.microsoft.com/office/drawing/2014/main" id="{8587F7D7-51E3-D7A7-B671-DA048CBF2F6F}"/>
-                  </a:ext>
-                </a:extLst>
-              </p:cNvPr>
-              <p:cNvSpPr>
-                <a:spLocks noGrp="1" noRot="1" noChangeAspect="1" noMove="1" noResize="1" noEditPoints="1" noAdjustHandles="1" noChangeArrowheads="1" noChangeShapeType="1" noTextEdit="1"/>
-              </p:cNvSpPr>
-              <p:nvPr>
-                <p:ph idx="1"/>
-              </p:nvPr>
-            </p:nvSpPr>
-            <p:spPr>
-              <a:xfrm>
-                <a:off x="128016" y="838071"/>
-                <a:ext cx="11978640" cy="5764531"/>
-              </a:xfrm>
-              <a:blipFill>
-                <a:blip r:embed="rId2"/>
-                <a:stretch>
-                  <a:fillRect l="-509" t="-1903" r="-407" b="-1057"/>
-                </a:stretch>
-              </a:blipFill>
-            </p:spPr>
-            <p:txBody>
-              <a:bodyPr/>
-              <a:lstStyle/>
-              <a:p>
-                <a:r>
-                  <a:rPr lang="en-US">
-                    <a:noFill/>
-                  </a:rPr>
-                  <a:t> </a:t>
-                </a:r>
-              </a:p>
-            </p:txBody>
-          </p:sp>
-        </mc:Fallback>
-      </mc:AlternateContent>
       <p:sp>
         <p:nvSpPr>
           <p:cNvPr id="6" name="Title 1">
@@ -11647,7 +12965,7 @@
           <p:nvPr/>
         </p:nvPicPr>
         <p:blipFill>
-          <a:blip r:embed="rId3"/>
+          <a:blip r:embed="rId2"/>
           <a:stretch>
             <a:fillRect/>
           </a:stretch>
@@ -11677,7 +12995,7 @@
           <p:nvPr/>
         </p:nvPicPr>
         <p:blipFill>
-          <a:blip r:embed="rId4"/>
+          <a:blip r:embed="rId3"/>
           <a:stretch>
             <a:fillRect/>
           </a:stretch>
@@ -11692,6 +13010,633 @@
           </a:prstGeom>
         </p:spPr>
       </p:pic>
+      <mc:AlternateContent xmlns:mc="http://schemas.openxmlformats.org/markup-compatibility/2006">
+        <mc:Choice xmlns:a14="http://schemas.microsoft.com/office/drawing/2010/main" Requires="a14">
+          <p:sp>
+            <p:nvSpPr>
+              <p:cNvPr id="3" name="TextBox 2">
+                <a:extLst>
+                  <a:ext uri="{FF2B5EF4-FFF2-40B4-BE49-F238E27FC236}">
+                    <a16:creationId xmlns:a16="http://schemas.microsoft.com/office/drawing/2014/main" id="{B67C4B24-197E-242C-5923-9DD20EB7576A}"/>
+                  </a:ext>
+                </a:extLst>
+              </p:cNvPr>
+              <p:cNvSpPr txBox="1"/>
+              <p:nvPr/>
+            </p:nvSpPr>
+            <p:spPr>
+              <a:xfrm>
+                <a:off x="365760" y="1186196"/>
+                <a:ext cx="11826240" cy="2417841"/>
+              </a:xfrm>
+              <a:prstGeom prst="rect">
+                <a:avLst/>
+              </a:prstGeom>
+              <a:noFill/>
+            </p:spPr>
+            <p:txBody>
+              <a:bodyPr wrap="square">
+                <a:spAutoFit/>
+              </a:bodyPr>
+              <a:lstStyle/>
+              <a:p>
+                <a:pPr marL="0" indent="0">
+                  <a:buNone/>
+                </a:pPr>
+                <a:r>
+                  <a:rPr lang="en-US" sz="2400" dirty="0">
+                    <a:solidFill>
+                      <a:schemeClr val="accent6">
+                        <a:lumMod val="60000"/>
+                        <a:lumOff val="40000"/>
+                      </a:schemeClr>
+                    </a:solidFill>
+                  </a:rPr>
+                  <a:t>Problem: </a:t>
+                </a:r>
+              </a:p>
+              <a:p>
+                <a:pPr marL="0" indent="0">
+                  <a:buNone/>
+                </a:pPr>
+                <a:r>
+                  <a:rPr lang="en-US" sz="2400" dirty="0">
+                    <a:solidFill>
+                      <a:schemeClr val="accent6">
+                        <a:lumMod val="60000"/>
+                        <a:lumOff val="40000"/>
+                      </a:schemeClr>
+                    </a:solidFill>
+                  </a:rPr>
+                  <a:t>A factory wants to find average weight </a:t>
+                </a:r>
+                <a14:m>
+                  <m:oMath xmlns:m="http://schemas.openxmlformats.org/officeDocument/2006/math">
+                    <m:r>
+                      <a:rPr lang="en-US" sz="2400" i="1">
+                        <a:solidFill>
+                          <a:schemeClr val="accent6">
+                            <a:lumMod val="60000"/>
+                            <a:lumOff val="40000"/>
+                          </a:schemeClr>
+                        </a:solidFill>
+                        <a:latin typeface="Cambria Math" panose="02040503050406030204" pitchFamily="18" charset="0"/>
+                      </a:rPr>
+                      <m:t>𝜇</m:t>
+                    </m:r>
+                  </m:oMath>
+                </a14:m>
+                <a:r>
+                  <a:rPr lang="en-US" sz="2400" dirty="0">
+                    <a:solidFill>
+                      <a:schemeClr val="accent6">
+                        <a:lumMod val="60000"/>
+                        <a:lumOff val="40000"/>
+                      </a:schemeClr>
+                    </a:solidFill>
+                  </a:rPr>
+                  <a:t> of a packaged product. </a:t>
+                </a:r>
+              </a:p>
+              <a:p>
+                <a:pPr marL="0" indent="0">
+                  <a:buNone/>
+                </a:pPr>
+                <a:r>
+                  <a:rPr lang="en-US" sz="2400" dirty="0">
+                    <a:solidFill>
+                      <a:schemeClr val="accent6">
+                        <a:lumMod val="60000"/>
+                        <a:lumOff val="40000"/>
+                      </a:schemeClr>
+                    </a:solidFill>
+                  </a:rPr>
+                  <a:t>You take a random sample of </a:t>
+                </a:r>
+                <a14:m>
+                  <m:oMath xmlns:m="http://schemas.openxmlformats.org/officeDocument/2006/math">
+                    <m:r>
+                      <a:rPr lang="en-US" sz="2400" i="1">
+                        <a:solidFill>
+                          <a:schemeClr val="accent6">
+                            <a:lumMod val="60000"/>
+                            <a:lumOff val="40000"/>
+                          </a:schemeClr>
+                        </a:solidFill>
+                        <a:latin typeface="Cambria Math" panose="02040503050406030204" pitchFamily="18" charset="0"/>
+                      </a:rPr>
+                      <m:t>𝑛</m:t>
+                    </m:r>
+                    <m:r>
+                      <a:rPr lang="en-US" sz="2400">
+                        <a:solidFill>
+                          <a:schemeClr val="accent6">
+                            <a:lumMod val="60000"/>
+                            <a:lumOff val="40000"/>
+                          </a:schemeClr>
+                        </a:solidFill>
+                        <a:latin typeface="Cambria Math" panose="02040503050406030204" pitchFamily="18" charset="0"/>
+                      </a:rPr>
+                      <m:t>=</m:t>
+                    </m:r>
+                    <m:r>
+                      <a:rPr lang="en-US" sz="2400">
+                        <a:solidFill>
+                          <a:schemeClr val="accent6">
+                            <a:lumMod val="60000"/>
+                            <a:lumOff val="40000"/>
+                          </a:schemeClr>
+                        </a:solidFill>
+                        <a:latin typeface="Cambria Math" panose="02040503050406030204" pitchFamily="18" charset="0"/>
+                      </a:rPr>
+                      <m:t>100</m:t>
+                    </m:r>
+                  </m:oMath>
+                </a14:m>
+                <a:r>
+                  <a:rPr lang="en-US" sz="2400" dirty="0">
+                    <a:solidFill>
+                      <a:schemeClr val="accent6">
+                        <a:lumMod val="60000"/>
+                        <a:lumOff val="40000"/>
+                      </a:schemeClr>
+                    </a:solidFill>
+                  </a:rPr>
+                  <a:t> packages and find the </a:t>
+                </a:r>
+                <a:r>
+                  <a:rPr lang="en-US" sz="2400" b="1" dirty="0">
+                    <a:solidFill>
+                      <a:schemeClr val="accent6">
+                        <a:lumMod val="60000"/>
+                        <a:lumOff val="40000"/>
+                      </a:schemeClr>
+                    </a:solidFill>
+                  </a:rPr>
+                  <a:t>sample mean</a:t>
+                </a:r>
+                <a:r>
+                  <a:rPr lang="en-US" sz="2400" dirty="0">
+                    <a:solidFill>
+                      <a:schemeClr val="accent6">
+                        <a:lumMod val="60000"/>
+                        <a:lumOff val="40000"/>
+                      </a:schemeClr>
+                    </a:solidFill>
+                  </a:rPr>
+                  <a:t> </a:t>
+                </a:r>
+                <a14:m>
+                  <m:oMath xmlns:m="http://schemas.openxmlformats.org/officeDocument/2006/math">
+                    <m:limUpp>
+                      <m:limUppPr>
+                        <m:ctrlPr>
+                          <a:rPr lang="ar-AE" sz="2400" i="1">
+                            <a:solidFill>
+                              <a:schemeClr val="accent6">
+                                <a:lumMod val="60000"/>
+                                <a:lumOff val="40000"/>
+                              </a:schemeClr>
+                            </a:solidFill>
+                            <a:latin typeface="Cambria Math" panose="02040503050406030204" pitchFamily="18" charset="0"/>
+                          </a:rPr>
+                        </m:ctrlPr>
+                      </m:limUppPr>
+                      <m:e>
+                        <m:r>
+                          <a:rPr lang="ar-AE" sz="2400" i="1">
+                            <a:solidFill>
+                              <a:schemeClr val="accent6">
+                                <a:lumMod val="60000"/>
+                                <a:lumOff val="40000"/>
+                              </a:schemeClr>
+                            </a:solidFill>
+                            <a:latin typeface="Cambria Math" panose="02040503050406030204" pitchFamily="18" charset="0"/>
+                          </a:rPr>
+                          <m:t>𝑥</m:t>
+                        </m:r>
+                      </m:e>
+                      <m:lim>
+                        <m:r>
+                          <a:rPr lang="ar-AE" sz="2400">
+                            <a:solidFill>
+                              <a:schemeClr val="accent6">
+                                <a:lumMod val="60000"/>
+                                <a:lumOff val="40000"/>
+                              </a:schemeClr>
+                            </a:solidFill>
+                            <a:latin typeface="Cambria Math" panose="02040503050406030204" pitchFamily="18" charset="0"/>
+                          </a:rPr>
+                          <m:t>ˉ</m:t>
+                        </m:r>
+                      </m:lim>
+                    </m:limUpp>
+                    <m:r>
+                      <a:rPr lang="ar-AE" sz="2400">
+                        <a:solidFill>
+                          <a:schemeClr val="accent6">
+                            <a:lumMod val="60000"/>
+                            <a:lumOff val="40000"/>
+                          </a:schemeClr>
+                        </a:solidFill>
+                        <a:latin typeface="Cambria Math" panose="02040503050406030204" pitchFamily="18" charset="0"/>
+                      </a:rPr>
+                      <m:t>=</m:t>
+                    </m:r>
+                    <m:r>
+                      <a:rPr lang="ar-AE" sz="2400">
+                        <a:solidFill>
+                          <a:schemeClr val="accent6">
+                            <a:lumMod val="60000"/>
+                            <a:lumOff val="40000"/>
+                          </a:schemeClr>
+                        </a:solidFill>
+                        <a:latin typeface="Cambria Math" panose="02040503050406030204" pitchFamily="18" charset="0"/>
+                      </a:rPr>
+                      <m:t>50</m:t>
+                    </m:r>
+                  </m:oMath>
+                </a14:m>
+                <a:r>
+                  <a:rPr lang="en-US" sz="2400" dirty="0">
+                    <a:solidFill>
+                      <a:schemeClr val="accent6">
+                        <a:lumMod val="60000"/>
+                        <a:lumOff val="40000"/>
+                      </a:schemeClr>
+                    </a:solidFill>
+                  </a:rPr>
+                  <a:t> grams. The </a:t>
+                </a:r>
+                <a:r>
+                  <a:rPr lang="en-US" sz="2400" b="1" dirty="0">
+                    <a:solidFill>
+                      <a:schemeClr val="accent6">
+                        <a:lumMod val="60000"/>
+                        <a:lumOff val="40000"/>
+                      </a:schemeClr>
+                    </a:solidFill>
+                  </a:rPr>
+                  <a:t>population</a:t>
+                </a:r>
+                <a:r>
+                  <a:rPr lang="en-US" sz="2400" dirty="0">
+                    <a:solidFill>
+                      <a:schemeClr val="accent6">
+                        <a:lumMod val="60000"/>
+                        <a:lumOff val="40000"/>
+                      </a:schemeClr>
+                    </a:solidFill>
+                  </a:rPr>
+                  <a:t> standard deviation is known to be </a:t>
+                </a:r>
+                <a14:m>
+                  <m:oMath xmlns:m="http://schemas.openxmlformats.org/officeDocument/2006/math">
+                    <m:r>
+                      <a:rPr lang="en-US" sz="2400" i="1">
+                        <a:solidFill>
+                          <a:schemeClr val="accent6">
+                            <a:lumMod val="60000"/>
+                            <a:lumOff val="40000"/>
+                          </a:schemeClr>
+                        </a:solidFill>
+                        <a:latin typeface="Cambria Math" panose="02040503050406030204" pitchFamily="18" charset="0"/>
+                      </a:rPr>
+                      <m:t>𝜎</m:t>
+                    </m:r>
+                    <m:r>
+                      <a:rPr lang="en-US" sz="2400">
+                        <a:solidFill>
+                          <a:schemeClr val="accent6">
+                            <a:lumMod val="60000"/>
+                            <a:lumOff val="40000"/>
+                          </a:schemeClr>
+                        </a:solidFill>
+                        <a:latin typeface="Cambria Math" panose="02040503050406030204" pitchFamily="18" charset="0"/>
+                      </a:rPr>
+                      <m:t>=</m:t>
+                    </m:r>
+                    <m:r>
+                      <a:rPr lang="en-US" sz="2400">
+                        <a:solidFill>
+                          <a:schemeClr val="accent6">
+                            <a:lumMod val="60000"/>
+                            <a:lumOff val="40000"/>
+                          </a:schemeClr>
+                        </a:solidFill>
+                        <a:latin typeface="Cambria Math" panose="02040503050406030204" pitchFamily="18" charset="0"/>
+                      </a:rPr>
+                      <m:t>8</m:t>
+                    </m:r>
+                  </m:oMath>
+                </a14:m>
+                <a:r>
+                  <a:rPr lang="en-US" sz="2400" dirty="0">
+                    <a:solidFill>
+                      <a:schemeClr val="accent6">
+                        <a:lumMod val="60000"/>
+                        <a:lumOff val="40000"/>
+                      </a:schemeClr>
+                    </a:solidFill>
+                  </a:rPr>
+                  <a:t> grams. </a:t>
+                </a:r>
+              </a:p>
+              <a:p>
+                <a:pPr marL="0" indent="0">
+                  <a:buNone/>
+                </a:pPr>
+                <a:endParaRPr lang="en-US" sz="2400" dirty="0">
+                  <a:solidFill>
+                    <a:schemeClr val="accent6">
+                      <a:lumMod val="60000"/>
+                      <a:lumOff val="40000"/>
+                    </a:schemeClr>
+                  </a:solidFill>
+                </a:endParaRPr>
+              </a:p>
+              <a:p>
+                <a:pPr marL="0" indent="0">
+                  <a:buNone/>
+                </a:pPr>
+                <a:r>
+                  <a:rPr lang="en-US" sz="2400" dirty="0">
+                    <a:solidFill>
+                      <a:schemeClr val="accent6">
+                        <a:lumMod val="60000"/>
+                        <a:lumOff val="40000"/>
+                      </a:schemeClr>
+                    </a:solidFill>
+                  </a:rPr>
+                  <a:t>Find a </a:t>
+                </a:r>
+                <a:r>
+                  <a:rPr lang="en-US" sz="2400" b="1" dirty="0">
+                    <a:solidFill>
+                      <a:schemeClr val="accent6">
+                        <a:lumMod val="60000"/>
+                        <a:lumOff val="40000"/>
+                      </a:schemeClr>
+                    </a:solidFill>
+                  </a:rPr>
+                  <a:t>95% confidence interval</a:t>
+                </a:r>
+                <a:r>
+                  <a:rPr lang="en-US" sz="2400" dirty="0">
+                    <a:solidFill>
+                      <a:schemeClr val="accent6">
+                        <a:lumMod val="60000"/>
+                        <a:lumOff val="40000"/>
+                      </a:schemeClr>
+                    </a:solidFill>
+                  </a:rPr>
+                  <a:t> for the true mean weight.</a:t>
+                </a:r>
+              </a:p>
+            </p:txBody>
+          </p:sp>
+        </mc:Choice>
+        <mc:Fallback>
+          <p:sp>
+            <p:nvSpPr>
+              <p:cNvPr id="3" name="TextBox 2">
+                <a:extLst>
+                  <a:ext uri="{FF2B5EF4-FFF2-40B4-BE49-F238E27FC236}">
+                    <a16:creationId xmlns:a16="http://schemas.microsoft.com/office/drawing/2014/main" id="{B67C4B24-197E-242C-5923-9DD20EB7576A}"/>
+                  </a:ext>
+                </a:extLst>
+              </p:cNvPr>
+              <p:cNvSpPr txBox="1">
+                <a:spLocks noRot="1" noChangeAspect="1" noMove="1" noResize="1" noEditPoints="1" noAdjustHandles="1" noChangeArrowheads="1" noChangeShapeType="1" noTextEdit="1"/>
+              </p:cNvSpPr>
+              <p:nvPr/>
+            </p:nvSpPr>
+            <p:spPr>
+              <a:xfrm>
+                <a:off x="365760" y="1186196"/>
+                <a:ext cx="11826240" cy="2417841"/>
+              </a:xfrm>
+              <a:prstGeom prst="rect">
+                <a:avLst/>
+              </a:prstGeom>
+              <a:blipFill>
+                <a:blip r:embed="rId4"/>
+                <a:stretch>
+                  <a:fillRect l="-773" t="-2020" b="-5051"/>
+                </a:stretch>
+              </a:blipFill>
+            </p:spPr>
+            <p:txBody>
+              <a:bodyPr/>
+              <a:lstStyle/>
+              <a:p>
+                <a:r>
+                  <a:rPr lang="en-US">
+                    <a:noFill/>
+                  </a:rPr>
+                  <a:t> </a:t>
+                </a:r>
+              </a:p>
+            </p:txBody>
+          </p:sp>
+        </mc:Fallback>
+      </mc:AlternateContent>
+      <p:sp>
+        <p:nvSpPr>
+          <p:cNvPr id="4" name="Oval 3">
+            <a:extLst>
+              <a:ext uri="{FF2B5EF4-FFF2-40B4-BE49-F238E27FC236}">
+                <a16:creationId xmlns:a16="http://schemas.microsoft.com/office/drawing/2014/main" id="{4044A1A2-F090-1A0E-30CA-B40D9F784314}"/>
+              </a:ext>
+            </a:extLst>
+          </p:cNvPr>
+          <p:cNvSpPr/>
+          <p:nvPr/>
+        </p:nvSpPr>
+        <p:spPr>
+          <a:xfrm>
+            <a:off x="1051560" y="3886200"/>
+            <a:ext cx="420624" cy="393192"/>
+          </a:xfrm>
+          <a:prstGeom prst="ellipse">
+            <a:avLst/>
+          </a:prstGeom>
+        </p:spPr>
+        <p:style>
+          <a:lnRef idx="2">
+            <a:schemeClr val="accent1">
+              <a:shade val="15000"/>
+            </a:schemeClr>
+          </a:lnRef>
+          <a:fillRef idx="1">
+            <a:schemeClr val="accent1"/>
+          </a:fillRef>
+          <a:effectRef idx="0">
+            <a:schemeClr val="accent1"/>
+          </a:effectRef>
+          <a:fontRef idx="minor">
+            <a:schemeClr val="lt1"/>
+          </a:fontRef>
+        </p:style>
+        <p:txBody>
+          <a:bodyPr rtlCol="0" anchor="ctr"/>
+          <a:lstStyle/>
+          <a:p>
+            <a:pPr algn="ctr"/>
+            <a:r>
+              <a:rPr lang="en-US" dirty="0"/>
+              <a:t>1</a:t>
+            </a:r>
+          </a:p>
+        </p:txBody>
+      </p:sp>
+      <p:sp>
+        <p:nvSpPr>
+          <p:cNvPr id="5" name="Oval 4">
+            <a:extLst>
+              <a:ext uri="{FF2B5EF4-FFF2-40B4-BE49-F238E27FC236}">
+                <a16:creationId xmlns:a16="http://schemas.microsoft.com/office/drawing/2014/main" id="{E2A1E669-F419-8BC4-D4F4-94505D2BEC2C}"/>
+              </a:ext>
+            </a:extLst>
+          </p:cNvPr>
+          <p:cNvSpPr/>
+          <p:nvPr/>
+        </p:nvSpPr>
+        <p:spPr>
+          <a:xfrm>
+            <a:off x="2036064" y="3922776"/>
+            <a:ext cx="420624" cy="393192"/>
+          </a:xfrm>
+          <a:prstGeom prst="ellipse">
+            <a:avLst/>
+          </a:prstGeom>
+        </p:spPr>
+        <p:style>
+          <a:lnRef idx="2">
+            <a:schemeClr val="accent1">
+              <a:shade val="15000"/>
+            </a:schemeClr>
+          </a:lnRef>
+          <a:fillRef idx="1">
+            <a:schemeClr val="accent1"/>
+          </a:fillRef>
+          <a:effectRef idx="0">
+            <a:schemeClr val="accent1"/>
+          </a:effectRef>
+          <a:fontRef idx="minor">
+            <a:schemeClr val="lt1"/>
+          </a:fontRef>
+        </p:style>
+        <p:txBody>
+          <a:bodyPr rtlCol="0" anchor="ctr"/>
+          <a:lstStyle/>
+          <a:p>
+            <a:pPr algn="ctr"/>
+            <a:r>
+              <a:rPr lang="en-US" dirty="0"/>
+              <a:t>2</a:t>
+            </a:r>
+          </a:p>
+        </p:txBody>
+      </p:sp>
+      <p:sp>
+        <p:nvSpPr>
+          <p:cNvPr id="9" name="Oval 8">
+            <a:extLst>
+              <a:ext uri="{FF2B5EF4-FFF2-40B4-BE49-F238E27FC236}">
+                <a16:creationId xmlns:a16="http://schemas.microsoft.com/office/drawing/2014/main" id="{7F376C89-44CF-12BF-0B54-58D7D273898A}"/>
+              </a:ext>
+            </a:extLst>
+          </p:cNvPr>
+          <p:cNvSpPr/>
+          <p:nvPr/>
+        </p:nvSpPr>
+        <p:spPr>
+          <a:xfrm>
+            <a:off x="3147213" y="3767328"/>
+            <a:ext cx="618744" cy="548640"/>
+          </a:xfrm>
+          <a:prstGeom prst="ellipse">
+            <a:avLst/>
+          </a:prstGeom>
+        </p:spPr>
+        <p:style>
+          <a:lnRef idx="2">
+            <a:schemeClr val="accent1">
+              <a:shade val="15000"/>
+            </a:schemeClr>
+          </a:lnRef>
+          <a:fillRef idx="1">
+            <a:schemeClr val="accent1"/>
+          </a:fillRef>
+          <a:effectRef idx="0">
+            <a:schemeClr val="accent1"/>
+          </a:effectRef>
+          <a:fontRef idx="minor">
+            <a:schemeClr val="lt1"/>
+          </a:fontRef>
+        </p:style>
+        <p:txBody>
+          <a:bodyPr rtlCol="0" anchor="ctr"/>
+          <a:lstStyle/>
+          <a:p>
+            <a:pPr algn="ctr"/>
+            <a:r>
+              <a:rPr lang="en-US" dirty="0"/>
+              <a:t>3</a:t>
+            </a:r>
+          </a:p>
+        </p:txBody>
+      </p:sp>
+      <p:sp>
+        <p:nvSpPr>
+          <p:cNvPr id="10" name="Oval 9">
+            <a:extLst>
+              <a:ext uri="{FF2B5EF4-FFF2-40B4-BE49-F238E27FC236}">
+                <a16:creationId xmlns:a16="http://schemas.microsoft.com/office/drawing/2014/main" id="{5A72AC6D-C68F-855D-60BF-852EDC025BD1}"/>
+              </a:ext>
+            </a:extLst>
+          </p:cNvPr>
+          <p:cNvSpPr/>
+          <p:nvPr/>
+        </p:nvSpPr>
+        <p:spPr>
+          <a:xfrm>
+            <a:off x="4974336" y="3822192"/>
+            <a:ext cx="892962" cy="548640"/>
+          </a:xfrm>
+          <a:prstGeom prst="ellipse">
+            <a:avLst/>
+          </a:prstGeom>
+        </p:spPr>
+        <p:style>
+          <a:lnRef idx="2">
+            <a:schemeClr val="accent1">
+              <a:shade val="15000"/>
+            </a:schemeClr>
+          </a:lnRef>
+          <a:fillRef idx="1">
+            <a:schemeClr val="accent1"/>
+          </a:fillRef>
+          <a:effectRef idx="0">
+            <a:schemeClr val="accent1"/>
+          </a:effectRef>
+          <a:fontRef idx="minor">
+            <a:schemeClr val="lt1"/>
+          </a:fontRef>
+        </p:style>
+        <p:txBody>
+          <a:bodyPr rtlCol="0" anchor="ctr"/>
+          <a:lstStyle/>
+          <a:p>
+            <a:pPr algn="ctr"/>
+            <a:r>
+              <a:rPr lang="en-US" dirty="0"/>
+              <a:t>100</a:t>
+            </a:r>
+          </a:p>
+        </p:txBody>
+      </p:sp>
     </p:spTree>
     <p:extLst>
       <p:ext uri="{BB962C8B-B14F-4D97-AF65-F5344CB8AC3E}">
